--- a/magnetic_sim/ANSYS/main/figures/Paper_fig_V3.pptx
+++ b/magnetic_sim/ANSYS/main/figures/Paper_fig_V3.pptx
@@ -6,21 +6,20 @@
   </p:sldMasterIdLst>
   <p:sldIdLst>
     <p:sldId id="256" r:id="rId2"/>
-    <p:sldId id="259" r:id="rId3"/>
-    <p:sldId id="258" r:id="rId4"/>
-    <p:sldId id="260" r:id="rId5"/>
-    <p:sldId id="262" r:id="rId6"/>
-    <p:sldId id="266" r:id="rId7"/>
-    <p:sldId id="267" r:id="rId8"/>
-    <p:sldId id="268" r:id="rId9"/>
-    <p:sldId id="270" r:id="rId10"/>
-    <p:sldId id="269" r:id="rId11"/>
-    <p:sldId id="271" r:id="rId12"/>
-    <p:sldId id="272" r:id="rId13"/>
-    <p:sldId id="273" r:id="rId14"/>
-    <p:sldId id="276" r:id="rId15"/>
-    <p:sldId id="274" r:id="rId16"/>
-    <p:sldId id="275" r:id="rId17"/>
+    <p:sldId id="258" r:id="rId3"/>
+    <p:sldId id="260" r:id="rId4"/>
+    <p:sldId id="262" r:id="rId5"/>
+    <p:sldId id="266" r:id="rId6"/>
+    <p:sldId id="267" r:id="rId7"/>
+    <p:sldId id="268" r:id="rId8"/>
+    <p:sldId id="270" r:id="rId9"/>
+    <p:sldId id="269" r:id="rId10"/>
+    <p:sldId id="271" r:id="rId11"/>
+    <p:sldId id="272" r:id="rId12"/>
+    <p:sldId id="273" r:id="rId13"/>
+    <p:sldId id="276" r:id="rId14"/>
+    <p:sldId id="274" r:id="rId15"/>
+    <p:sldId id="275" r:id="rId16"/>
   </p:sldIdLst>
   <p:sldSz cx="12192000" cy="6858000"/>
   <p:notesSz cx="6858000" cy="9144000"/>
@@ -3637,2159 +3636,6 @@
             </p:nvSpPr>
             <p:spPr>
               <a:xfrm>
-                <a:off x="8573024" y="570245"/>
-                <a:ext cx="3508909" cy="321563"/>
-              </a:xfrm>
-              <a:prstGeom prst="rect">
-                <a:avLst/>
-              </a:prstGeom>
-              <a:noFill/>
-            </p:spPr>
-            <p:txBody>
-              <a:bodyPr wrap="none" lIns="0" tIns="0" rIns="0" bIns="0" rtlCol="0">
-                <a:spAutoFit/>
-              </a:bodyPr>
-              <a:lstStyle/>
-              <a:p>
-                <a:pPr/>
-                <a14:m>
-                  <m:oMathPara xmlns:m="http://schemas.openxmlformats.org/officeDocument/2006/math">
-                    <m:oMathParaPr>
-                      <m:jc m:val="centerGroup"/>
-                    </m:oMathParaPr>
-                    <m:oMath xmlns:m="http://schemas.openxmlformats.org/officeDocument/2006/math">
-                      <m:r>
-                        <a:rPr lang="en-US" altLang="zh-TW" b="0" i="1" smtClean="0">
-                          <a:latin typeface="Cambria Math" panose="02040503050406030204" pitchFamily="18" charset="0"/>
-                        </a:rPr>
-                        <m:t>𝐶𝑎𝑙𝑖𝑏𝑟𝑎𝑡𝑒</m:t>
-                      </m:r>
-                      <m:r>
-                        <a:rPr lang="en-US" altLang="zh-TW" b="0" i="1" smtClean="0">
-                          <a:latin typeface="Cambria Math" panose="02040503050406030204" pitchFamily="18" charset="0"/>
-                        </a:rPr>
-                        <m:t> </m:t>
-                      </m:r>
-                      <m:r>
-                        <a:rPr lang="en-US" altLang="zh-TW" b="0" i="1" smtClean="0">
-                          <a:latin typeface="Cambria Math" panose="02040503050406030204" pitchFamily="18" charset="0"/>
-                        </a:rPr>
-                        <m:t>𝑚𝑜𝑑𝑒𝑙</m:t>
-                      </m:r>
-                      <m:r>
-                        <a:rPr lang="en-US" altLang="zh-TW" b="0" i="1" smtClean="0">
-                          <a:latin typeface="Cambria Math" panose="02040503050406030204" pitchFamily="18" charset="0"/>
-                          <a:ea typeface="Cambria Math" panose="02040503050406030204" pitchFamily="18" charset="0"/>
-                        </a:rPr>
-                        <m:t>→</m:t>
-                      </m:r>
-                      <m:sSub>
-                        <m:sSubPr>
-                          <m:ctrlPr>
-                            <a:rPr lang="en-US" altLang="zh-TW" b="0" i="1" smtClean="0">
-                              <a:latin typeface="Cambria Math" panose="02040503050406030204" pitchFamily="18" charset="0"/>
-                              <a:ea typeface="Cambria Math" panose="02040503050406030204" pitchFamily="18" charset="0"/>
-                            </a:rPr>
-                          </m:ctrlPr>
-                        </m:sSubPr>
-                        <m:e>
-                          <m:r>
-                            <a:rPr lang="en-US" altLang="zh-TW" b="0" i="1" smtClean="0">
-                              <a:latin typeface="Cambria Math" panose="02040503050406030204" pitchFamily="18" charset="0"/>
-                              <a:ea typeface="Cambria Math" panose="02040503050406030204" pitchFamily="18" charset="0"/>
-                            </a:rPr>
-                            <m:t>𝑏</m:t>
-                          </m:r>
-                        </m:e>
-                        <m:sub>
-                          <m:r>
-                            <a:rPr lang="en-US" altLang="zh-TW" b="0" i="1" smtClean="0">
-                              <a:latin typeface="Cambria Math" panose="02040503050406030204" pitchFamily="18" charset="0"/>
-                              <a:ea typeface="Cambria Math" panose="02040503050406030204" pitchFamily="18" charset="0"/>
-                            </a:rPr>
-                            <m:t>𝑖𝑗</m:t>
-                          </m:r>
-                        </m:sub>
-                      </m:sSub>
-                      <m:r>
-                        <a:rPr lang="en-US" altLang="zh-TW" b="0" i="1" smtClean="0">
-                          <a:latin typeface="Cambria Math" panose="02040503050406030204" pitchFamily="18" charset="0"/>
-                          <a:ea typeface="Cambria Math" panose="02040503050406030204" pitchFamily="18" charset="0"/>
-                        </a:rPr>
-                        <m:t>=</m:t>
-                      </m:r>
-                      <m:sSub>
-                        <m:sSubPr>
-                          <m:ctrlPr>
-                            <a:rPr lang="en-US" altLang="zh-TW" b="0" i="1" smtClean="0">
-                              <a:latin typeface="Cambria Math" panose="02040503050406030204" pitchFamily="18" charset="0"/>
-                              <a:ea typeface="Cambria Math" panose="02040503050406030204" pitchFamily="18" charset="0"/>
-                            </a:rPr>
-                          </m:ctrlPr>
-                        </m:sSubPr>
-                        <m:e>
-                          <m:r>
-                            <a:rPr lang="en-US" altLang="zh-TW" b="0" i="1" smtClean="0">
-                              <a:latin typeface="Cambria Math" panose="02040503050406030204" pitchFamily="18" charset="0"/>
-                              <a:ea typeface="Cambria Math" panose="02040503050406030204" pitchFamily="18" charset="0"/>
-                            </a:rPr>
-                            <m:t>𝑆</m:t>
-                          </m:r>
-                        </m:e>
-                        <m:sub>
-                          <m:r>
-                            <a:rPr lang="en-US" altLang="zh-TW" b="0" i="1" smtClean="0">
-                              <a:latin typeface="Cambria Math" panose="02040503050406030204" pitchFamily="18" charset="0"/>
-                              <a:ea typeface="Cambria Math" panose="02040503050406030204" pitchFamily="18" charset="0"/>
-                            </a:rPr>
-                            <m:t>𝑖</m:t>
-                          </m:r>
-                        </m:sub>
-                      </m:sSub>
-                      <m:sPre>
-                        <m:sPrePr>
-                          <m:ctrlPr>
-                            <a:rPr lang="en-US" altLang="zh-TW" b="0" i="1" smtClean="0">
-                              <a:latin typeface="Cambria Math" panose="02040503050406030204" pitchFamily="18" charset="0"/>
-                              <a:ea typeface="Cambria Math" panose="02040503050406030204" pitchFamily="18" charset="0"/>
-                            </a:rPr>
-                          </m:ctrlPr>
-                        </m:sPrePr>
-                        <m:sub/>
-                        <m:sup>
-                          <m:r>
-                            <a:rPr lang="en-US" altLang="zh-TW" b="0" i="1" smtClean="0">
-                              <a:latin typeface="Cambria Math" panose="02040503050406030204" pitchFamily="18" charset="0"/>
-                            </a:rPr>
-                            <m:t>𝐵</m:t>
-                          </m:r>
-                        </m:sup>
-                        <m:e>
-                          <m:sSub>
-                            <m:sSubPr>
-                              <m:ctrlPr>
-                                <a:rPr lang="en-US" altLang="zh-TW" i="1" smtClean="0">
-                                  <a:latin typeface="Cambria Math" panose="02040503050406030204" pitchFamily="18" charset="0"/>
-                                </a:rPr>
-                              </m:ctrlPr>
-                            </m:sSubPr>
-                            <m:e>
-                              <m:acc>
-                                <m:accPr>
-                                  <m:chr m:val="̂"/>
-                                  <m:ctrlPr>
-                                    <a:rPr lang="en-US" altLang="zh-TW" b="0" i="1" smtClean="0">
-                                      <a:latin typeface="Cambria Math" panose="02040503050406030204" pitchFamily="18" charset="0"/>
-                                    </a:rPr>
-                                  </m:ctrlPr>
-                                </m:accPr>
-                                <m:e>
-                                  <m:r>
-                                    <a:rPr lang="en-US" altLang="zh-TW" b="0" i="1" smtClean="0">
-                                      <a:latin typeface="Cambria Math" panose="02040503050406030204" pitchFamily="18" charset="0"/>
-                                    </a:rPr>
-                                    <m:t>𝑔</m:t>
-                                  </m:r>
-                                </m:e>
-                              </m:acc>
-                            </m:e>
-                            <m:sub>
-                              <m:r>
-                                <a:rPr lang="en-US" altLang="zh-TW" b="0" i="1" smtClean="0">
-                                  <a:latin typeface="Cambria Math" panose="02040503050406030204" pitchFamily="18" charset="0"/>
-                                </a:rPr>
-                                <m:t>𝐼</m:t>
-                              </m:r>
-                            </m:sub>
-                          </m:sSub>
-                        </m:e>
-                      </m:sPre>
-                      <m:acc>
-                        <m:accPr>
-                          <m:chr m:val="̅"/>
-                          <m:ctrlPr>
-                            <a:rPr lang="zh-TW" altLang="en-US" b="0" i="1" smtClean="0">
-                              <a:latin typeface="Cambria Math" panose="02040503050406030204" pitchFamily="18" charset="0"/>
-                            </a:rPr>
-                          </m:ctrlPr>
-                        </m:accPr>
-                        <m:e>
-                          <m:r>
-                            <a:rPr lang="en-US" altLang="zh-TW" b="0" i="1" smtClean="0">
-                              <a:latin typeface="Cambria Math" panose="02040503050406030204" pitchFamily="18" charset="0"/>
-                            </a:rPr>
-                            <m:t>𝐾</m:t>
-                          </m:r>
-                        </m:e>
-                      </m:acc>
-                      <m:sSub>
-                        <m:sSubPr>
-                          <m:ctrlPr>
-                            <a:rPr lang="en-US" altLang="zh-TW" b="0" i="1" smtClean="0">
-                              <a:latin typeface="Cambria Math" panose="02040503050406030204" pitchFamily="18" charset="0"/>
-                            </a:rPr>
-                          </m:ctrlPr>
-                        </m:sSubPr>
-                        <m:e>
-                          <m:r>
-                            <a:rPr lang="en-US" altLang="zh-TW" b="0" i="1" smtClean="0">
-                              <a:latin typeface="Cambria Math" panose="02040503050406030204" pitchFamily="18" charset="0"/>
-                            </a:rPr>
-                            <m:t>𝐼</m:t>
-                          </m:r>
-                        </m:e>
-                        <m:sub>
-                          <m:r>
-                            <a:rPr lang="en-US" altLang="zh-TW" b="0" i="1" smtClean="0">
-                              <a:latin typeface="Cambria Math" panose="02040503050406030204" pitchFamily="18" charset="0"/>
-                            </a:rPr>
-                            <m:t>𝑗</m:t>
-                          </m:r>
-                        </m:sub>
-                      </m:sSub>
-                    </m:oMath>
-                  </m:oMathPara>
-                </a14:m>
-                <a:endParaRPr lang="zh-TW" altLang="en-US" dirty="0"/>
-              </a:p>
-            </p:txBody>
-          </p:sp>
-        </mc:Choice>
-        <mc:Fallback xmlns="">
-          <p:sp>
-            <p:nvSpPr>
-              <p:cNvPr id="3" name="文字方塊 2">
-                <a:extLst>
-                  <a:ext uri="{FF2B5EF4-FFF2-40B4-BE49-F238E27FC236}">
-                    <a16:creationId xmlns:a16="http://schemas.microsoft.com/office/drawing/2014/main" id="{B6964577-860D-4EB3-8219-1A6240335DA6}"/>
-                  </a:ext>
-                </a:extLst>
-              </p:cNvPr>
-              <p:cNvSpPr txBox="1">
-                <a:spLocks noRot="1" noChangeAspect="1" noMove="1" noResize="1" noEditPoints="1" noAdjustHandles="1" noChangeArrowheads="1" noChangeShapeType="1" noTextEdit="1"/>
-              </p:cNvSpPr>
-              <p:nvPr/>
-            </p:nvSpPr>
-            <p:spPr>
-              <a:xfrm>
-                <a:off x="8573024" y="570245"/>
-                <a:ext cx="3508909" cy="321563"/>
-              </a:xfrm>
-              <a:prstGeom prst="rect">
-                <a:avLst/>
-              </a:prstGeom>
-              <a:blipFill>
-                <a:blip r:embed="rId2"/>
-                <a:stretch>
-                  <a:fillRect l="-1215" t="-15385" r="-6944" b="-25000"/>
-                </a:stretch>
-              </a:blipFill>
-            </p:spPr>
-            <p:txBody>
-              <a:bodyPr/>
-              <a:lstStyle/>
-              <a:p>
-                <a:r>
-                  <a:rPr lang="zh-TW" altLang="en-US">
-                    <a:noFill/>
-                  </a:rPr>
-                  <a:t> </a:t>
-                </a:r>
-              </a:p>
-            </p:txBody>
-          </p:sp>
-        </mc:Fallback>
-      </mc:AlternateContent>
-      <p:grpSp>
-        <p:nvGrpSpPr>
-          <p:cNvPr id="9" name="群組 8">
-            <a:extLst>
-              <a:ext uri="{FF2B5EF4-FFF2-40B4-BE49-F238E27FC236}">
-                <a16:creationId xmlns:a16="http://schemas.microsoft.com/office/drawing/2014/main" id="{2E080BE5-B7C1-4202-8DF4-73FF224DD90D}"/>
-              </a:ext>
-            </a:extLst>
-          </p:cNvPr>
-          <p:cNvGrpSpPr/>
-          <p:nvPr/>
-        </p:nvGrpSpPr>
-        <p:grpSpPr>
-          <a:xfrm>
-            <a:off x="408618" y="1035826"/>
-            <a:ext cx="4379971" cy="4414795"/>
-            <a:chOff x="7266618" y="405360"/>
-            <a:chExt cx="4379971" cy="4414795"/>
-          </a:xfrm>
-        </p:grpSpPr>
-        <p:pic>
-          <p:nvPicPr>
-            <p:cNvPr id="10" name="圖片 9">
-              <a:extLst>
-                <a:ext uri="{FF2B5EF4-FFF2-40B4-BE49-F238E27FC236}">
-                  <a16:creationId xmlns:a16="http://schemas.microsoft.com/office/drawing/2014/main" id="{8CBC76F5-53A9-4586-98D0-6499FD1C5EA6}"/>
-                </a:ext>
-              </a:extLst>
-            </p:cNvPr>
-            <p:cNvPicPr>
-              <a:picLocks noChangeAspect="1"/>
-            </p:cNvPicPr>
-            <p:nvPr/>
-          </p:nvPicPr>
-          <p:blipFill>
-            <a:blip r:embed="rId3">
-              <a:extLst>
-                <a:ext uri="{28A0092B-C50C-407E-A947-70E740481C1C}">
-                  <a14:useLocalDpi xmlns:a14="http://schemas.microsoft.com/office/drawing/2010/main" val="0"/>
-                </a:ext>
-              </a:extLst>
-            </a:blip>
-            <a:stretch>
-              <a:fillRect/>
-            </a:stretch>
-          </p:blipFill>
-          <p:spPr>
-            <a:xfrm>
-              <a:off x="7296030" y="405360"/>
-              <a:ext cx="4350559" cy="4137796"/>
-            </a:xfrm>
-            <a:prstGeom prst="rect">
-              <a:avLst/>
-            </a:prstGeom>
-          </p:spPr>
-        </p:pic>
-        <mc:AlternateContent xmlns:mc="http://schemas.openxmlformats.org/markup-compatibility/2006">
-          <mc:Choice xmlns:a14="http://schemas.microsoft.com/office/drawing/2010/main" Requires="a14">
-            <p:sp>
-              <p:nvSpPr>
-                <p:cNvPr id="11" name="文字方塊 10">
-                  <a:extLst>
-                    <a:ext uri="{FF2B5EF4-FFF2-40B4-BE49-F238E27FC236}">
-                      <a16:creationId xmlns:a16="http://schemas.microsoft.com/office/drawing/2014/main" id="{B6A75E73-5A5B-47AE-A0FD-1A0747386EF9}"/>
-                    </a:ext>
-                  </a:extLst>
-                </p:cNvPr>
-                <p:cNvSpPr txBox="1"/>
-                <p:nvPr/>
-              </p:nvSpPr>
-              <p:spPr>
-                <a:xfrm rot="16200000">
-                  <a:off x="7011484" y="1132491"/>
-                  <a:ext cx="801501" cy="291234"/>
-                </a:xfrm>
-                <a:prstGeom prst="rect">
-                  <a:avLst/>
-                </a:prstGeom>
-                <a:noFill/>
-              </p:spPr>
-              <p:txBody>
-                <a:bodyPr wrap="none" lIns="0" tIns="0" rIns="0" bIns="0" rtlCol="0">
-                  <a:spAutoFit/>
-                </a:bodyPr>
-                <a:lstStyle/>
-                <a:p>
-                  <a:pPr/>
-                  <a14:m>
-                    <m:oMathPara xmlns:m="http://schemas.openxmlformats.org/officeDocument/2006/math">
-                      <m:oMathParaPr>
-                        <m:jc m:val="centerGroup"/>
-                      </m:oMathParaPr>
-                      <m:oMath xmlns:m="http://schemas.openxmlformats.org/officeDocument/2006/math">
-                        <m:acc>
-                          <m:accPr>
-                            <m:chr m:val="̂"/>
-                            <m:ctrlPr>
-                              <a:rPr lang="en-US" altLang="zh-TW" b="1" smtClean="0">
-                                <a:latin typeface="Cambria Math" panose="02040503050406030204" pitchFamily="18" charset="0"/>
-                              </a:rPr>
-                            </m:ctrlPr>
-                          </m:accPr>
-                          <m:e>
-                            <m:r>
-                              <a:rPr lang="zh-TW" altLang="en-US" b="1" i="0" smtClean="0">
-                                <a:latin typeface="Cambria Math" panose="02040503050406030204" pitchFamily="18" charset="0"/>
-                              </a:rPr>
-                              <m:t>𝓵</m:t>
-                            </m:r>
-                          </m:e>
-                        </m:acc>
-                        <m:r>
-                          <a:rPr lang="en-US" altLang="zh-TW" b="1" i="0" smtClean="0">
-                            <a:latin typeface="Cambria Math" panose="02040503050406030204" pitchFamily="18" charset="0"/>
-                          </a:rPr>
-                          <m:t> (</m:t>
-                        </m:r>
-                        <m:r>
-                          <a:rPr lang="en-US" altLang="zh-TW" b="1" i="0" smtClean="0">
-                            <a:latin typeface="Cambria Math" panose="02040503050406030204" pitchFamily="18" charset="0"/>
-                          </a:rPr>
-                          <m:t>𝐮𝐦</m:t>
-                        </m:r>
-                        <m:r>
-                          <a:rPr lang="en-US" altLang="zh-TW" b="1" i="0" smtClean="0">
-                            <a:latin typeface="Cambria Math" panose="02040503050406030204" pitchFamily="18" charset="0"/>
-                          </a:rPr>
-                          <m:t>)</m:t>
-                        </m:r>
-                      </m:oMath>
-                    </m:oMathPara>
-                  </a14:m>
-                  <a:endParaRPr lang="zh-TW" altLang="en-US" b="1" dirty="0">
-                    <a:latin typeface="Arial" panose="020B0604020202020204" pitchFamily="34" charset="0"/>
-                    <a:cs typeface="Arial" panose="020B0604020202020204" pitchFamily="34" charset="0"/>
-                  </a:endParaRPr>
-                </a:p>
-              </p:txBody>
-            </p:sp>
-          </mc:Choice>
-          <mc:Fallback>
-            <p:sp>
-              <p:nvSpPr>
-                <p:cNvPr id="11" name="文字方塊 10">
-                  <a:extLst>
-                    <a:ext uri="{FF2B5EF4-FFF2-40B4-BE49-F238E27FC236}">
-                      <a16:creationId xmlns:a16="http://schemas.microsoft.com/office/drawing/2014/main" id="{B6A75E73-5A5B-47AE-A0FD-1A0747386EF9}"/>
-                    </a:ext>
-                  </a:extLst>
-                </p:cNvPr>
-                <p:cNvSpPr txBox="1">
-                  <a:spLocks noRot="1" noChangeAspect="1" noMove="1" noResize="1" noEditPoints="1" noAdjustHandles="1" noChangeArrowheads="1" noChangeShapeType="1" noTextEdit="1"/>
-                </p:cNvSpPr>
-                <p:nvPr/>
-              </p:nvSpPr>
-              <p:spPr>
-                <a:xfrm rot="16200000">
-                  <a:off x="7011484" y="1132491"/>
-                  <a:ext cx="801501" cy="291234"/>
-                </a:xfrm>
-                <a:prstGeom prst="rect">
-                  <a:avLst/>
-                </a:prstGeom>
-                <a:blipFill>
-                  <a:blip r:embed="rId4"/>
-                  <a:stretch>
-                    <a:fillRect l="-14583" t="-8333" r="-35417" b="-5303"/>
-                  </a:stretch>
-                </a:blipFill>
-              </p:spPr>
-              <p:txBody>
-                <a:bodyPr/>
-                <a:lstStyle/>
-                <a:p>
-                  <a:r>
-                    <a:rPr lang="zh-TW" altLang="en-US">
-                      <a:noFill/>
-                    </a:rPr>
-                    <a:t> </a:t>
-                  </a:r>
-                </a:p>
-              </p:txBody>
-            </p:sp>
-          </mc:Fallback>
-        </mc:AlternateContent>
-        <mc:AlternateContent xmlns:mc="http://schemas.openxmlformats.org/markup-compatibility/2006">
-          <mc:Choice xmlns:a14="http://schemas.microsoft.com/office/drawing/2010/main" Requires="a14">
-            <p:sp>
-              <p:nvSpPr>
-                <p:cNvPr id="12" name="文字方塊 11">
-                  <a:extLst>
-                    <a:ext uri="{FF2B5EF4-FFF2-40B4-BE49-F238E27FC236}">
-                      <a16:creationId xmlns:a16="http://schemas.microsoft.com/office/drawing/2014/main" id="{8F55D9E7-A9FA-4768-A086-209E787BC1E9}"/>
-                    </a:ext>
-                  </a:extLst>
-                </p:cNvPr>
-                <p:cNvSpPr txBox="1"/>
-                <p:nvPr/>
-              </p:nvSpPr>
-              <p:spPr>
-                <a:xfrm>
-                  <a:off x="8694458" y="4543156"/>
-                  <a:ext cx="2292294" cy="276999"/>
-                </a:xfrm>
-                <a:prstGeom prst="rect">
-                  <a:avLst/>
-                </a:prstGeom>
-                <a:noFill/>
-              </p:spPr>
-              <p:txBody>
-                <a:bodyPr wrap="none" lIns="0" tIns="0" rIns="0" bIns="0" rtlCol="0">
-                  <a:spAutoFit/>
-                </a:bodyPr>
-                <a:lstStyle/>
-                <a:p>
-                  <a:pPr/>
-                  <a14:m>
-                    <m:oMathPara xmlns:m="http://schemas.openxmlformats.org/officeDocument/2006/math">
-                      <m:oMathParaPr>
-                        <m:jc m:val="centerGroup"/>
-                      </m:oMathParaPr>
-                      <m:oMath xmlns:m="http://schemas.openxmlformats.org/officeDocument/2006/math">
-                        <m:r>
-                          <a:rPr lang="en-US" altLang="zh-TW" b="1" i="0" smtClean="0">
-                            <a:latin typeface="Cambria Math" panose="02040503050406030204" pitchFamily="18" charset="0"/>
-                          </a:rPr>
-                          <m:t>𝐒𝐚𝐦𝐩𝐥𝐢𝐧𝐠</m:t>
-                        </m:r>
-                        <m:r>
-                          <a:rPr lang="en-US" altLang="zh-TW" b="1" i="0" smtClean="0">
-                            <a:latin typeface="Cambria Math" panose="02040503050406030204" pitchFamily="18" charset="0"/>
-                          </a:rPr>
-                          <m:t> </m:t>
-                        </m:r>
-                        <m:r>
-                          <a:rPr lang="en-US" altLang="zh-TW" b="1" i="0" smtClean="0">
-                            <a:latin typeface="Cambria Math" panose="02040503050406030204" pitchFamily="18" charset="0"/>
-                          </a:rPr>
-                          <m:t>𝐫𝐚𝐧𝐠𝐞</m:t>
-                        </m:r>
-                        <m:r>
-                          <a:rPr lang="en-US" altLang="zh-TW" b="1" i="0" smtClean="0">
-                            <a:latin typeface="Cambria Math" panose="02040503050406030204" pitchFamily="18" charset="0"/>
-                          </a:rPr>
-                          <m:t>(</m:t>
-                        </m:r>
-                        <m:r>
-                          <a:rPr lang="en-US" altLang="zh-TW" b="1" i="0" smtClean="0">
-                            <a:latin typeface="Cambria Math" panose="02040503050406030204" pitchFamily="18" charset="0"/>
-                          </a:rPr>
-                          <m:t>𝐮𝐦</m:t>
-                        </m:r>
-                        <m:r>
-                          <a:rPr lang="en-US" altLang="zh-TW" b="1" i="0" smtClean="0">
-                            <a:latin typeface="Cambria Math" panose="02040503050406030204" pitchFamily="18" charset="0"/>
-                          </a:rPr>
-                          <m:t>)</m:t>
-                        </m:r>
-                      </m:oMath>
-                    </m:oMathPara>
-                  </a14:m>
-                  <a:endParaRPr lang="zh-TW" altLang="en-US" b="1" dirty="0"/>
-                </a:p>
-              </p:txBody>
-            </p:sp>
-          </mc:Choice>
-          <mc:Fallback>
-            <p:sp>
-              <p:nvSpPr>
-                <p:cNvPr id="12" name="文字方塊 11">
-                  <a:extLst>
-                    <a:ext uri="{FF2B5EF4-FFF2-40B4-BE49-F238E27FC236}">
-                      <a16:creationId xmlns:a16="http://schemas.microsoft.com/office/drawing/2014/main" id="{8F55D9E7-A9FA-4768-A086-209E787BC1E9}"/>
-                    </a:ext>
-                  </a:extLst>
-                </p:cNvPr>
-                <p:cNvSpPr txBox="1">
-                  <a:spLocks noRot="1" noChangeAspect="1" noMove="1" noResize="1" noEditPoints="1" noAdjustHandles="1" noChangeArrowheads="1" noChangeShapeType="1" noTextEdit="1"/>
-                </p:cNvSpPr>
-                <p:nvPr/>
-              </p:nvSpPr>
-              <p:spPr>
-                <a:xfrm>
-                  <a:off x="8694458" y="4543156"/>
-                  <a:ext cx="2292294" cy="276999"/>
-                </a:xfrm>
-                <a:prstGeom prst="rect">
-                  <a:avLst/>
-                </a:prstGeom>
-                <a:blipFill>
-                  <a:blip r:embed="rId5"/>
-                  <a:stretch>
-                    <a:fillRect l="-3191" t="-6667" r="-3457" b="-35556"/>
-                  </a:stretch>
-                </a:blipFill>
-              </p:spPr>
-              <p:txBody>
-                <a:bodyPr/>
-                <a:lstStyle/>
-                <a:p>
-                  <a:r>
-                    <a:rPr lang="zh-TW" altLang="en-US">
-                      <a:noFill/>
-                    </a:rPr>
-                    <a:t> </a:t>
-                  </a:r>
-                </a:p>
-              </p:txBody>
-            </p:sp>
-          </mc:Fallback>
-        </mc:AlternateContent>
-      </p:grpSp>
-      <p:sp>
-        <p:nvSpPr>
-          <p:cNvPr id="19" name="文字方塊 18">
-            <a:extLst>
-              <a:ext uri="{FF2B5EF4-FFF2-40B4-BE49-F238E27FC236}">
-                <a16:creationId xmlns:a16="http://schemas.microsoft.com/office/drawing/2014/main" id="{EBA17566-B42C-4B02-B869-9832F66C8C0A}"/>
-              </a:ext>
-            </a:extLst>
-          </p:cNvPr>
-          <p:cNvSpPr txBox="1"/>
-          <p:nvPr/>
-        </p:nvSpPr>
-        <p:spPr>
-          <a:xfrm>
-            <a:off x="4754723" y="612470"/>
-            <a:ext cx="1879600" cy="369332"/>
-          </a:xfrm>
-          <a:prstGeom prst="rect">
-            <a:avLst/>
-          </a:prstGeom>
-          <a:noFill/>
-        </p:spPr>
-        <p:txBody>
-          <a:bodyPr wrap="square" rtlCol="0">
-            <a:spAutoFit/>
-          </a:bodyPr>
-          <a:lstStyle/>
-          <a:p>
-            <a:pPr marL="285750" indent="-285750">
-              <a:buFont typeface="Arial" panose="020B0604020202020204" pitchFamily="34" charset="0"/>
-              <a:buChar char="•"/>
-            </a:pPr>
-            <a:r>
-              <a:rPr lang="en-US" altLang="zh-TW" dirty="0"/>
-              <a:t>Fitting results</a:t>
-            </a:r>
-            <a:endParaRPr lang="zh-TW" altLang="en-US" dirty="0"/>
-          </a:p>
-        </p:txBody>
-      </p:sp>
-      <mc:AlternateContent xmlns:mc="http://schemas.openxmlformats.org/markup-compatibility/2006" xmlns:a14="http://schemas.microsoft.com/office/drawing/2010/main">
-        <mc:Choice Requires="a14">
-          <p:sp>
-            <p:nvSpPr>
-              <p:cNvPr id="14" name="文字方塊 13">
-                <a:extLst>
-                  <a:ext uri="{FF2B5EF4-FFF2-40B4-BE49-F238E27FC236}">
-                    <a16:creationId xmlns:a16="http://schemas.microsoft.com/office/drawing/2014/main" id="{36B864DE-D4E0-45CF-A983-5B487047D8F7}"/>
-                  </a:ext>
-                </a:extLst>
-              </p:cNvPr>
-              <p:cNvSpPr txBox="1"/>
-              <p:nvPr/>
-            </p:nvSpPr>
-            <p:spPr>
-              <a:xfrm>
-                <a:off x="4818002" y="3026630"/>
-                <a:ext cx="7120466" cy="3831370"/>
-              </a:xfrm>
-              <a:prstGeom prst="rect">
-                <a:avLst/>
-              </a:prstGeom>
-              <a:noFill/>
-            </p:spPr>
-            <p:txBody>
-              <a:bodyPr wrap="square" rtlCol="0">
-                <a:spAutoFit/>
-              </a:bodyPr>
-              <a:lstStyle/>
-              <a:p>
-                <a:pPr marL="285750" indent="-285750">
-                  <a:lnSpc>
-                    <a:spcPct val="150000"/>
-                  </a:lnSpc>
-                  <a:buFont typeface="Arial" panose="020B0604020202020204" pitchFamily="34" charset="0"/>
-                  <a:buChar char="•"/>
-                </a:pPr>
-                <a:r>
-                  <a:rPr lang="en-US" altLang="zh-TW" dirty="0"/>
-                  <a:t>This figure shows the trends of the eighteen parameters. A notable difference can be observed in </a:t>
-                </a:r>
-                <a14:m>
-                  <m:oMath xmlns:m="http://schemas.openxmlformats.org/officeDocument/2006/math">
-                    <m:sPre>
-                      <m:sPrePr>
-                        <m:ctrlPr>
-                          <a:rPr lang="en-US" altLang="zh-TW" i="1" smtClean="0">
-                            <a:latin typeface="Cambria Math" panose="02040503050406030204" pitchFamily="18" charset="0"/>
-                          </a:rPr>
-                        </m:ctrlPr>
-                      </m:sPrePr>
-                      <m:sub/>
-                      <m:sup>
-                        <m:r>
-                          <a:rPr lang="en-US" altLang="zh-TW" b="0" i="1" smtClean="0">
-                            <a:latin typeface="Cambria Math" panose="02040503050406030204" pitchFamily="18" charset="0"/>
-                          </a:rPr>
-                          <m:t>𝐵</m:t>
-                        </m:r>
-                      </m:sup>
-                      <m:e>
-                        <m:sSub>
-                          <m:sSubPr>
-                            <m:ctrlPr>
-                              <a:rPr lang="en-US" altLang="zh-TW" i="1" smtClean="0">
-                                <a:latin typeface="Cambria Math" panose="02040503050406030204" pitchFamily="18" charset="0"/>
-                              </a:rPr>
-                            </m:ctrlPr>
-                          </m:sSubPr>
-                          <m:e>
-                            <m:acc>
-                              <m:accPr>
-                                <m:chr m:val="̂"/>
-                                <m:ctrlPr>
-                                  <a:rPr lang="en-US" altLang="zh-TW" i="1" smtClean="0">
-                                    <a:latin typeface="Cambria Math" panose="02040503050406030204" pitchFamily="18" charset="0"/>
-                                  </a:rPr>
-                                </m:ctrlPr>
-                              </m:accPr>
-                              <m:e>
-                                <m:r>
-                                  <a:rPr lang="en-US" altLang="zh-TW" b="0" i="1" smtClean="0">
-                                    <a:latin typeface="Cambria Math" panose="02040503050406030204" pitchFamily="18" charset="0"/>
-                                  </a:rPr>
-                                  <m:t>𝑔</m:t>
-                                </m:r>
-                              </m:e>
-                            </m:acc>
-                          </m:e>
-                          <m:sub>
-                            <m:r>
-                              <a:rPr lang="en-US" altLang="zh-TW" b="0" i="1" smtClean="0">
-                                <a:latin typeface="Cambria Math" panose="02040503050406030204" pitchFamily="18" charset="0"/>
-                              </a:rPr>
-                              <m:t>𝐼</m:t>
-                            </m:r>
-                          </m:sub>
-                        </m:sSub>
-                      </m:e>
-                    </m:sPre>
-                  </m:oMath>
-                </a14:m>
-                <a:r>
-                  <a:rPr lang="en-US" altLang="zh-TW" dirty="0"/>
-                  <a:t>, whose trend is opposite to that of the one-parameter model. In the eighteen-parameter model, the additional degrees of freedom associated with the magnetic charge locations allow the model to simultaneously fit the magnetic field in both the near-field and near-pole regions. As the sampling sphere becomes larger, a greater magnetic charge strength is required to reproduce the magnetic field over the expanded region. Therefore, </a:t>
-                </a:r>
-                <a14:m>
-                  <m:oMath xmlns:m="http://schemas.openxmlformats.org/officeDocument/2006/math">
-                    <m:sPre>
-                      <m:sPrePr>
-                        <m:ctrlPr>
-                          <a:rPr lang="en-US" altLang="zh-TW" i="1">
-                            <a:latin typeface="Cambria Math" panose="02040503050406030204" pitchFamily="18" charset="0"/>
-                          </a:rPr>
-                        </m:ctrlPr>
-                      </m:sPrePr>
-                      <m:sub/>
-                      <m:sup>
-                        <m:r>
-                          <a:rPr lang="en-US" altLang="zh-TW" i="1">
-                            <a:latin typeface="Cambria Math" panose="02040503050406030204" pitchFamily="18" charset="0"/>
-                          </a:rPr>
-                          <m:t>𝐵</m:t>
-                        </m:r>
-                      </m:sup>
-                      <m:e>
-                        <m:sSub>
-                          <m:sSubPr>
-                            <m:ctrlPr>
-                              <a:rPr lang="en-US" altLang="zh-TW" i="1">
-                                <a:latin typeface="Cambria Math" panose="02040503050406030204" pitchFamily="18" charset="0"/>
-                              </a:rPr>
-                            </m:ctrlPr>
-                          </m:sSubPr>
-                          <m:e>
-                            <m:acc>
-                              <m:accPr>
-                                <m:chr m:val="̂"/>
-                                <m:ctrlPr>
-                                  <a:rPr lang="en-US" altLang="zh-TW" i="1">
-                                    <a:latin typeface="Cambria Math" panose="02040503050406030204" pitchFamily="18" charset="0"/>
-                                  </a:rPr>
-                                </m:ctrlPr>
-                              </m:accPr>
-                              <m:e>
-                                <m:r>
-                                  <a:rPr lang="en-US" altLang="zh-TW" i="1">
-                                    <a:latin typeface="Cambria Math" panose="02040503050406030204" pitchFamily="18" charset="0"/>
-                                  </a:rPr>
-                                  <m:t>𝑔</m:t>
-                                </m:r>
-                              </m:e>
-                            </m:acc>
-                          </m:e>
-                          <m:sub>
-                            <m:r>
-                              <a:rPr lang="en-US" altLang="zh-TW" i="1">
-                                <a:latin typeface="Cambria Math" panose="02040503050406030204" pitchFamily="18" charset="0"/>
-                              </a:rPr>
-                              <m:t>𝐼</m:t>
-                            </m:r>
-                          </m:sub>
-                        </m:sSub>
-                      </m:e>
-                    </m:sPre>
-                  </m:oMath>
-                </a14:m>
-                <a:r>
-                  <a:rPr lang="en-US" altLang="zh-TW" dirty="0"/>
-                  <a:t> increases as the sampling range increases.</a:t>
-                </a:r>
-                <a:endParaRPr lang="zh-TW" altLang="en-US" dirty="0"/>
-              </a:p>
-            </p:txBody>
-          </p:sp>
-        </mc:Choice>
-        <mc:Fallback xmlns="">
-          <p:sp>
-            <p:nvSpPr>
-              <p:cNvPr id="14" name="文字方塊 13">
-                <a:extLst>
-                  <a:ext uri="{FF2B5EF4-FFF2-40B4-BE49-F238E27FC236}">
-                    <a16:creationId xmlns:a16="http://schemas.microsoft.com/office/drawing/2014/main" id="{36B864DE-D4E0-45CF-A983-5B487047D8F7}"/>
-                  </a:ext>
-                </a:extLst>
-              </p:cNvPr>
-              <p:cNvSpPr txBox="1">
-                <a:spLocks noRot="1" noChangeAspect="1" noMove="1" noResize="1" noEditPoints="1" noAdjustHandles="1" noChangeArrowheads="1" noChangeShapeType="1" noTextEdit="1"/>
-              </p:cNvSpPr>
-              <p:nvPr/>
-            </p:nvSpPr>
-            <p:spPr>
-              <a:xfrm>
-                <a:off x="4818002" y="3026630"/>
-                <a:ext cx="7120466" cy="3831370"/>
-              </a:xfrm>
-              <a:prstGeom prst="rect">
-                <a:avLst/>
-              </a:prstGeom>
-              <a:blipFill>
-                <a:blip r:embed="rId9"/>
-                <a:stretch>
-                  <a:fillRect l="-514" r="-3168" b="-2544"/>
-                </a:stretch>
-              </a:blipFill>
-            </p:spPr>
-            <p:txBody>
-              <a:bodyPr/>
-              <a:lstStyle/>
-              <a:p>
-                <a:r>
-                  <a:rPr lang="zh-TW" altLang="en-US">
-                    <a:noFill/>
-                  </a:rPr>
-                  <a:t> </a:t>
-                </a:r>
-              </a:p>
-            </p:txBody>
-          </p:sp>
-        </mc:Fallback>
-      </mc:AlternateContent>
-      <mc:AlternateContent xmlns:mc="http://schemas.openxmlformats.org/markup-compatibility/2006">
-        <mc:Choice xmlns:a14="http://schemas.microsoft.com/office/drawing/2010/main" Requires="a14">
-          <p:sp>
-            <p:nvSpPr>
-              <p:cNvPr id="16" name="文字方塊 15">
-                <a:extLst>
-                  <a:ext uri="{FF2B5EF4-FFF2-40B4-BE49-F238E27FC236}">
-                    <a16:creationId xmlns:a16="http://schemas.microsoft.com/office/drawing/2014/main" id="{3514A624-EDE9-40AF-BE57-A60AD18744E7}"/>
-                  </a:ext>
-                </a:extLst>
-              </p:cNvPr>
-              <p:cNvSpPr txBox="1"/>
-              <p:nvPr/>
-            </p:nvSpPr>
-            <p:spPr>
-              <a:xfrm>
-                <a:off x="4860789" y="981802"/>
-                <a:ext cx="7221144" cy="1511055"/>
-              </a:xfrm>
-              <a:prstGeom prst="rect">
-                <a:avLst/>
-              </a:prstGeom>
-              <a:noFill/>
-            </p:spPr>
-            <p:txBody>
-              <a:bodyPr wrap="none" lIns="0" tIns="0" rIns="0" bIns="0" rtlCol="0">
-                <a:spAutoFit/>
-              </a:bodyPr>
-              <a:lstStyle/>
-              <a:p>
-                <a14:m>
-                  <m:oMathPara xmlns:m="http://schemas.openxmlformats.org/officeDocument/2006/math">
-                    <m:oMathParaPr>
-                      <m:jc m:val="centerGroup"/>
-                    </m:oMathParaPr>
-                    <m:oMath xmlns:m="http://schemas.openxmlformats.org/officeDocument/2006/math">
-                      <m:sSub>
-                        <m:sSubPr>
-                          <m:ctrlPr>
-                            <a:rPr lang="en-US" altLang="zh-TW" b="0" i="1" smtClean="0">
-                              <a:latin typeface="Cambria Math" panose="02040503050406030204" pitchFamily="18" charset="0"/>
-                            </a:rPr>
-                          </m:ctrlPr>
-                        </m:sSubPr>
-                        <m:e>
-                          <m:acc>
-                            <m:accPr>
-                              <m:chr m:val="̅"/>
-                              <m:ctrlPr>
-                                <a:rPr lang="en-US" altLang="zh-TW" b="0" i="1" smtClean="0">
-                                  <a:latin typeface="Cambria Math" panose="02040503050406030204" pitchFamily="18" charset="0"/>
-                                </a:rPr>
-                              </m:ctrlPr>
-                            </m:accPr>
-                            <m:e>
-                              <m:r>
-                                <a:rPr lang="en-US" altLang="zh-TW" b="0" i="1" smtClean="0">
-                                  <a:latin typeface="Cambria Math" panose="02040503050406030204" pitchFamily="18" charset="0"/>
-                                </a:rPr>
-                                <m:t>𝐾</m:t>
-                              </m:r>
-                            </m:e>
-                          </m:acc>
-                        </m:e>
-                        <m:sub>
-                          <m:r>
-                            <a:rPr lang="en-US" altLang="zh-TW" b="0" i="1" smtClean="0">
-                              <a:latin typeface="Cambria Math" panose="02040503050406030204" pitchFamily="18" charset="0"/>
-                            </a:rPr>
-                            <m:t>𝐼</m:t>
-                          </m:r>
-                        </m:sub>
-                      </m:sSub>
-                      <m:r>
-                        <a:rPr lang="en-US" altLang="zh-TW" b="0" i="1" smtClean="0">
-                          <a:latin typeface="Cambria Math" panose="02040503050406030204" pitchFamily="18" charset="0"/>
-                        </a:rPr>
-                        <m:t>=</m:t>
-                      </m:r>
-                      <m:d>
-                        <m:dPr>
-                          <m:begChr m:val="["/>
-                          <m:endChr m:val="]"/>
-                          <m:ctrlPr>
-                            <a:rPr lang="en-US" altLang="zh-TW" b="0" i="1" smtClean="0">
-                              <a:latin typeface="Cambria Math" panose="02040503050406030204" pitchFamily="18" charset="0"/>
-                            </a:rPr>
-                          </m:ctrlPr>
-                        </m:dPr>
-                        <m:e>
-                          <m:m>
-                            <m:mPr>
-                              <m:mcs>
-                                <m:mc>
-                                  <m:mcPr>
-                                    <m:count m:val="2"/>
-                                    <m:mcJc m:val="center"/>
-                                  </m:mcPr>
-                                </m:mc>
-                              </m:mcs>
-                              <m:ctrlPr>
-                                <a:rPr lang="en-US" altLang="zh-TW" b="0" i="1" smtClean="0">
-                                  <a:latin typeface="Cambria Math" panose="02040503050406030204" pitchFamily="18" charset="0"/>
-                                </a:rPr>
-                              </m:ctrlPr>
-                            </m:mPr>
-                            <m:mr>
-                              <m:e>
-                                <m:r>
-                                  <m:rPr>
-                                    <m:brk m:alnAt="7"/>
-                                  </m:rPr>
-                                  <a:rPr lang="en-US" altLang="zh-TW" b="0" i="1" smtClean="0">
-                                    <a:latin typeface="Cambria Math" panose="02040503050406030204" pitchFamily="18" charset="0"/>
-                                  </a:rPr>
-                                  <m:t>0.8333</m:t>
-                                </m:r>
-                              </m:e>
-                              <m:e>
-                                <m:m>
-                                  <m:mPr>
-                                    <m:mcs>
-                                      <m:mc>
-                                        <m:mcPr>
-                                          <m:count m:val="3"/>
-                                          <m:mcJc m:val="center"/>
-                                        </m:mcPr>
-                                      </m:mc>
-                                    </m:mcs>
-                                    <m:ctrlPr>
-                                      <a:rPr lang="en-US" altLang="zh-TW" b="0" i="1" smtClean="0">
-                                        <a:latin typeface="Cambria Math" panose="02040503050406030204" pitchFamily="18" charset="0"/>
-                                      </a:rPr>
-                                    </m:ctrlPr>
-                                  </m:mPr>
-                                  <m:mr>
-                                    <m:e>
-                                      <m:r>
-                                        <m:rPr>
-                                          <m:brk m:alnAt="7"/>
-                                        </m:rPr>
-                                        <a:rPr lang="en-US" altLang="zh-TW" b="0" i="1" smtClean="0">
-                                          <a:latin typeface="Cambria Math" panose="02040503050406030204" pitchFamily="18" charset="0"/>
-                                        </a:rPr>
-                                        <m:t>−0.1241</m:t>
-                                      </m:r>
-                                    </m:e>
-                                    <m:e>
-                                      <m:r>
-                                        <a:rPr lang="en-US" altLang="zh-TW" b="0" i="1" smtClean="0">
-                                          <a:latin typeface="Cambria Math" panose="02040503050406030204" pitchFamily="18" charset="0"/>
-                                        </a:rPr>
-                                        <m:t>−0.1247</m:t>
-                                      </m:r>
-                                    </m:e>
-                                    <m:e>
-                                      <m:m>
-                                        <m:mPr>
-                                          <m:mcs>
-                                            <m:mc>
-                                              <m:mcPr>
-                                                <m:count m:val="3"/>
-                                                <m:mcJc m:val="center"/>
-                                              </m:mcPr>
-                                            </m:mc>
-                                          </m:mcs>
-                                          <m:ctrlPr>
-                                            <a:rPr lang="en-US" altLang="zh-TW" b="0" i="1" smtClean="0">
-                                              <a:latin typeface="Cambria Math" panose="02040503050406030204" pitchFamily="18" charset="0"/>
-                                            </a:rPr>
-                                          </m:ctrlPr>
-                                        </m:mPr>
-                                        <m:mr>
-                                          <m:e>
-                                            <m:r>
-                                              <m:rPr>
-                                                <m:brk m:alnAt="7"/>
-                                              </m:rPr>
-                                              <a:rPr lang="en-US" altLang="zh-TW" b="0" i="1" smtClean="0">
-                                                <a:latin typeface="Cambria Math" panose="02040503050406030204" pitchFamily="18" charset="0"/>
-                                              </a:rPr>
-                                              <m:t>−0.1993</m:t>
-                                            </m:r>
-                                          </m:e>
-                                          <m:e>
-                                            <m:r>
-                                              <a:rPr lang="en-US" altLang="zh-TW" b="0" i="1" smtClean="0">
-                                                <a:latin typeface="Cambria Math" panose="02040503050406030204" pitchFamily="18" charset="0"/>
-                                              </a:rPr>
-                                              <m:t>−0.1996</m:t>
-                                            </m:r>
-                                          </m:e>
-                                          <m:e>
-                                            <m:r>
-                                              <a:rPr lang="en-US" altLang="zh-TW" b="0" i="1" smtClean="0">
-                                                <a:latin typeface="Cambria Math" panose="02040503050406030204" pitchFamily="18" charset="0"/>
-                                              </a:rPr>
-                                              <m:t>−0.1228</m:t>
-                                            </m:r>
-                                          </m:e>
-                                        </m:mr>
-                                      </m:m>
-                                    </m:e>
-                                  </m:mr>
-                                </m:m>
-                              </m:e>
-                            </m:mr>
-                            <m:mr>
-                              <m:e>
-                                <m:m>
-                                  <m:mPr>
-                                    <m:mcs>
-                                      <m:mc>
-                                        <m:mcPr>
-                                          <m:count m:val="1"/>
-                                          <m:mcJc m:val="center"/>
-                                        </m:mcPr>
-                                      </m:mc>
-                                    </m:mcs>
-                                    <m:ctrlPr>
-                                      <a:rPr lang="en-US" altLang="zh-TW" b="0" i="1" smtClean="0">
-                                        <a:latin typeface="Cambria Math" panose="02040503050406030204" pitchFamily="18" charset="0"/>
-                                      </a:rPr>
-                                    </m:ctrlPr>
-                                  </m:mPr>
-                                  <m:mr>
-                                    <m:e>
-                                      <m:r>
-                                        <m:rPr>
-                                          <m:brk m:alnAt="7"/>
-                                        </m:rPr>
-                                        <a:rPr lang="en-US" altLang="zh-TW" b="0" i="1" smtClean="0">
-                                          <a:latin typeface="Cambria Math" panose="02040503050406030204" pitchFamily="18" charset="0"/>
-                                        </a:rPr>
-                                        <m:t>−0.1116</m:t>
-                                      </m:r>
-                                    </m:e>
-                                  </m:mr>
-                                  <m:mr>
-                                    <m:e>
-                                      <m:r>
-                                        <a:rPr lang="en-US" altLang="zh-TW" b="0" i="1" smtClean="0">
-                                          <a:latin typeface="Cambria Math" panose="02040503050406030204" pitchFamily="18" charset="0"/>
-                                        </a:rPr>
-                                        <m:t>−0.1239</m:t>
-                                      </m:r>
-                                    </m:e>
-                                  </m:mr>
-                                  <m:mr>
-                                    <m:e>
-                                      <m:m>
-                                        <m:mPr>
-                                          <m:mcs>
-                                            <m:mc>
-                                              <m:mcPr>
-                                                <m:count m:val="1"/>
-                                                <m:mcJc m:val="center"/>
-                                              </m:mcPr>
-                                            </m:mc>
-                                          </m:mcs>
-                                          <m:ctrlPr>
-                                            <a:rPr lang="en-US" altLang="zh-TW" b="0" i="1" smtClean="0">
-                                              <a:latin typeface="Cambria Math" panose="02040503050406030204" pitchFamily="18" charset="0"/>
-                                            </a:rPr>
-                                          </m:ctrlPr>
-                                        </m:mPr>
-                                        <m:mr>
-                                          <m:e>
-                                            <m:r>
-                                              <m:rPr>
-                                                <m:brk m:alnAt="7"/>
-                                              </m:rPr>
-                                              <a:rPr lang="en-US" altLang="zh-TW" b="0" i="1" smtClean="0">
-                                                <a:latin typeface="Cambria Math" panose="02040503050406030204" pitchFamily="18" charset="0"/>
-                                              </a:rPr>
-                                              <m:t>−0.2063</m:t>
-                                            </m:r>
-                                          </m:e>
-                                        </m:mr>
-                                        <m:mr>
-                                          <m:e>
-                                            <m:r>
-                                              <a:rPr lang="en-US" altLang="zh-TW" b="0" i="1" smtClean="0">
-                                                <a:latin typeface="Cambria Math" panose="02040503050406030204" pitchFamily="18" charset="0"/>
-                                              </a:rPr>
-                                              <m:t>−0.2062</m:t>
-                                            </m:r>
-                                          </m:e>
-                                        </m:mr>
-                                        <m:mr>
-                                          <m:e>
-                                            <m:r>
-                                              <a:rPr lang="en-US" altLang="zh-TW" b="0" i="1" smtClean="0">
-                                                <a:latin typeface="Cambria Math" panose="02040503050406030204" pitchFamily="18" charset="0"/>
-                                              </a:rPr>
-                                              <m:t>−0.1237</m:t>
-                                            </m:r>
-                                          </m:e>
-                                        </m:mr>
-                                      </m:m>
-                                    </m:e>
-                                  </m:mr>
-                                </m:m>
-                              </m:e>
-                              <m:e>
-                                <m:m>
-                                  <m:mPr>
-                                    <m:mcs>
-                                      <m:mc>
-                                        <m:mcPr>
-                                          <m:count m:val="1"/>
-                                          <m:mcJc m:val="center"/>
-                                        </m:mcPr>
-                                      </m:mc>
-                                    </m:mcs>
-                                    <m:ctrlPr>
-                                      <a:rPr lang="en-US" altLang="zh-TW" b="0" i="1" smtClean="0">
-                                        <a:latin typeface="Cambria Math" panose="02040503050406030204" pitchFamily="18" charset="0"/>
-                                      </a:rPr>
-                                    </m:ctrlPr>
-                                  </m:mPr>
-                                  <m:mr>
-                                    <m:e>
-                                      <m:m>
-                                        <m:mPr>
-                                          <m:mcs>
-                                            <m:mc>
-                                              <m:mcPr>
-                                                <m:count m:val="3"/>
-                                                <m:mcJc m:val="center"/>
-                                              </m:mcPr>
-                                            </m:mc>
-                                          </m:mcs>
-                                          <m:ctrlPr>
-                                            <a:rPr lang="en-US" altLang="zh-TW" b="0" i="1" smtClean="0">
-                                              <a:latin typeface="Cambria Math" panose="02040503050406030204" pitchFamily="18" charset="0"/>
-                                            </a:rPr>
-                                          </m:ctrlPr>
-                                        </m:mPr>
-                                        <m:mr>
-                                          <m:e>
-                                            <m:r>
-                                              <m:rPr>
-                                                <m:brk m:alnAt="7"/>
-                                              </m:rPr>
-                                              <a:rPr lang="en-US" altLang="zh-TW" b="0" i="1" smtClean="0">
-                                                <a:latin typeface="Cambria Math" panose="02040503050406030204" pitchFamily="18" charset="0"/>
-                                              </a:rPr>
-                                              <m:t>0.8173</m:t>
-                                            </m:r>
-                                          </m:e>
-                                          <m:e>
-                                            <m:r>
-                                              <a:rPr lang="en-US" altLang="zh-TW" b="0" i="1" smtClean="0">
-                                                <a:latin typeface="Cambria Math" panose="02040503050406030204" pitchFamily="18" charset="0"/>
-                                              </a:rPr>
-                                              <m:t>−0.2089</m:t>
-                                            </m:r>
-                                          </m:e>
-                                          <m:e>
-                                            <m:m>
-                                              <m:mPr>
-                                                <m:mcs>
-                                                  <m:mc>
-                                                    <m:mcPr>
-                                                      <m:count m:val="3"/>
-                                                      <m:mcJc m:val="center"/>
-                                                    </m:mcPr>
-                                                  </m:mc>
-                                                </m:mcs>
-                                                <m:ctrlPr>
-                                                  <a:rPr lang="en-US" altLang="zh-TW" b="0" i="1" smtClean="0">
-                                                    <a:latin typeface="Cambria Math" panose="02040503050406030204" pitchFamily="18" charset="0"/>
-                                                  </a:rPr>
-                                                </m:ctrlPr>
-                                              </m:mPr>
-                                              <m:mr>
-                                                <m:e>
-                                                  <m:r>
-                                                    <m:rPr>
-                                                      <m:brk m:alnAt="7"/>
-                                                    </m:rPr>
-                                                    <a:rPr lang="en-US" altLang="zh-TW" b="0" i="1" smtClean="0">
-                                                      <a:latin typeface="Cambria Math" panose="02040503050406030204" pitchFamily="18" charset="0"/>
-                                                    </a:rPr>
-                                                    <m:t>−0.1208</m:t>
-                                                  </m:r>
-                                                </m:e>
-                                                <m:e>
-                                                  <m:r>
-                                                    <a:rPr lang="en-US" altLang="zh-TW" b="0" i="1" smtClean="0">
-                                                      <a:latin typeface="Cambria Math" panose="02040503050406030204" pitchFamily="18" charset="0"/>
-                                                    </a:rPr>
-                                                    <m:t>−0.1198</m:t>
-                                                  </m:r>
-                                                </m:e>
-                                                <m:e>
-                                                  <m:r>
-                                                    <a:rPr lang="en-US" altLang="zh-TW" b="0" i="1" smtClean="0">
-                                                      <a:latin typeface="Cambria Math" panose="02040503050406030204" pitchFamily="18" charset="0"/>
-                                                    </a:rPr>
-                                                    <m:t>−0.2102</m:t>
-                                                  </m:r>
-                                                </m:e>
-                                              </m:mr>
-                                            </m:m>
-                                          </m:e>
-                                        </m:mr>
-                                      </m:m>
-                                    </m:e>
-                                  </m:mr>
-                                  <m:mr>
-                                    <m:e>
-                                      <m:m>
-                                        <m:mPr>
-                                          <m:mcs>
-                                            <m:mc>
-                                              <m:mcPr>
-                                                <m:count m:val="3"/>
-                                                <m:mcJc m:val="center"/>
-                                              </m:mcPr>
-                                            </m:mc>
-                                          </m:mcs>
-                                          <m:ctrlPr>
-                                            <a:rPr lang="en-US" altLang="zh-TW" b="0" i="1" smtClean="0">
-                                              <a:latin typeface="Cambria Math" panose="02040503050406030204" pitchFamily="18" charset="0"/>
-                                            </a:rPr>
-                                          </m:ctrlPr>
-                                        </m:mPr>
-                                        <m:mr>
-                                          <m:e>
-                                            <m:r>
-                                              <m:rPr>
-                                                <m:brk m:alnAt="7"/>
-                                              </m:rPr>
-                                              <a:rPr lang="en-US" altLang="zh-TW" b="0" i="1" smtClean="0">
-                                                <a:latin typeface="Cambria Math" panose="02040503050406030204" pitchFamily="18" charset="0"/>
-                                              </a:rPr>
-                                              <m:t>−0.1971</m:t>
-                                            </m:r>
-                                          </m:e>
-                                          <m:e>
-                                            <m:r>
-                                              <a:rPr lang="en-US" altLang="zh-TW" b="0" i="1" smtClean="0">
-                                                <a:latin typeface="Cambria Math" panose="02040503050406030204" pitchFamily="18" charset="0"/>
-                                              </a:rPr>
-                                              <m:t>0.8358</m:t>
-                                            </m:r>
-                                          </m:e>
-                                          <m:e>
-                                            <m:m>
-                                              <m:mPr>
-                                                <m:mcs>
-                                                  <m:mc>
-                                                    <m:mcPr>
-                                                      <m:count m:val="3"/>
-                                                      <m:mcJc m:val="center"/>
-                                                    </m:mcPr>
-                                                  </m:mc>
-                                                </m:mcs>
-                                                <m:ctrlPr>
-                                                  <a:rPr lang="en-US" altLang="zh-TW" b="0" i="1" smtClean="0">
-                                                    <a:latin typeface="Cambria Math" panose="02040503050406030204" pitchFamily="18" charset="0"/>
-                                                  </a:rPr>
-                                                </m:ctrlPr>
-                                              </m:mPr>
-                                              <m:mr>
-                                                <m:e>
-                                                  <m:r>
-                                                    <m:rPr>
-                                                      <m:brk m:alnAt="7"/>
-                                                    </m:rPr>
-                                                    <a:rPr lang="en-US" altLang="zh-TW" b="0" i="1" smtClean="0">
-                                                      <a:latin typeface="Cambria Math" panose="02040503050406030204" pitchFamily="18" charset="0"/>
-                                                    </a:rPr>
-                                                    <m:t>−0.1243</m:t>
-                                                  </m:r>
-                                                </m:e>
-                                                <m:e>
-                                                  <m:r>
-                                                    <a:rPr lang="en-US" altLang="zh-TW" b="0" i="1" smtClean="0">
-                                                      <a:latin typeface="Cambria Math" panose="02040503050406030204" pitchFamily="18" charset="0"/>
-                                                    </a:rPr>
-                                                    <m:t>−0.1970</m:t>
-                                                  </m:r>
-                                                </m:e>
-                                                <m:e>
-                                                  <m:r>
-                                                    <a:rPr lang="en-US" altLang="zh-TW" b="0" i="1" smtClean="0">
-                                                      <a:latin typeface="Cambria Math" panose="02040503050406030204" pitchFamily="18" charset="0"/>
-                                                    </a:rPr>
-                                                    <m:t>−0.1232</m:t>
-                                                  </m:r>
-                                                </m:e>
-                                              </m:mr>
-                                            </m:m>
-                                          </m:e>
-                                        </m:mr>
-                                      </m:m>
-                                    </m:e>
-                                  </m:mr>
-                                  <m:mr>
-                                    <m:e>
-                                      <m:m>
-                                        <m:mPr>
-                                          <m:mcs>
-                                            <m:mc>
-                                              <m:mcPr>
-                                                <m:count m:val="1"/>
-                                                <m:mcJc m:val="center"/>
-                                              </m:mcPr>
-                                            </m:mc>
-                                          </m:mcs>
-                                          <m:ctrlPr>
-                                            <a:rPr lang="en-US" altLang="zh-TW" b="0" i="1" smtClean="0">
-                                              <a:latin typeface="Cambria Math" panose="02040503050406030204" pitchFamily="18" charset="0"/>
-                                            </a:rPr>
-                                          </m:ctrlPr>
-                                        </m:mPr>
-                                        <m:mr>
-                                          <m:e>
-                                            <m:m>
-                                              <m:mPr>
-                                                <m:mcs>
-                                                  <m:mc>
-                                                    <m:mcPr>
-                                                      <m:count m:val="3"/>
-                                                      <m:mcJc m:val="center"/>
-                                                    </m:mcPr>
-                                                  </m:mc>
-                                                </m:mcs>
-                                                <m:ctrlPr>
-                                                  <a:rPr lang="en-US" altLang="zh-TW" b="0" i="1" smtClean="0">
-                                                    <a:latin typeface="Cambria Math" panose="02040503050406030204" pitchFamily="18" charset="0"/>
-                                                  </a:rPr>
-                                                </m:ctrlPr>
-                                              </m:mPr>
-                                              <m:mr>
-                                                <m:e>
-                                                  <m:r>
-                                                    <m:rPr>
-                                                      <m:brk m:alnAt="7"/>
-                                                    </m:rPr>
-                                                    <a:rPr lang="en-US" altLang="zh-TW" b="0" i="1" smtClean="0">
-                                                      <a:latin typeface="Cambria Math" panose="02040503050406030204" pitchFamily="18" charset="0"/>
-                                                    </a:rPr>
-                                                    <m:t>−0.1207</m:t>
-                                                  </m:r>
-                                                </m:e>
-                                                <m:e>
-                                                  <m:r>
-                                                    <a:rPr lang="en-US" altLang="zh-TW" b="0" i="1" smtClean="0">
-                                                      <a:latin typeface="Cambria Math" panose="02040503050406030204" pitchFamily="18" charset="0"/>
-                                                    </a:rPr>
-                                                    <m:t>−0.1130</m:t>
-                                                  </m:r>
-                                                </m:e>
-                                                <m:e>
-                                                  <m:m>
-                                                    <m:mPr>
-                                                      <m:mcs>
-                                                        <m:mc>
-                                                          <m:mcPr>
-                                                            <m:count m:val="3"/>
-                                                            <m:mcJc m:val="center"/>
-                                                          </m:mcPr>
-                                                        </m:mc>
-                                                      </m:mcs>
-                                                      <m:ctrlPr>
-                                                        <a:rPr lang="en-US" altLang="zh-TW" b="0" i="1" smtClean="0">
-                                                          <a:latin typeface="Cambria Math" panose="02040503050406030204" pitchFamily="18" charset="0"/>
-                                                        </a:rPr>
-                                                      </m:ctrlPr>
-                                                    </m:mPr>
-                                                    <m:mr>
-                                                      <m:e>
-                                                        <m:r>
-                                                          <m:rPr>
-                                                            <m:brk m:alnAt="7"/>
-                                                          </m:rPr>
-                                                          <a:rPr lang="en-US" altLang="zh-TW" b="0" i="1" smtClean="0">
-                                                            <a:latin typeface="Cambria Math" panose="02040503050406030204" pitchFamily="18" charset="0"/>
-                                                          </a:rPr>
-                                                          <m:t>0.8230</m:t>
-                                                        </m:r>
-                                                      </m:e>
-                                                      <m:e>
-                                                        <m:r>
-                                                          <a:rPr lang="en-US" altLang="zh-TW" b="0" i="1" smtClean="0">
-                                                            <a:latin typeface="Cambria Math" panose="02040503050406030204" pitchFamily="18" charset="0"/>
-                                                          </a:rPr>
-                                                          <m:t>−0.1206</m:t>
-                                                        </m:r>
-                                                      </m:e>
-                                                      <m:e>
-                                                        <m:r>
-                                                          <a:rPr lang="en-US" altLang="zh-TW" b="0" i="1" smtClean="0">
-                                                            <a:latin typeface="Cambria Math" panose="02040503050406030204" pitchFamily="18" charset="0"/>
-                                                          </a:rPr>
-                                                          <m:t>−0.2085</m:t>
-                                                        </m:r>
-                                                      </m:e>
-                                                    </m:mr>
-                                                  </m:m>
-                                                </m:e>
-                                              </m:mr>
-                                            </m:m>
-                                          </m:e>
-                                        </m:mr>
-                                        <m:mr>
-                                          <m:e>
-                                            <m:m>
-                                              <m:mPr>
-                                                <m:mcs>
-                                                  <m:mc>
-                                                    <m:mcPr>
-                                                      <m:count m:val="3"/>
-                                                      <m:mcJc m:val="center"/>
-                                                    </m:mcPr>
-                                                  </m:mc>
-                                                </m:mcs>
-                                                <m:ctrlPr>
-                                                  <a:rPr lang="en-US" altLang="zh-TW" b="0" i="1" smtClean="0">
-                                                    <a:latin typeface="Cambria Math" panose="02040503050406030204" pitchFamily="18" charset="0"/>
-                                                  </a:rPr>
-                                                </m:ctrlPr>
-                                              </m:mPr>
-                                              <m:mr>
-                                                <m:e>
-                                                  <m:r>
-                                                    <m:rPr>
-                                                      <m:brk m:alnAt="7"/>
-                                                    </m:rPr>
-                                                    <a:rPr lang="en-US" altLang="zh-TW" b="0" i="1" smtClean="0">
-                                                      <a:latin typeface="Cambria Math" panose="02040503050406030204" pitchFamily="18" charset="0"/>
-                                                    </a:rPr>
-                                                    <m:t>−0.1206</m:t>
-                                                  </m:r>
-                                                </m:e>
-                                                <m:e>
-                                                  <m:r>
-                                                    <a:rPr lang="en-US" altLang="zh-TW" b="0" i="1" smtClean="0">
-                                                      <a:latin typeface="Cambria Math" panose="02040503050406030204" pitchFamily="18" charset="0"/>
-                                                    </a:rPr>
-                                                    <m:t>−0.2053</m:t>
-                                                  </m:r>
-                                                </m:e>
-                                                <m:e>
-                                                  <m:m>
-                                                    <m:mPr>
-                                                      <m:mcs>
-                                                        <m:mc>
-                                                          <m:mcPr>
-                                                            <m:count m:val="3"/>
-                                                            <m:mcJc m:val="center"/>
-                                                          </m:mcPr>
-                                                        </m:mc>
-                                                      </m:mcs>
-                                                      <m:ctrlPr>
-                                                        <a:rPr lang="en-US" altLang="zh-TW" b="0" i="1" smtClean="0">
-                                                          <a:latin typeface="Cambria Math" panose="02040503050406030204" pitchFamily="18" charset="0"/>
-                                                        </a:rPr>
-                                                      </m:ctrlPr>
-                                                    </m:mPr>
-                                                    <m:mr>
-                                                      <m:e>
-                                                        <m:r>
-                                                          <m:rPr>
-                                                            <m:brk m:alnAt="7"/>
-                                                          </m:rPr>
-                                                          <a:rPr lang="en-US" altLang="zh-TW" b="0" i="1" smtClean="0">
-                                                            <a:latin typeface="Cambria Math" panose="02040503050406030204" pitchFamily="18" charset="0"/>
-                                                          </a:rPr>
-                                                          <m:t>−0.1211</m:t>
-                                                        </m:r>
-                                                      </m:e>
-                                                      <m:e>
-                                                        <m:r>
-                                                          <a:rPr lang="en-US" altLang="zh-TW" b="0" i="1" smtClean="0">
-                                                            <a:latin typeface="Cambria Math" panose="02040503050406030204" pitchFamily="18" charset="0"/>
-                                                          </a:rPr>
-                                                          <m:t>0.8174</m:t>
-                                                        </m:r>
-                                                      </m:e>
-                                                      <m:e>
-                                                        <m:r>
-                                                          <a:rPr lang="en-US" altLang="zh-TW" b="0" i="1" smtClean="0">
-                                                            <a:latin typeface="Cambria Math" panose="02040503050406030204" pitchFamily="18" charset="0"/>
-                                                          </a:rPr>
-                                                          <m:t>−0.1098</m:t>
-                                                        </m:r>
-                                                      </m:e>
-                                                    </m:mr>
-                                                  </m:m>
-                                                </m:e>
-                                              </m:mr>
-                                            </m:m>
-                                          </m:e>
-                                        </m:mr>
-                                        <m:mr>
-                                          <m:e>
-                                            <m:m>
-                                              <m:mPr>
-                                                <m:mcs>
-                                                  <m:mc>
-                                                    <m:mcPr>
-                                                      <m:count m:val="3"/>
-                                                      <m:mcJc m:val="center"/>
-                                                    </m:mcPr>
-                                                  </m:mc>
-                                                </m:mcs>
-                                                <m:ctrlPr>
-                                                  <a:rPr lang="en-US" altLang="zh-TW" b="0" i="1" smtClean="0">
-                                                    <a:latin typeface="Cambria Math" panose="02040503050406030204" pitchFamily="18" charset="0"/>
-                                                  </a:rPr>
-                                                </m:ctrlPr>
-                                              </m:mPr>
-                                              <m:mr>
-                                                <m:e>
-                                                  <m:r>
-                                                    <m:rPr>
-                                                      <m:brk m:alnAt="7"/>
-                                                    </m:rPr>
-                                                    <a:rPr lang="en-US" altLang="zh-TW" b="0" i="1" smtClean="0">
-                                                      <a:latin typeface="Cambria Math" panose="02040503050406030204" pitchFamily="18" charset="0"/>
-                                                    </a:rPr>
-                                                    <m:t>−0.1973</m:t>
-                                                  </m:r>
-                                                </m:e>
-                                                <m:e>
-                                                  <m:r>
-                                                    <a:rPr lang="en-US" altLang="zh-TW" b="0" i="1" smtClean="0">
-                                                      <a:latin typeface="Cambria Math" panose="02040503050406030204" pitchFamily="18" charset="0"/>
-                                                    </a:rPr>
-                                                    <m:t>−0.1254</m:t>
-                                                  </m:r>
-                                                </m:e>
-                                                <m:e>
-                                                  <m:m>
-                                                    <m:mPr>
-                                                      <m:mcs>
-                                                        <m:mc>
-                                                          <m:mcPr>
-                                                            <m:count m:val="3"/>
-                                                            <m:mcJc m:val="center"/>
-                                                          </m:mcPr>
-                                                        </m:mc>
-                                                      </m:mcs>
-                                                      <m:ctrlPr>
-                                                        <a:rPr lang="en-US" altLang="zh-TW" b="0" i="1" smtClean="0">
-                                                          <a:latin typeface="Cambria Math" panose="02040503050406030204" pitchFamily="18" charset="0"/>
-                                                        </a:rPr>
-                                                      </m:ctrlPr>
-                                                    </m:mPr>
-                                                    <m:mr>
-                                                      <m:e>
-                                                        <m:r>
-                                                          <m:rPr>
-                                                            <m:brk m:alnAt="7"/>
-                                                          </m:rPr>
-                                                          <a:rPr lang="en-US" altLang="zh-TW" b="0" i="1" smtClean="0">
-                                                            <a:latin typeface="Cambria Math" panose="02040503050406030204" pitchFamily="18" charset="0"/>
-                                                          </a:rPr>
-                                                          <m:t>−0.1968</m:t>
-                                                        </m:r>
-                                                      </m:e>
-                                                      <m:e>
-                                                        <m:r>
-                                                          <a:rPr lang="en-US" altLang="zh-TW" b="0" i="1" smtClean="0">
-                                                            <a:latin typeface="Cambria Math" panose="02040503050406030204" pitchFamily="18" charset="0"/>
-                                                          </a:rPr>
-                                                          <m:t>−0.1234</m:t>
-                                                        </m:r>
-                                                      </m:e>
-                                                      <m:e>
-                                                        <m:r>
-                                                          <a:rPr lang="en-US" altLang="zh-TW" b="0" i="1" smtClean="0">
-                                                            <a:latin typeface="Cambria Math" panose="02040503050406030204" pitchFamily="18" charset="0"/>
-                                                          </a:rPr>
-                                                          <m:t>0.8277</m:t>
-                                                        </m:r>
-                                                      </m:e>
-                                                    </m:mr>
-                                                  </m:m>
-                                                </m:e>
-                                              </m:mr>
-                                            </m:m>
-                                          </m:e>
-                                        </m:mr>
-                                      </m:m>
-                                    </m:e>
-                                  </m:mr>
-                                </m:m>
-                              </m:e>
-                            </m:mr>
-                          </m:m>
-                        </m:e>
-                      </m:d>
-                    </m:oMath>
-                  </m:oMathPara>
-                </a14:m>
-                <a:endParaRPr lang="zh-TW" altLang="en-US" dirty="0"/>
-              </a:p>
-            </p:txBody>
-          </p:sp>
-        </mc:Choice>
-        <mc:Fallback>
-          <p:sp>
-            <p:nvSpPr>
-              <p:cNvPr id="16" name="文字方塊 15">
-                <a:extLst>
-                  <a:ext uri="{FF2B5EF4-FFF2-40B4-BE49-F238E27FC236}">
-                    <a16:creationId xmlns:a16="http://schemas.microsoft.com/office/drawing/2014/main" id="{3514A624-EDE9-40AF-BE57-A60AD18744E7}"/>
-                  </a:ext>
-                </a:extLst>
-              </p:cNvPr>
-              <p:cNvSpPr txBox="1">
-                <a:spLocks noRot="1" noChangeAspect="1" noMove="1" noResize="1" noEditPoints="1" noAdjustHandles="1" noChangeArrowheads="1" noChangeShapeType="1" noTextEdit="1"/>
-              </p:cNvSpPr>
-              <p:nvPr/>
-            </p:nvSpPr>
-            <p:spPr>
-              <a:xfrm>
-                <a:off x="4860789" y="981802"/>
-                <a:ext cx="7221144" cy="1511055"/>
-              </a:xfrm>
-              <a:prstGeom prst="rect">
-                <a:avLst/>
-              </a:prstGeom>
-              <a:blipFill>
-                <a:blip r:embed="rId10"/>
-                <a:stretch>
-                  <a:fillRect/>
-                </a:stretch>
-              </a:blipFill>
-            </p:spPr>
-            <p:txBody>
-              <a:bodyPr/>
-              <a:lstStyle/>
-              <a:p>
-                <a:r>
-                  <a:rPr lang="zh-TW" altLang="en-US">
-                    <a:noFill/>
-                  </a:rPr>
-                  <a:t> </a:t>
-                </a:r>
-              </a:p>
-            </p:txBody>
-          </p:sp>
-        </mc:Fallback>
-      </mc:AlternateContent>
-      <mc:AlternateContent xmlns:mc="http://schemas.openxmlformats.org/markup-compatibility/2006">
-        <mc:Choice xmlns:a14="http://schemas.microsoft.com/office/drawing/2010/main" Requires="a14">
-          <p:sp>
-            <p:nvSpPr>
-              <p:cNvPr id="17" name="文字方塊 16">
-                <a:extLst>
-                  <a:ext uri="{FF2B5EF4-FFF2-40B4-BE49-F238E27FC236}">
-                    <a16:creationId xmlns:a16="http://schemas.microsoft.com/office/drawing/2014/main" id="{F6595C69-CAA3-4008-80B0-FCBDF01775AC}"/>
-                  </a:ext>
-                </a:extLst>
-              </p:cNvPr>
-              <p:cNvSpPr txBox="1"/>
-              <p:nvPr/>
-            </p:nvSpPr>
-            <p:spPr>
-              <a:xfrm>
-                <a:off x="5016843" y="2673205"/>
-                <a:ext cx="1417824" cy="291234"/>
-              </a:xfrm>
-              <a:prstGeom prst="rect">
-                <a:avLst/>
-              </a:prstGeom>
-              <a:noFill/>
-            </p:spPr>
-            <p:txBody>
-              <a:bodyPr wrap="none" lIns="0" tIns="0" rIns="0" bIns="0" rtlCol="0">
-                <a:spAutoFit/>
-              </a:bodyPr>
-              <a:lstStyle/>
-              <a:p>
-                <a14:m>
-                  <m:oMathPara xmlns:m="http://schemas.openxmlformats.org/officeDocument/2006/math">
-                    <m:oMathParaPr>
-                      <m:jc m:val="centerGroup"/>
-                    </m:oMathParaPr>
-                    <m:oMath xmlns:m="http://schemas.openxmlformats.org/officeDocument/2006/math">
-                      <m:acc>
-                        <m:accPr>
-                          <m:chr m:val="̂"/>
-                          <m:ctrlPr>
-                            <a:rPr lang="zh-TW" altLang="en-US" i="1" smtClean="0">
-                              <a:latin typeface="Cambria Math" panose="02040503050406030204" pitchFamily="18" charset="0"/>
-                            </a:rPr>
-                          </m:ctrlPr>
-                        </m:accPr>
-                        <m:e>
-                          <m:r>
-                            <a:rPr lang="en-US" altLang="zh-TW" i="1" smtClean="0">
-                              <a:latin typeface="Cambria Math" panose="02040503050406030204" pitchFamily="18" charset="0"/>
-                              <a:ea typeface="Cambria Math" panose="02040503050406030204" pitchFamily="18" charset="0"/>
-                            </a:rPr>
-                            <m:t>ℓ</m:t>
-                          </m:r>
-                        </m:e>
-                      </m:acc>
-                      <m:r>
-                        <a:rPr lang="en-US" altLang="zh-TW" b="0" i="1" smtClean="0">
-                          <a:latin typeface="Cambria Math" panose="02040503050406030204" pitchFamily="18" charset="0"/>
-                        </a:rPr>
-                        <m:t>=857.3 </m:t>
-                      </m:r>
-                      <m:r>
-                        <a:rPr lang="en-US" altLang="zh-TW" b="0" i="1" smtClean="0">
-                          <a:latin typeface="Cambria Math" panose="02040503050406030204" pitchFamily="18" charset="0"/>
-                        </a:rPr>
-                        <m:t>𝑢𝑚</m:t>
-                      </m:r>
-                    </m:oMath>
-                  </m:oMathPara>
-                </a14:m>
-                <a:endParaRPr lang="zh-TW" altLang="en-US" dirty="0"/>
-              </a:p>
-            </p:txBody>
-          </p:sp>
-        </mc:Choice>
-        <mc:Fallback>
-          <p:sp>
-            <p:nvSpPr>
-              <p:cNvPr id="17" name="文字方塊 16">
-                <a:extLst>
-                  <a:ext uri="{FF2B5EF4-FFF2-40B4-BE49-F238E27FC236}">
-                    <a16:creationId xmlns:a16="http://schemas.microsoft.com/office/drawing/2014/main" id="{F6595C69-CAA3-4008-80B0-FCBDF01775AC}"/>
-                  </a:ext>
-                </a:extLst>
-              </p:cNvPr>
-              <p:cNvSpPr txBox="1">
-                <a:spLocks noRot="1" noChangeAspect="1" noMove="1" noResize="1" noEditPoints="1" noAdjustHandles="1" noChangeArrowheads="1" noChangeShapeType="1" noTextEdit="1"/>
-              </p:cNvSpPr>
-              <p:nvPr/>
-            </p:nvSpPr>
-            <p:spPr>
-              <a:xfrm>
-                <a:off x="5016843" y="2673205"/>
-                <a:ext cx="1417824" cy="291234"/>
-              </a:xfrm>
-              <a:prstGeom prst="rect">
-                <a:avLst/>
-              </a:prstGeom>
-              <a:blipFill>
-                <a:blip r:embed="rId11"/>
-                <a:stretch>
-                  <a:fillRect l="-3863" t="-19149" r="-2146" b="-10638"/>
-                </a:stretch>
-              </a:blipFill>
-            </p:spPr>
-            <p:txBody>
-              <a:bodyPr/>
-              <a:lstStyle/>
-              <a:p>
-                <a:r>
-                  <a:rPr lang="zh-TW" altLang="en-US">
-                    <a:noFill/>
-                  </a:rPr>
-                  <a:t> </a:t>
-                </a:r>
-              </a:p>
-            </p:txBody>
-          </p:sp>
-        </mc:Fallback>
-      </mc:AlternateContent>
-      <mc:AlternateContent xmlns:mc="http://schemas.openxmlformats.org/markup-compatibility/2006">
-        <mc:Choice xmlns:a14="http://schemas.microsoft.com/office/drawing/2010/main" Requires="a14">
-          <p:sp>
-            <p:nvSpPr>
-              <p:cNvPr id="18" name="文字方塊 17">
-                <a:extLst>
-                  <a:ext uri="{FF2B5EF4-FFF2-40B4-BE49-F238E27FC236}">
-                    <a16:creationId xmlns:a16="http://schemas.microsoft.com/office/drawing/2014/main" id="{134DFDD4-5BF9-44FC-9723-CF4F06DE5453}"/>
-                  </a:ext>
-                </a:extLst>
-              </p:cNvPr>
-              <p:cNvSpPr txBox="1"/>
-              <p:nvPr/>
-            </p:nvSpPr>
-            <p:spPr>
-              <a:xfrm>
-                <a:off x="8488610" y="2673768"/>
-                <a:ext cx="2072490" cy="305340"/>
-              </a:xfrm>
-              <a:prstGeom prst="rect">
-                <a:avLst/>
-              </a:prstGeom>
-              <a:noFill/>
-            </p:spPr>
-            <p:txBody>
-              <a:bodyPr wrap="none" lIns="0" tIns="0" rIns="0" bIns="0" rtlCol="0">
-                <a:spAutoFit/>
-              </a:bodyPr>
-              <a:lstStyle/>
-              <a:p>
-                <a14:m>
-                  <m:oMathPara xmlns:m="http://schemas.openxmlformats.org/officeDocument/2006/math">
-                    <m:oMathParaPr>
-                      <m:jc m:val="centerGroup"/>
-                    </m:oMathParaPr>
-                    <m:oMath xmlns:m="http://schemas.openxmlformats.org/officeDocument/2006/math">
-                      <m:sPre>
-                        <m:sPrePr>
-                          <m:ctrlPr>
-                            <a:rPr lang="en-US" altLang="zh-TW" i="1" smtClean="0">
-                              <a:latin typeface="Cambria Math" panose="02040503050406030204" pitchFamily="18" charset="0"/>
-                            </a:rPr>
-                          </m:ctrlPr>
-                        </m:sPrePr>
-                        <m:sub/>
-                        <m:sup>
-                          <m:r>
-                            <a:rPr lang="en-US" altLang="zh-TW" b="0" i="1" smtClean="0">
-                              <a:latin typeface="Cambria Math" panose="02040503050406030204" pitchFamily="18" charset="0"/>
-                            </a:rPr>
-                            <m:t>𝐵</m:t>
-                          </m:r>
-                        </m:sup>
-                        <m:e>
-                          <m:sSub>
-                            <m:sSubPr>
-                              <m:ctrlPr>
-                                <a:rPr lang="en-US" altLang="zh-TW" i="1" smtClean="0">
-                                  <a:latin typeface="Cambria Math" panose="02040503050406030204" pitchFamily="18" charset="0"/>
-                                </a:rPr>
-                              </m:ctrlPr>
-                            </m:sSubPr>
-                            <m:e>
-                              <m:acc>
-                                <m:accPr>
-                                  <m:chr m:val="̂"/>
-                                  <m:ctrlPr>
-                                    <a:rPr lang="en-US" altLang="zh-TW" i="1" smtClean="0">
-                                      <a:latin typeface="Cambria Math" panose="02040503050406030204" pitchFamily="18" charset="0"/>
-                                    </a:rPr>
-                                  </m:ctrlPr>
-                                </m:accPr>
-                                <m:e>
-                                  <m:r>
-                                    <a:rPr lang="en-US" altLang="zh-TW" b="0" i="1" smtClean="0">
-                                      <a:latin typeface="Cambria Math" panose="02040503050406030204" pitchFamily="18" charset="0"/>
-                                    </a:rPr>
-                                    <m:t>𝑔</m:t>
-                                  </m:r>
-                                </m:e>
-                              </m:acc>
-                            </m:e>
-                            <m:sub>
-                              <m:r>
-                                <a:rPr lang="en-US" altLang="zh-TW" b="0" i="1" smtClean="0">
-                                  <a:latin typeface="Cambria Math" panose="02040503050406030204" pitchFamily="18" charset="0"/>
-                                </a:rPr>
-                                <m:t>𝐼</m:t>
-                              </m:r>
-                            </m:sub>
-                          </m:sSub>
-                          <m:r>
-                            <a:rPr lang="en-US" altLang="zh-TW" b="0" i="1" smtClean="0">
-                              <a:latin typeface="Cambria Math" panose="02040503050406030204" pitchFamily="18" charset="0"/>
-                            </a:rPr>
-                            <m:t>=9.6603 </m:t>
-                          </m:r>
-                          <m:r>
-                            <a:rPr lang="en-US" altLang="zh-TW" b="0" i="1" smtClean="0">
-                              <a:latin typeface="Cambria Math" panose="02040503050406030204" pitchFamily="18" charset="0"/>
-                            </a:rPr>
-                            <m:t>𝑚𝑇</m:t>
-                          </m:r>
-                          <m:r>
-                            <a:rPr lang="en-US" altLang="zh-TW" b="0" i="1" smtClean="0">
-                              <a:latin typeface="Cambria Math" panose="02040503050406030204" pitchFamily="18" charset="0"/>
-                            </a:rPr>
-                            <m:t>/</m:t>
-                          </m:r>
-                          <m:r>
-                            <a:rPr lang="en-US" altLang="zh-TW" b="0" i="1" smtClean="0">
-                              <a:latin typeface="Cambria Math" panose="02040503050406030204" pitchFamily="18" charset="0"/>
-                            </a:rPr>
-                            <m:t>𝐴</m:t>
-                          </m:r>
-                        </m:e>
-                      </m:sPre>
-                    </m:oMath>
-                  </m:oMathPara>
-                </a14:m>
-                <a:endParaRPr lang="zh-TW" altLang="en-US" dirty="0"/>
-              </a:p>
-            </p:txBody>
-          </p:sp>
-        </mc:Choice>
-        <mc:Fallback>
-          <p:sp>
-            <p:nvSpPr>
-              <p:cNvPr id="18" name="文字方塊 17">
-                <a:extLst>
-                  <a:ext uri="{FF2B5EF4-FFF2-40B4-BE49-F238E27FC236}">
-                    <a16:creationId xmlns:a16="http://schemas.microsoft.com/office/drawing/2014/main" id="{134DFDD4-5BF9-44FC-9723-CF4F06DE5453}"/>
-                  </a:ext>
-                </a:extLst>
-              </p:cNvPr>
-              <p:cNvSpPr txBox="1">
-                <a:spLocks noRot="1" noChangeAspect="1" noMove="1" noResize="1" noEditPoints="1" noAdjustHandles="1" noChangeArrowheads="1" noChangeShapeType="1" noTextEdit="1"/>
-              </p:cNvSpPr>
-              <p:nvPr/>
-            </p:nvSpPr>
-            <p:spPr>
-              <a:xfrm>
-                <a:off x="8488610" y="2673768"/>
-                <a:ext cx="2072490" cy="305340"/>
-              </a:xfrm>
-              <a:prstGeom prst="rect">
-                <a:avLst/>
-              </a:prstGeom>
-              <a:blipFill>
-                <a:blip r:embed="rId12"/>
-                <a:stretch>
-                  <a:fillRect t="-16000" r="-2647" b="-30000"/>
-                </a:stretch>
-              </a:blipFill>
-            </p:spPr>
-            <p:txBody>
-              <a:bodyPr/>
-              <a:lstStyle/>
-              <a:p>
-                <a:r>
-                  <a:rPr lang="zh-TW" altLang="en-US">
-                    <a:noFill/>
-                  </a:rPr>
-                  <a:t> </a:t>
-                </a:r>
-              </a:p>
-            </p:txBody>
-          </p:sp>
-        </mc:Fallback>
-      </mc:AlternateContent>
-    </p:spTree>
-    <p:extLst>
-      <p:ext uri="{BB962C8B-B14F-4D97-AF65-F5344CB8AC3E}">
-        <p14:creationId xmlns:p14="http://schemas.microsoft.com/office/powerpoint/2010/main" val="4278317432"/>
-      </p:ext>
-    </p:extLst>
-  </p:cSld>
-  <p:clrMapOvr>
-    <a:masterClrMapping/>
-  </p:clrMapOvr>
-</p:sld>
-</file>
-
-<file path=ppt/slides/slide11.xml><?xml version="1.0" encoding="utf-8"?>
-<p:sld xmlns:a="http://schemas.openxmlformats.org/drawingml/2006/main" xmlns:r="http://schemas.openxmlformats.org/officeDocument/2006/relationships" xmlns:p="http://schemas.openxmlformats.org/presentationml/2006/main">
-  <p:cSld>
-    <p:spTree>
-      <p:nvGrpSpPr>
-        <p:cNvPr id="1" name=""/>
-        <p:cNvGrpSpPr/>
-        <p:nvPr/>
-      </p:nvGrpSpPr>
-      <p:grpSpPr>
-        <a:xfrm>
-          <a:off x="0" y="0"/>
-          <a:ext cx="0" cy="0"/>
-          <a:chOff x="0" y="0"/>
-          <a:chExt cx="0" cy="0"/>
-        </a:xfrm>
-      </p:grpSpPr>
-      <p:sp>
-        <p:nvSpPr>
-          <p:cNvPr id="2" name="標題 1">
-            <a:extLst>
-              <a:ext uri="{FF2B5EF4-FFF2-40B4-BE49-F238E27FC236}">
-                <a16:creationId xmlns:a16="http://schemas.microsoft.com/office/drawing/2014/main" id="{976117A0-A94B-49AB-92D6-B22FD0AF0753}"/>
-              </a:ext>
-            </a:extLst>
-          </p:cNvPr>
-          <p:cNvSpPr>
-            <a:spLocks noGrp="1"/>
-          </p:cNvSpPr>
-          <p:nvPr>
-            <p:ph type="title"/>
-          </p:nvPr>
-        </p:nvSpPr>
-        <p:spPr>
-          <a:xfrm>
-            <a:off x="0" y="85727"/>
-            <a:ext cx="12081933" cy="837142"/>
-          </a:xfrm>
-        </p:spPr>
-        <p:txBody>
-          <a:bodyPr>
-            <a:normAutofit fontScale="90000"/>
-          </a:bodyPr>
-          <a:lstStyle/>
-          <a:p>
-            <a:r>
-              <a:rPr lang="en-US" altLang="zh-TW" sz="4000" b="1" kern="100" dirty="0">
-                <a:solidFill>
-                  <a:srgbClr val="000000"/>
-                </a:solidFill>
-                <a:latin typeface="Aptos"/>
-                <a:ea typeface="新細明體" panose="02020500000000000000" pitchFamily="18" charset="-120"/>
-                <a:cs typeface="Times New Roman" panose="02020603050405020304" pitchFamily="18" charset="0"/>
-              </a:rPr>
-              <a:t>Current-based lumped-parameter modeling and calibration</a:t>
-            </a:r>
-            <a:br>
-              <a:rPr lang="zh-TW" altLang="zh-TW" sz="1800" kern="100" dirty="0">
-                <a:effectLst/>
-                <a:latin typeface="Aptos"/>
-                <a:ea typeface="新細明體" panose="02020500000000000000" pitchFamily="18" charset="-120"/>
-                <a:cs typeface="Times New Roman" panose="02020603050405020304" pitchFamily="18" charset="0"/>
-              </a:rPr>
-            </a:br>
-            <a:endParaRPr lang="zh-TW" altLang="en-US" dirty="0"/>
-          </a:p>
-        </p:txBody>
-      </p:sp>
-      <p:sp>
-        <p:nvSpPr>
-          <p:cNvPr id="40" name="文字方塊 39">
-            <a:extLst>
-              <a:ext uri="{FF2B5EF4-FFF2-40B4-BE49-F238E27FC236}">
-                <a16:creationId xmlns:a16="http://schemas.microsoft.com/office/drawing/2014/main" id="{B1E82766-E1D8-4AA6-A2B9-6AEA170385C0}"/>
-              </a:ext>
-            </a:extLst>
-          </p:cNvPr>
-          <p:cNvSpPr txBox="1"/>
-          <p:nvPr/>
-        </p:nvSpPr>
-        <p:spPr>
-          <a:xfrm>
-            <a:off x="0" y="324377"/>
-            <a:ext cx="6324600" cy="390684"/>
-          </a:xfrm>
-          <a:prstGeom prst="rect">
-            <a:avLst/>
-          </a:prstGeom>
-          <a:noFill/>
-        </p:spPr>
-        <p:txBody>
-          <a:bodyPr wrap="square" rtlCol="0">
-            <a:spAutoFit/>
-          </a:bodyPr>
-          <a:lstStyle/>
-          <a:p>
-            <a:pPr>
-              <a:lnSpc>
-                <a:spcPct val="115000"/>
-              </a:lnSpc>
-              <a:spcAft>
-                <a:spcPts val="800"/>
-              </a:spcAft>
-            </a:pPr>
-            <a:r>
-              <a:rPr lang="en-US" altLang="zh-TW" kern="100" dirty="0">
-                <a:solidFill>
-                  <a:srgbClr val="000000"/>
-                </a:solidFill>
-                <a:latin typeface="Times New Roman" panose="02020603050405020304" pitchFamily="18" charset="0"/>
-                <a:ea typeface="新細明體" panose="02020500000000000000" pitchFamily="18" charset="-120"/>
-                <a:cs typeface="Times New Roman" panose="02020603050405020304" pitchFamily="18" charset="0"/>
-              </a:rPr>
-              <a:t>E</a:t>
-            </a:r>
-            <a:r>
-              <a:rPr lang="en-US" altLang="zh-TW" kern="100" dirty="0">
-                <a:solidFill>
-                  <a:srgbClr val="000000"/>
-                </a:solidFill>
-                <a:effectLst/>
-                <a:latin typeface="Times New Roman" panose="02020603050405020304" pitchFamily="18" charset="0"/>
-                <a:ea typeface="新細明體" panose="02020500000000000000" pitchFamily="18" charset="-120"/>
-                <a:cs typeface="Times New Roman" panose="02020603050405020304" pitchFamily="18" charset="0"/>
-              </a:rPr>
-              <a:t>. </a:t>
-            </a:r>
-            <a:r>
-              <a:rPr lang="en-US" altLang="zh-TW" i="1" kern="100" dirty="0">
-                <a:solidFill>
-                  <a:srgbClr val="000000"/>
-                </a:solidFill>
-                <a:latin typeface="Times New Roman" panose="02020603050405020304" pitchFamily="18" charset="0"/>
-                <a:ea typeface="新細明體" panose="02020500000000000000" pitchFamily="18" charset="-120"/>
-                <a:cs typeface="Times New Roman" panose="02020603050405020304" pitchFamily="18" charset="0"/>
-              </a:rPr>
-              <a:t>Validation</a:t>
-            </a:r>
-            <a:endParaRPr lang="zh-TW" altLang="zh-TW" kern="100" dirty="0">
-              <a:effectLst/>
-              <a:latin typeface="Aptos"/>
-              <a:ea typeface="新細明體" panose="02020500000000000000" pitchFamily="18" charset="-120"/>
-              <a:cs typeface="Times New Roman" panose="02020603050405020304" pitchFamily="18" charset="0"/>
-            </a:endParaRPr>
-          </a:p>
-        </p:txBody>
-      </p:sp>
-      <mc:AlternateContent xmlns:mc="http://schemas.openxmlformats.org/markup-compatibility/2006" xmlns:a14="http://schemas.microsoft.com/office/drawing/2010/main">
-        <mc:Choice Requires="a14">
-          <p:sp>
-            <p:nvSpPr>
-              <p:cNvPr id="3" name="文字方塊 2">
-                <a:extLst>
-                  <a:ext uri="{FF2B5EF4-FFF2-40B4-BE49-F238E27FC236}">
-                    <a16:creationId xmlns:a16="http://schemas.microsoft.com/office/drawing/2014/main" id="{B6964577-860D-4EB3-8219-1A6240335DA6}"/>
-                  </a:ext>
-                </a:extLst>
-              </p:cNvPr>
-              <p:cNvSpPr txBox="1"/>
-              <p:nvPr/>
-            </p:nvSpPr>
-            <p:spPr>
-              <a:xfrm>
                 <a:off x="8217453" y="423838"/>
                 <a:ext cx="3508909" cy="321563"/>
               </a:xfrm>
@@ -6145,7 +3991,7 @@
 </p:sld>
 </file>
 
-<file path=ppt/slides/slide12.xml><?xml version="1.0" encoding="utf-8"?>
+<file path=ppt/slides/slide11.xml><?xml version="1.0" encoding="utf-8"?>
 <p:sld xmlns:a="http://schemas.openxmlformats.org/drawingml/2006/main" xmlns:r="http://schemas.openxmlformats.org/officeDocument/2006/relationships" xmlns:p="http://schemas.openxmlformats.org/presentationml/2006/main">
   <p:cSld>
     <p:spTree>
@@ -6663,7 +4509,7 @@
 </p:sld>
 </file>
 
-<file path=ppt/slides/slide13.xml><?xml version="1.0" encoding="utf-8"?>
+<file path=ppt/slides/slide12.xml><?xml version="1.0" encoding="utf-8"?>
 <p:sld xmlns:a="http://schemas.openxmlformats.org/drawingml/2006/main" xmlns:r="http://schemas.openxmlformats.org/officeDocument/2006/relationships" xmlns:p="http://schemas.openxmlformats.org/presentationml/2006/main">
   <p:cSld>
     <p:spTree>
@@ -7740,7 +5586,7 @@
 </p:sld>
 </file>
 
-<file path=ppt/slides/slide14.xml><?xml version="1.0" encoding="utf-8"?>
+<file path=ppt/slides/slide13.xml><?xml version="1.0" encoding="utf-8"?>
 <p:sld xmlns:a="http://schemas.openxmlformats.org/drawingml/2006/main" xmlns:r="http://schemas.openxmlformats.org/officeDocument/2006/relationships" xmlns:p="http://schemas.openxmlformats.org/presentationml/2006/main">
   <p:cSld>
     <p:spTree>
@@ -9405,7 +7251,7 @@
 </p:sld>
 </file>
 
-<file path=ppt/slides/slide15.xml><?xml version="1.0" encoding="utf-8"?>
+<file path=ppt/slides/slide14.xml><?xml version="1.0" encoding="utf-8"?>
 <p:sld xmlns:a="http://schemas.openxmlformats.org/drawingml/2006/main" xmlns:r="http://schemas.openxmlformats.org/officeDocument/2006/relationships" xmlns:p="http://schemas.openxmlformats.org/presentationml/2006/main">
   <p:cSld>
     <p:spTree>
@@ -9555,8 +7401,8 @@
         </p:nvSpPr>
         <p:spPr>
           <a:xfrm>
-            <a:off x="252615" y="3814228"/>
-            <a:ext cx="7672185" cy="1754326"/>
+            <a:off x="192878" y="4047862"/>
+            <a:ext cx="11423389" cy="1200329"/>
           </a:xfrm>
           <a:prstGeom prst="rect">
             <a:avLst/>
@@ -11121,7 +8967,7 @@
 </p:sld>
 </file>
 
-<file path=ppt/slides/slide16.xml><?xml version="1.0" encoding="utf-8"?>
+<file path=ppt/slides/slide15.xml><?xml version="1.0" encoding="utf-8"?>
 <p:sld xmlns:a="http://schemas.openxmlformats.org/drawingml/2006/main" xmlns:r="http://schemas.openxmlformats.org/officeDocument/2006/relationships" xmlns:p="http://schemas.openxmlformats.org/presentationml/2006/main">
   <p:cSld>
     <p:spTree>
@@ -12438,463 +10284,6 @@
         </p:nvSpPr>
         <p:spPr>
           <a:xfrm>
-            <a:off x="84667" y="382407"/>
-            <a:ext cx="6324600" cy="390684"/>
-          </a:xfrm>
-          <a:prstGeom prst="rect">
-            <a:avLst/>
-          </a:prstGeom>
-          <a:noFill/>
-        </p:spPr>
-        <p:txBody>
-          <a:bodyPr wrap="square" rtlCol="0">
-            <a:spAutoFit/>
-          </a:bodyPr>
-          <a:lstStyle/>
-          <a:p>
-            <a:pPr marL="342900" lvl="0" indent="-342900">
-              <a:lnSpc>
-                <a:spcPct val="115000"/>
-              </a:lnSpc>
-              <a:spcAft>
-                <a:spcPts val="800"/>
-              </a:spcAft>
-              <a:buFont typeface="+mj-lt"/>
-              <a:buAutoNum type="alphaUcPeriod"/>
-            </a:pPr>
-            <a:r>
-              <a:rPr lang="en-US" altLang="zh-TW" sz="1800" i="1" kern="100" dirty="0">
-                <a:solidFill>
-                  <a:srgbClr val="000000"/>
-                </a:solidFill>
-                <a:effectLst/>
-                <a:latin typeface="Times New Roman" panose="02020603050405020304" pitchFamily="18" charset="0"/>
-                <a:ea typeface="新細明體" panose="02020500000000000000" pitchFamily="18" charset="-120"/>
-                <a:cs typeface="Times New Roman" panose="02020603050405020304" pitchFamily="18" charset="0"/>
-              </a:rPr>
-              <a:t>Multiple-electromagnetic-pole actuation</a:t>
-            </a:r>
-            <a:endParaRPr lang="zh-TW" altLang="zh-TW" sz="1800" i="1" kern="100" dirty="0">
-              <a:effectLst/>
-              <a:latin typeface="Aptos"/>
-              <a:ea typeface="新細明體" panose="02020500000000000000" pitchFamily="18" charset="-120"/>
-              <a:cs typeface="Times New Roman" panose="02020603050405020304" pitchFamily="18" charset="0"/>
-            </a:endParaRPr>
-          </a:p>
-        </p:txBody>
-      </p:sp>
-      <p:sp>
-        <p:nvSpPr>
-          <p:cNvPr id="13" name="文字方塊 12">
-            <a:extLst>
-              <a:ext uri="{FF2B5EF4-FFF2-40B4-BE49-F238E27FC236}">
-                <a16:creationId xmlns:a16="http://schemas.microsoft.com/office/drawing/2014/main" id="{23DE0321-051F-4463-A62F-589D2C2C0E2D}"/>
-              </a:ext>
-            </a:extLst>
-          </p:cNvPr>
-          <p:cNvSpPr txBox="1"/>
-          <p:nvPr/>
-        </p:nvSpPr>
-        <p:spPr>
-          <a:xfrm>
-            <a:off x="-50799" y="5204561"/>
-            <a:ext cx="12242799" cy="1709892"/>
-          </a:xfrm>
-          <a:prstGeom prst="rect">
-            <a:avLst/>
-          </a:prstGeom>
-          <a:noFill/>
-        </p:spPr>
-        <p:txBody>
-          <a:bodyPr wrap="square" rtlCol="0">
-            <a:spAutoFit/>
-          </a:bodyPr>
-          <a:lstStyle/>
-          <a:p>
-            <a:pPr marL="285750" indent="-285750">
-              <a:lnSpc>
-                <a:spcPct val="150000"/>
-              </a:lnSpc>
-              <a:buFont typeface="Arial" panose="020B0604020202020204" pitchFamily="34" charset="0"/>
-              <a:buChar char="•"/>
-            </a:pPr>
-            <a:r>
-              <a:rPr lang="en-US" altLang="zh-TW" dirty="0">
-                <a:latin typeface="Times New Roman" panose="02020603050405020304" pitchFamily="18" charset="0"/>
-                <a:cs typeface="Times New Roman" panose="02020603050405020304" pitchFamily="18" charset="0"/>
-              </a:rPr>
-              <a:t>The simulation environment used in this study is </a:t>
-            </a:r>
-            <a:r>
-              <a:rPr lang="en-US" altLang="zh-TW" b="1" dirty="0">
-                <a:latin typeface="Times New Roman" panose="02020603050405020304" pitchFamily="18" charset="0"/>
-                <a:cs typeface="Times New Roman" panose="02020603050405020304" pitchFamily="18" charset="0"/>
-              </a:rPr>
-              <a:t>ANSYS Mechanical APDL 2025 R2.</a:t>
-            </a:r>
-            <a:r>
-              <a:rPr lang="en-US" altLang="zh-TW" dirty="0">
-                <a:latin typeface="Times New Roman" panose="02020603050405020304" pitchFamily="18" charset="0"/>
-                <a:cs typeface="Times New Roman" panose="02020603050405020304" pitchFamily="18" charset="0"/>
-              </a:rPr>
-              <a:t> After the geometric model is created in SolidWorks, the dimensions of each component are extracted and used as parameters in an APDL script to reconstruct the geometry. Once the geometry has been generated, the model is meshed and solved. The red arrows in the figure indicate the location and winding direction of the coils, which correspond to the coil positions shown on the previous slide.</a:t>
-            </a:r>
-            <a:endParaRPr lang="zh-TW" altLang="en-US" dirty="0">
-              <a:latin typeface="Times New Roman" panose="02020603050405020304" pitchFamily="18" charset="0"/>
-              <a:cs typeface="Times New Roman" panose="02020603050405020304" pitchFamily="18" charset="0"/>
-            </a:endParaRPr>
-          </a:p>
-        </p:txBody>
-      </p:sp>
-      <p:graphicFrame>
-        <p:nvGraphicFramePr>
-          <p:cNvPr id="3" name="表格 6">
-            <a:extLst>
-              <a:ext uri="{FF2B5EF4-FFF2-40B4-BE49-F238E27FC236}">
-                <a16:creationId xmlns:a16="http://schemas.microsoft.com/office/drawing/2014/main" id="{0CA650E1-60C8-4B31-8678-71FAC6764DC2}"/>
-              </a:ext>
-            </a:extLst>
-          </p:cNvPr>
-          <p:cNvGraphicFramePr>
-            <a:graphicFrameLocks noGrp="1"/>
-          </p:cNvGraphicFramePr>
-          <p:nvPr>
-            <p:extLst>
-              <p:ext uri="{D42A27DB-BD31-4B8C-83A1-F6EECF244321}">
-                <p14:modId xmlns:p14="http://schemas.microsoft.com/office/powerpoint/2010/main" val="4068867138"/>
-              </p:ext>
-            </p:extLst>
-          </p:nvPr>
-        </p:nvGraphicFramePr>
-        <p:xfrm>
-          <a:off x="110067" y="798493"/>
-          <a:ext cx="11811000" cy="4524268"/>
-        </p:xfrm>
-        <a:graphic>
-          <a:graphicData uri="http://schemas.openxmlformats.org/drawingml/2006/table">
-            <a:tbl>
-              <a:tblPr firstRow="1" bandRow="1">
-                <a:tableStyleId>{5940675A-B579-460E-94D1-54222C63F5DA}</a:tableStyleId>
-              </a:tblPr>
-              <a:tblGrid>
-                <a:gridCol w="4055532">
-                  <a:extLst>
-                    <a:ext uri="{9D8B030D-6E8A-4147-A177-3AD203B41FA5}">
-                      <a16:colId xmlns:a16="http://schemas.microsoft.com/office/drawing/2014/main" val="2100999511"/>
-                    </a:ext>
-                  </a:extLst>
-                </a:gridCol>
-                <a:gridCol w="3877734">
-                  <a:extLst>
-                    <a:ext uri="{9D8B030D-6E8A-4147-A177-3AD203B41FA5}">
-                      <a16:colId xmlns:a16="http://schemas.microsoft.com/office/drawing/2014/main" val="650228661"/>
-                    </a:ext>
-                  </a:extLst>
-                </a:gridCol>
-                <a:gridCol w="3877734">
-                  <a:extLst>
-                    <a:ext uri="{9D8B030D-6E8A-4147-A177-3AD203B41FA5}">
-                      <a16:colId xmlns:a16="http://schemas.microsoft.com/office/drawing/2014/main" val="1476503576"/>
-                    </a:ext>
-                  </a:extLst>
-                </a:gridCol>
-              </a:tblGrid>
-              <a:tr h="511068">
-                <a:tc>
-                  <a:txBody>
-                    <a:bodyPr/>
-                    <a:lstStyle/>
-                    <a:p>
-                      <a:pPr algn="ctr"/>
-                      <a:r>
-                        <a:rPr lang="en-US" altLang="zh-TW" dirty="0"/>
-                        <a:t>Long</a:t>
-                      </a:r>
-                      <a:endParaRPr lang="zh-TW" altLang="en-US" dirty="0"/>
-                    </a:p>
-                  </a:txBody>
-                  <a:tcPr/>
-                </a:tc>
-                <a:tc>
-                  <a:txBody>
-                    <a:bodyPr/>
-                    <a:lstStyle/>
-                    <a:p>
-                      <a:pPr algn="ctr"/>
-                      <a:r>
-                        <a:rPr lang="en-US" altLang="zh-TW" dirty="0"/>
-                        <a:t>Hung</a:t>
-                      </a:r>
-                      <a:endParaRPr lang="zh-TW" altLang="en-US" dirty="0"/>
-                    </a:p>
-                  </a:txBody>
-                  <a:tcPr/>
-                </a:tc>
-                <a:tc>
-                  <a:txBody>
-                    <a:bodyPr/>
-                    <a:lstStyle/>
-                    <a:p>
-                      <a:pPr algn="ctr"/>
-                      <a:r>
-                        <a:rPr lang="en-US" altLang="zh-TW" dirty="0"/>
-                        <a:t>NTU</a:t>
-                      </a:r>
-                      <a:endParaRPr lang="zh-TW" altLang="en-US" dirty="0"/>
-                    </a:p>
-                  </a:txBody>
-                  <a:tcPr/>
-                </a:tc>
-                <a:extLst>
-                  <a:ext uri="{0D108BD9-81ED-4DB2-BD59-A6C34878D82A}">
-                    <a16:rowId xmlns:a16="http://schemas.microsoft.com/office/drawing/2014/main" val="59472231"/>
-                  </a:ext>
-                </a:extLst>
-              </a:tr>
-              <a:tr h="4013200">
-                <a:tc>
-                  <a:txBody>
-                    <a:bodyPr/>
-                    <a:lstStyle/>
-                    <a:p>
-                      <a:endParaRPr lang="zh-TW" altLang="en-US" dirty="0"/>
-                    </a:p>
-                  </a:txBody>
-                  <a:tcPr/>
-                </a:tc>
-                <a:tc>
-                  <a:txBody>
-                    <a:bodyPr/>
-                    <a:lstStyle/>
-                    <a:p>
-                      <a:endParaRPr lang="zh-TW" altLang="en-US" dirty="0"/>
-                    </a:p>
-                  </a:txBody>
-                  <a:tcPr/>
-                </a:tc>
-                <a:tc>
-                  <a:txBody>
-                    <a:bodyPr/>
-                    <a:lstStyle/>
-                    <a:p>
-                      <a:endParaRPr lang="zh-TW" altLang="en-US" dirty="0"/>
-                    </a:p>
-                  </a:txBody>
-                  <a:tcPr/>
-                </a:tc>
-                <a:extLst>
-                  <a:ext uri="{0D108BD9-81ED-4DB2-BD59-A6C34878D82A}">
-                    <a16:rowId xmlns:a16="http://schemas.microsoft.com/office/drawing/2014/main" val="1099235176"/>
-                  </a:ext>
-                </a:extLst>
-              </a:tr>
-            </a:tbl>
-          </a:graphicData>
-        </a:graphic>
-      </p:graphicFrame>
-      <p:pic>
-        <p:nvPicPr>
-          <p:cNvPr id="8" name="圖片 7">
-            <a:extLst>
-              <a:ext uri="{FF2B5EF4-FFF2-40B4-BE49-F238E27FC236}">
-                <a16:creationId xmlns:a16="http://schemas.microsoft.com/office/drawing/2014/main" id="{B58D460A-6378-497E-9C70-84236AAF3B32}"/>
-              </a:ext>
-            </a:extLst>
-          </p:cNvPr>
-          <p:cNvPicPr>
-            <a:picLocks noChangeAspect="1"/>
-          </p:cNvPicPr>
-          <p:nvPr/>
-        </p:nvPicPr>
-        <p:blipFill>
-          <a:blip r:embed="rId2">
-            <a:extLst>
-              <a:ext uri="{28A0092B-C50C-407E-A947-70E740481C1C}">
-                <a14:useLocalDpi xmlns:a14="http://schemas.microsoft.com/office/drawing/2010/main" val="0"/>
-              </a:ext>
-            </a:extLst>
-          </a:blip>
-          <a:stretch>
-            <a:fillRect/>
-          </a:stretch>
-        </p:blipFill>
-        <p:spPr>
-          <a:xfrm>
-            <a:off x="201738" y="1485857"/>
-            <a:ext cx="3760717" cy="3312493"/>
-          </a:xfrm>
-          <a:prstGeom prst="rect">
-            <a:avLst/>
-          </a:prstGeom>
-        </p:spPr>
-      </p:pic>
-      <p:pic>
-        <p:nvPicPr>
-          <p:cNvPr id="10" name="圖片 9">
-            <a:extLst>
-              <a:ext uri="{FF2B5EF4-FFF2-40B4-BE49-F238E27FC236}">
-                <a16:creationId xmlns:a16="http://schemas.microsoft.com/office/drawing/2014/main" id="{EB64EA08-5191-4228-83EE-851D443403F6}"/>
-              </a:ext>
-            </a:extLst>
-          </p:cNvPr>
-          <p:cNvPicPr>
-            <a:picLocks noChangeAspect="1"/>
-          </p:cNvPicPr>
-          <p:nvPr/>
-        </p:nvPicPr>
-        <p:blipFill>
-          <a:blip r:embed="rId3">
-            <a:extLst>
-              <a:ext uri="{28A0092B-C50C-407E-A947-70E740481C1C}">
-                <a14:useLocalDpi xmlns:a14="http://schemas.microsoft.com/office/drawing/2010/main" val="0"/>
-              </a:ext>
-            </a:extLst>
-          </a:blip>
-          <a:stretch>
-            <a:fillRect/>
-          </a:stretch>
-        </p:blipFill>
-        <p:spPr>
-          <a:xfrm>
-            <a:off x="4254644" y="1511422"/>
-            <a:ext cx="3682712" cy="3312493"/>
-          </a:xfrm>
-          <a:prstGeom prst="rect">
-            <a:avLst/>
-          </a:prstGeom>
-        </p:spPr>
-      </p:pic>
-      <p:pic>
-        <p:nvPicPr>
-          <p:cNvPr id="12" name="圖片 11">
-            <a:extLst>
-              <a:ext uri="{FF2B5EF4-FFF2-40B4-BE49-F238E27FC236}">
-                <a16:creationId xmlns:a16="http://schemas.microsoft.com/office/drawing/2014/main" id="{E14AD6CC-8300-4351-8CC5-7F189CA26309}"/>
-              </a:ext>
-            </a:extLst>
-          </p:cNvPr>
-          <p:cNvPicPr>
-            <a:picLocks noChangeAspect="1"/>
-          </p:cNvPicPr>
-          <p:nvPr/>
-        </p:nvPicPr>
-        <p:blipFill>
-          <a:blip r:embed="rId4">
-            <a:extLst>
-              <a:ext uri="{28A0092B-C50C-407E-A947-70E740481C1C}">
-                <a14:useLocalDpi xmlns:a14="http://schemas.microsoft.com/office/drawing/2010/main" val="0"/>
-              </a:ext>
-            </a:extLst>
-          </a:blip>
-          <a:stretch>
-            <a:fillRect/>
-          </a:stretch>
-        </p:blipFill>
-        <p:spPr>
-          <a:xfrm>
-            <a:off x="8229545" y="1485856"/>
-            <a:ext cx="3572077" cy="3312493"/>
-          </a:xfrm>
-          <a:prstGeom prst="rect">
-            <a:avLst/>
-          </a:prstGeom>
-        </p:spPr>
-      </p:pic>
-    </p:spTree>
-    <p:extLst>
-      <p:ext uri="{BB962C8B-B14F-4D97-AF65-F5344CB8AC3E}">
-        <p14:creationId xmlns:p14="http://schemas.microsoft.com/office/powerpoint/2010/main" val="1213623877"/>
-      </p:ext>
-    </p:extLst>
-  </p:cSld>
-  <p:clrMapOvr>
-    <a:masterClrMapping/>
-  </p:clrMapOvr>
-</p:sld>
-</file>
-
-<file path=ppt/slides/slide3.xml><?xml version="1.0" encoding="utf-8"?>
-<p:sld xmlns:a="http://schemas.openxmlformats.org/drawingml/2006/main" xmlns:r="http://schemas.openxmlformats.org/officeDocument/2006/relationships" xmlns:p="http://schemas.openxmlformats.org/presentationml/2006/main">
-  <p:cSld>
-    <p:spTree>
-      <p:nvGrpSpPr>
-        <p:cNvPr id="1" name=""/>
-        <p:cNvGrpSpPr/>
-        <p:nvPr/>
-      </p:nvGrpSpPr>
-      <p:grpSpPr>
-        <a:xfrm>
-          <a:off x="0" y="0"/>
-          <a:ext cx="0" cy="0"/>
-          <a:chOff x="0" y="0"/>
-          <a:chExt cx="0" cy="0"/>
-        </a:xfrm>
-      </p:grpSpPr>
-      <p:sp>
-        <p:nvSpPr>
-          <p:cNvPr id="2" name="標題 1">
-            <a:extLst>
-              <a:ext uri="{FF2B5EF4-FFF2-40B4-BE49-F238E27FC236}">
-                <a16:creationId xmlns:a16="http://schemas.microsoft.com/office/drawing/2014/main" id="{976117A0-A94B-49AB-92D6-B22FD0AF0753}"/>
-              </a:ext>
-            </a:extLst>
-          </p:cNvPr>
-          <p:cNvSpPr>
-            <a:spLocks noGrp="1"/>
-          </p:cNvSpPr>
-          <p:nvPr>
-            <p:ph type="title"/>
-          </p:nvPr>
-        </p:nvSpPr>
-        <p:spPr>
-          <a:xfrm>
-            <a:off x="0" y="85727"/>
-            <a:ext cx="12081933" cy="837142"/>
-          </a:xfrm>
-        </p:spPr>
-        <p:txBody>
-          <a:bodyPr>
-            <a:normAutofit fontScale="90000"/>
-          </a:bodyPr>
-          <a:lstStyle/>
-          <a:p>
-            <a:r>
-              <a:rPr lang="en-US" altLang="zh-TW" sz="4000" b="1" kern="100" dirty="0">
-                <a:solidFill>
-                  <a:srgbClr val="000000"/>
-                </a:solidFill>
-                <a:latin typeface="Aptos"/>
-                <a:ea typeface="新細明體" panose="02020500000000000000" pitchFamily="18" charset="-120"/>
-                <a:cs typeface="Times New Roman" panose="02020603050405020304" pitchFamily="18" charset="0"/>
-              </a:rPr>
-              <a:t>Current-based lumped-parameter modeling and calibration</a:t>
-            </a:r>
-            <a:br>
-              <a:rPr lang="zh-TW" altLang="zh-TW" sz="1800" kern="100" dirty="0">
-                <a:effectLst/>
-                <a:latin typeface="Aptos"/>
-                <a:ea typeface="新細明體" panose="02020500000000000000" pitchFamily="18" charset="-120"/>
-                <a:cs typeface="Times New Roman" panose="02020603050405020304" pitchFamily="18" charset="0"/>
-              </a:rPr>
-            </a:br>
-            <a:endParaRPr lang="zh-TW" altLang="en-US" dirty="0"/>
-          </a:p>
-        </p:txBody>
-      </p:sp>
-      <p:sp>
-        <p:nvSpPr>
-          <p:cNvPr id="4" name="文字方塊 3">
-            <a:extLst>
-              <a:ext uri="{FF2B5EF4-FFF2-40B4-BE49-F238E27FC236}">
-                <a16:creationId xmlns:a16="http://schemas.microsoft.com/office/drawing/2014/main" id="{7560EB76-638C-43CC-ABEA-EE55E408A666}"/>
-              </a:ext>
-            </a:extLst>
-          </p:cNvPr>
-          <p:cNvSpPr txBox="1"/>
-          <p:nvPr/>
-        </p:nvSpPr>
-        <p:spPr>
-          <a:xfrm>
             <a:off x="110067" y="308956"/>
             <a:ext cx="6324600" cy="390684"/>
           </a:xfrm>
@@ -14079,7 +11468,7 @@
 </p:sld>
 </file>
 
-<file path=ppt/slides/slide4.xml><?xml version="1.0" encoding="utf-8"?>
+<file path=ppt/slides/slide3.xml><?xml version="1.0" encoding="utf-8"?>
 <p:sld xmlns:a="http://schemas.openxmlformats.org/drawingml/2006/main" xmlns:r="http://schemas.openxmlformats.org/officeDocument/2006/relationships" xmlns:p="http://schemas.openxmlformats.org/presentationml/2006/main">
   <p:cSld>
     <p:spTree>
@@ -15097,7 +12486,7 @@
 </p:sld>
 </file>
 
-<file path=ppt/slides/slide5.xml><?xml version="1.0" encoding="utf-8"?>
+<file path=ppt/slides/slide4.xml><?xml version="1.0" encoding="utf-8"?>
 <p:sld xmlns:a="http://schemas.openxmlformats.org/drawingml/2006/main" xmlns:r="http://schemas.openxmlformats.org/officeDocument/2006/relationships" xmlns:p="http://schemas.openxmlformats.org/presentationml/2006/main">
   <p:cSld>
     <p:spTree>
@@ -16027,7 +13416,7 @@
 </p:sld>
 </file>
 
-<file path=ppt/slides/slide6.xml><?xml version="1.0" encoding="utf-8"?>
+<file path=ppt/slides/slide5.xml><?xml version="1.0" encoding="utf-8"?>
 <p:sld xmlns:a="http://schemas.openxmlformats.org/drawingml/2006/main" xmlns:r="http://schemas.openxmlformats.org/officeDocument/2006/relationships" xmlns:p="http://schemas.openxmlformats.org/presentationml/2006/main">
   <p:cSld>
     <p:spTree>
@@ -16716,7 +14105,7 @@
 </p:sld>
 </file>
 
-<file path=ppt/slides/slide7.xml><?xml version="1.0" encoding="utf-8"?>
+<file path=ppt/slides/slide6.xml><?xml version="1.0" encoding="utf-8"?>
 <p:sld xmlns:a="http://schemas.openxmlformats.org/drawingml/2006/main" xmlns:r="http://schemas.openxmlformats.org/officeDocument/2006/relationships" xmlns:p="http://schemas.openxmlformats.org/presentationml/2006/main">
   <p:cSld>
     <p:spTree>
@@ -17987,7 +15376,7 @@
 </p:sld>
 </file>
 
-<file path=ppt/slides/slide8.xml><?xml version="1.0" encoding="utf-8"?>
+<file path=ppt/slides/slide7.xml><?xml version="1.0" encoding="utf-8"?>
 <p:sld xmlns:a="http://schemas.openxmlformats.org/drawingml/2006/main" xmlns:r="http://schemas.openxmlformats.org/officeDocument/2006/relationships" xmlns:p="http://schemas.openxmlformats.org/presentationml/2006/main">
   <p:cSld>
     <p:spTree>
@@ -18413,318 +15802,6 @@
           </p:sp>
         </mc:Fallback>
       </mc:AlternateContent>
-      <p:grpSp>
-        <p:nvGrpSpPr>
-          <p:cNvPr id="26" name="群組 25">
-            <a:extLst>
-              <a:ext uri="{FF2B5EF4-FFF2-40B4-BE49-F238E27FC236}">
-                <a16:creationId xmlns:a16="http://schemas.microsoft.com/office/drawing/2014/main" id="{CA630F8B-829D-4AA0-B747-4BBA5D0C06F8}"/>
-              </a:ext>
-            </a:extLst>
-          </p:cNvPr>
-          <p:cNvGrpSpPr/>
-          <p:nvPr/>
-        </p:nvGrpSpPr>
-        <p:grpSpPr>
-          <a:xfrm>
-            <a:off x="176458" y="1046609"/>
-            <a:ext cx="4836947" cy="4764782"/>
-            <a:chOff x="1110365" y="214247"/>
-            <a:chExt cx="4836947" cy="4764782"/>
-          </a:xfrm>
-        </p:grpSpPr>
-        <p:pic>
-          <p:nvPicPr>
-            <p:cNvPr id="27" name="圖片 26">
-              <a:extLst>
-                <a:ext uri="{FF2B5EF4-FFF2-40B4-BE49-F238E27FC236}">
-                  <a16:creationId xmlns:a16="http://schemas.microsoft.com/office/drawing/2014/main" id="{9DE31391-5987-4BB5-957D-9C77737CF3A1}"/>
-                </a:ext>
-              </a:extLst>
-            </p:cNvPr>
-            <p:cNvPicPr>
-              <a:picLocks noChangeAspect="1"/>
-            </p:cNvPicPr>
-            <p:nvPr/>
-          </p:nvPicPr>
-          <p:blipFill>
-            <a:blip r:embed="rId3">
-              <a:extLst>
-                <a:ext uri="{28A0092B-C50C-407E-A947-70E740481C1C}">
-                  <a14:useLocalDpi xmlns:a14="http://schemas.microsoft.com/office/drawing/2010/main" val="0"/>
-                </a:ext>
-              </a:extLst>
-            </a:blip>
-            <a:stretch>
-              <a:fillRect/>
-            </a:stretch>
-          </p:blipFill>
-          <p:spPr>
-            <a:xfrm>
-              <a:off x="1177659" y="214247"/>
-              <a:ext cx="4769653" cy="4520022"/>
-            </a:xfrm>
-            <a:prstGeom prst="rect">
-              <a:avLst/>
-            </a:prstGeom>
-          </p:spPr>
-        </p:pic>
-        <mc:AlternateContent xmlns:mc="http://schemas.openxmlformats.org/markup-compatibility/2006">
-          <mc:Choice xmlns:a14="http://schemas.microsoft.com/office/drawing/2010/main" Requires="a14">
-            <p:sp>
-              <p:nvSpPr>
-                <p:cNvPr id="28" name="文字方塊 27">
-                  <a:extLst>
-                    <a:ext uri="{FF2B5EF4-FFF2-40B4-BE49-F238E27FC236}">
-                      <a16:creationId xmlns:a16="http://schemas.microsoft.com/office/drawing/2014/main" id="{D8F57F3F-3E26-46A6-9ECE-60EBB67FF9DE}"/>
-                    </a:ext>
-                  </a:extLst>
-                </p:cNvPr>
-                <p:cNvSpPr txBox="1"/>
-                <p:nvPr/>
-              </p:nvSpPr>
-              <p:spPr>
-                <a:xfrm rot="16200000">
-                  <a:off x="855231" y="1022424"/>
-                  <a:ext cx="801501" cy="291234"/>
-                </a:xfrm>
-                <a:prstGeom prst="rect">
-                  <a:avLst/>
-                </a:prstGeom>
-                <a:noFill/>
-              </p:spPr>
-              <p:txBody>
-                <a:bodyPr wrap="none" lIns="0" tIns="0" rIns="0" bIns="0" rtlCol="0">
-                  <a:spAutoFit/>
-                </a:bodyPr>
-                <a:lstStyle/>
-                <a:p>
-                  <a:pPr/>
-                  <a14:m>
-                    <m:oMathPara xmlns:m="http://schemas.openxmlformats.org/officeDocument/2006/math">
-                      <m:oMathParaPr>
-                        <m:jc m:val="centerGroup"/>
-                      </m:oMathParaPr>
-                      <m:oMath xmlns:m="http://schemas.openxmlformats.org/officeDocument/2006/math">
-                        <m:acc>
-                          <m:accPr>
-                            <m:chr m:val="̂"/>
-                            <m:ctrlPr>
-                              <a:rPr lang="en-US" altLang="zh-TW" b="1" smtClean="0">
-                                <a:latin typeface="Cambria Math" panose="02040503050406030204" pitchFamily="18" charset="0"/>
-                              </a:rPr>
-                            </m:ctrlPr>
-                          </m:accPr>
-                          <m:e>
-                            <m:r>
-                              <a:rPr lang="zh-TW" altLang="en-US" b="1" i="0" smtClean="0">
-                                <a:latin typeface="Cambria Math" panose="02040503050406030204" pitchFamily="18" charset="0"/>
-                              </a:rPr>
-                              <m:t>𝓵</m:t>
-                            </m:r>
-                          </m:e>
-                        </m:acc>
-                        <m:r>
-                          <a:rPr lang="en-US" altLang="zh-TW" b="1" i="0" smtClean="0">
-                            <a:latin typeface="Cambria Math" panose="02040503050406030204" pitchFamily="18" charset="0"/>
-                          </a:rPr>
-                          <m:t> (</m:t>
-                        </m:r>
-                        <m:r>
-                          <a:rPr lang="en-US" altLang="zh-TW" b="1" i="0" smtClean="0">
-                            <a:latin typeface="Cambria Math" panose="02040503050406030204" pitchFamily="18" charset="0"/>
-                          </a:rPr>
-                          <m:t>𝐮𝐦</m:t>
-                        </m:r>
-                        <m:r>
-                          <a:rPr lang="en-US" altLang="zh-TW" b="1" i="0" smtClean="0">
-                            <a:latin typeface="Cambria Math" panose="02040503050406030204" pitchFamily="18" charset="0"/>
-                          </a:rPr>
-                          <m:t>)</m:t>
-                        </m:r>
-                      </m:oMath>
-                    </m:oMathPara>
-                  </a14:m>
-                  <a:endParaRPr lang="zh-TW" altLang="en-US" b="1" dirty="0">
-                    <a:latin typeface="Arial" panose="020B0604020202020204" pitchFamily="34" charset="0"/>
-                    <a:cs typeface="Arial" panose="020B0604020202020204" pitchFamily="34" charset="0"/>
-                  </a:endParaRPr>
-                </a:p>
-              </p:txBody>
-            </p:sp>
-          </mc:Choice>
-          <mc:Fallback>
-            <p:sp>
-              <p:nvSpPr>
-                <p:cNvPr id="28" name="文字方塊 27">
-                  <a:extLst>
-                    <a:ext uri="{FF2B5EF4-FFF2-40B4-BE49-F238E27FC236}">
-                      <a16:creationId xmlns:a16="http://schemas.microsoft.com/office/drawing/2014/main" id="{D8F57F3F-3E26-46A6-9ECE-60EBB67FF9DE}"/>
-                    </a:ext>
-                  </a:extLst>
-                </p:cNvPr>
-                <p:cNvSpPr txBox="1">
-                  <a:spLocks noRot="1" noChangeAspect="1" noMove="1" noResize="1" noEditPoints="1" noAdjustHandles="1" noChangeArrowheads="1" noChangeShapeType="1" noTextEdit="1"/>
-                </p:cNvSpPr>
-                <p:nvPr/>
-              </p:nvSpPr>
-              <p:spPr>
-                <a:xfrm rot="16200000">
-                  <a:off x="855231" y="1022424"/>
-                  <a:ext cx="801501" cy="291234"/>
-                </a:xfrm>
-                <a:prstGeom prst="rect">
-                  <a:avLst/>
-                </a:prstGeom>
-                <a:blipFill>
-                  <a:blip r:embed="rId4"/>
-                  <a:stretch>
-                    <a:fillRect l="-16667" t="-8333" r="-35417" b="-5303"/>
-                  </a:stretch>
-                </a:blipFill>
-              </p:spPr>
-              <p:txBody>
-                <a:bodyPr/>
-                <a:lstStyle/>
-                <a:p>
-                  <a:r>
-                    <a:rPr lang="zh-TW" altLang="en-US">
-                      <a:noFill/>
-                    </a:rPr>
-                    <a:t> </a:t>
-                  </a:r>
-                </a:p>
-              </p:txBody>
-            </p:sp>
-          </mc:Fallback>
-        </mc:AlternateContent>
-        <mc:AlternateContent xmlns:mc="http://schemas.openxmlformats.org/markup-compatibility/2006">
-          <mc:Choice xmlns:a14="http://schemas.microsoft.com/office/drawing/2010/main" Requires="a14">
-            <p:sp>
-              <p:nvSpPr>
-                <p:cNvPr id="29" name="文字方塊 28">
-                  <a:extLst>
-                    <a:ext uri="{FF2B5EF4-FFF2-40B4-BE49-F238E27FC236}">
-                      <a16:creationId xmlns:a16="http://schemas.microsoft.com/office/drawing/2014/main" id="{8A278572-7972-4B71-A7DC-6277C42A3BC0}"/>
-                    </a:ext>
-                  </a:extLst>
-                </p:cNvPr>
-                <p:cNvSpPr txBox="1"/>
-                <p:nvPr/>
-              </p:nvSpPr>
-              <p:spPr>
-                <a:xfrm>
-                  <a:off x="2682571" y="4702030"/>
-                  <a:ext cx="2292294" cy="276999"/>
-                </a:xfrm>
-                <a:prstGeom prst="rect">
-                  <a:avLst/>
-                </a:prstGeom>
-                <a:noFill/>
-              </p:spPr>
-              <p:txBody>
-                <a:bodyPr wrap="none" lIns="0" tIns="0" rIns="0" bIns="0" rtlCol="0">
-                  <a:spAutoFit/>
-                </a:bodyPr>
-                <a:lstStyle/>
-                <a:p>
-                  <a:pPr/>
-                  <a14:m>
-                    <m:oMathPara xmlns:m="http://schemas.openxmlformats.org/officeDocument/2006/math">
-                      <m:oMathParaPr>
-                        <m:jc m:val="centerGroup"/>
-                      </m:oMathParaPr>
-                      <m:oMath xmlns:m="http://schemas.openxmlformats.org/officeDocument/2006/math">
-                        <m:r>
-                          <a:rPr lang="en-US" altLang="zh-TW" b="1" i="0" smtClean="0">
-                            <a:latin typeface="Cambria Math" panose="02040503050406030204" pitchFamily="18" charset="0"/>
-                          </a:rPr>
-                          <m:t>𝐒𝐚𝐦𝐩𝐥𝐢𝐧𝐠</m:t>
-                        </m:r>
-                        <m:r>
-                          <a:rPr lang="en-US" altLang="zh-TW" b="1" i="0" smtClean="0">
-                            <a:latin typeface="Cambria Math" panose="02040503050406030204" pitchFamily="18" charset="0"/>
-                          </a:rPr>
-                          <m:t> </m:t>
-                        </m:r>
-                        <m:r>
-                          <a:rPr lang="en-US" altLang="zh-TW" b="1" i="0" smtClean="0">
-                            <a:latin typeface="Cambria Math" panose="02040503050406030204" pitchFamily="18" charset="0"/>
-                          </a:rPr>
-                          <m:t>𝐫𝐚𝐧𝐠𝐞</m:t>
-                        </m:r>
-                        <m:r>
-                          <a:rPr lang="en-US" altLang="zh-TW" b="1" i="0" smtClean="0">
-                            <a:latin typeface="Cambria Math" panose="02040503050406030204" pitchFamily="18" charset="0"/>
-                          </a:rPr>
-                          <m:t>(</m:t>
-                        </m:r>
-                        <m:r>
-                          <a:rPr lang="en-US" altLang="zh-TW" b="1" i="0" smtClean="0">
-                            <a:latin typeface="Cambria Math" panose="02040503050406030204" pitchFamily="18" charset="0"/>
-                          </a:rPr>
-                          <m:t>𝐮𝐦</m:t>
-                        </m:r>
-                        <m:r>
-                          <a:rPr lang="en-US" altLang="zh-TW" b="1" i="0" smtClean="0">
-                            <a:latin typeface="Cambria Math" panose="02040503050406030204" pitchFamily="18" charset="0"/>
-                          </a:rPr>
-                          <m:t>)</m:t>
-                        </m:r>
-                      </m:oMath>
-                    </m:oMathPara>
-                  </a14:m>
-                  <a:endParaRPr lang="zh-TW" altLang="en-US" b="1" dirty="0"/>
-                </a:p>
-              </p:txBody>
-            </p:sp>
-          </mc:Choice>
-          <mc:Fallback>
-            <p:sp>
-              <p:nvSpPr>
-                <p:cNvPr id="29" name="文字方塊 28">
-                  <a:extLst>
-                    <a:ext uri="{FF2B5EF4-FFF2-40B4-BE49-F238E27FC236}">
-                      <a16:creationId xmlns:a16="http://schemas.microsoft.com/office/drawing/2014/main" id="{8A278572-7972-4B71-A7DC-6277C42A3BC0}"/>
-                    </a:ext>
-                  </a:extLst>
-                </p:cNvPr>
-                <p:cNvSpPr txBox="1">
-                  <a:spLocks noRot="1" noChangeAspect="1" noMove="1" noResize="1" noEditPoints="1" noAdjustHandles="1" noChangeArrowheads="1" noChangeShapeType="1" noTextEdit="1"/>
-                </p:cNvSpPr>
-                <p:nvPr/>
-              </p:nvSpPr>
-              <p:spPr>
-                <a:xfrm>
-                  <a:off x="2682571" y="4702030"/>
-                  <a:ext cx="2292294" cy="276999"/>
-                </a:xfrm>
-                <a:prstGeom prst="rect">
-                  <a:avLst/>
-                </a:prstGeom>
-                <a:blipFill>
-                  <a:blip r:embed="rId5"/>
-                  <a:stretch>
-                    <a:fillRect l="-3457" t="-6667" r="-3457" b="-35556"/>
-                  </a:stretch>
-                </a:blipFill>
-              </p:spPr>
-              <p:txBody>
-                <a:bodyPr/>
-                <a:lstStyle/>
-                <a:p>
-                  <a:r>
-                    <a:rPr lang="zh-TW" altLang="en-US">
-                      <a:noFill/>
-                    </a:rPr>
-                    <a:t> </a:t>
-                  </a:r>
-                </a:p>
-              </p:txBody>
-            </p:sp>
-          </mc:Fallback>
-        </mc:AlternateContent>
-      </p:grpSp>
       <p:sp>
         <p:nvSpPr>
           <p:cNvPr id="6" name="文字方塊 5">
@@ -20087,6 +17164,42 @@
           </p:sp>
         </mc:Fallback>
       </mc:AlternateContent>
+      <p:pic>
+        <p:nvPicPr>
+          <p:cNvPr id="7" name="圖片 6">
+            <a:extLst>
+              <a:ext uri="{FF2B5EF4-FFF2-40B4-BE49-F238E27FC236}">
+                <a16:creationId xmlns:a16="http://schemas.microsoft.com/office/drawing/2014/main" id="{BB0FF60A-B186-48DF-9C65-3B378A95E4FE}"/>
+              </a:ext>
+            </a:extLst>
+          </p:cNvPr>
+          <p:cNvPicPr>
+            <a:picLocks noChangeAspect="1"/>
+          </p:cNvPicPr>
+          <p:nvPr/>
+        </p:nvPicPr>
+        <p:blipFill>
+          <a:blip r:embed="rId13">
+            <a:extLst>
+              <a:ext uri="{28A0092B-C50C-407E-A947-70E740481C1C}">
+                <a14:useLocalDpi xmlns:a14="http://schemas.microsoft.com/office/drawing/2010/main" val="0"/>
+              </a:ext>
+            </a:extLst>
+          </a:blip>
+          <a:stretch>
+            <a:fillRect/>
+          </a:stretch>
+        </p:blipFill>
+        <p:spPr>
+          <a:xfrm>
+            <a:off x="146237" y="819546"/>
+            <a:ext cx="4941675" cy="4718081"/>
+          </a:xfrm>
+          <a:prstGeom prst="rect">
+            <a:avLst/>
+          </a:prstGeom>
+        </p:spPr>
+      </p:pic>
     </p:spTree>
     <p:extLst>
       <p:ext uri="{BB962C8B-B14F-4D97-AF65-F5344CB8AC3E}">
@@ -20100,7 +17213,7 @@
 </p:sld>
 </file>
 
-<file path=ppt/slides/slide9.xml><?xml version="1.0" encoding="utf-8"?>
+<file path=ppt/slides/slide8.xml><?xml version="1.0" encoding="utf-8"?>
 <p:sld xmlns:a="http://schemas.openxmlformats.org/drawingml/2006/main" xmlns:r="http://schemas.openxmlformats.org/officeDocument/2006/relationships" xmlns:p="http://schemas.openxmlformats.org/presentationml/2006/main">
   <p:cSld>
     <p:spTree>
@@ -20621,6 +17734,1883 @@
 </p:sld>
 </file>
 
+<file path=ppt/slides/slide9.xml><?xml version="1.0" encoding="utf-8"?>
+<p:sld xmlns:a="http://schemas.openxmlformats.org/drawingml/2006/main" xmlns:r="http://schemas.openxmlformats.org/officeDocument/2006/relationships" xmlns:p="http://schemas.openxmlformats.org/presentationml/2006/main">
+  <p:cSld>
+    <p:spTree>
+      <p:nvGrpSpPr>
+        <p:cNvPr id="1" name=""/>
+        <p:cNvGrpSpPr/>
+        <p:nvPr/>
+      </p:nvGrpSpPr>
+      <p:grpSpPr>
+        <a:xfrm>
+          <a:off x="0" y="0"/>
+          <a:ext cx="0" cy="0"/>
+          <a:chOff x="0" y="0"/>
+          <a:chExt cx="0" cy="0"/>
+        </a:xfrm>
+      </p:grpSpPr>
+      <p:sp>
+        <p:nvSpPr>
+          <p:cNvPr id="2" name="標題 1">
+            <a:extLst>
+              <a:ext uri="{FF2B5EF4-FFF2-40B4-BE49-F238E27FC236}">
+                <a16:creationId xmlns:a16="http://schemas.microsoft.com/office/drawing/2014/main" id="{976117A0-A94B-49AB-92D6-B22FD0AF0753}"/>
+              </a:ext>
+            </a:extLst>
+          </p:cNvPr>
+          <p:cNvSpPr>
+            <a:spLocks noGrp="1"/>
+          </p:cNvSpPr>
+          <p:nvPr>
+            <p:ph type="title"/>
+          </p:nvPr>
+        </p:nvSpPr>
+        <p:spPr>
+          <a:xfrm>
+            <a:off x="0" y="85727"/>
+            <a:ext cx="12081933" cy="837142"/>
+          </a:xfrm>
+        </p:spPr>
+        <p:txBody>
+          <a:bodyPr>
+            <a:normAutofit fontScale="90000"/>
+          </a:bodyPr>
+          <a:lstStyle/>
+          <a:p>
+            <a:r>
+              <a:rPr lang="en-US" altLang="zh-TW" sz="4000" b="1" kern="100" dirty="0">
+                <a:solidFill>
+                  <a:srgbClr val="000000"/>
+                </a:solidFill>
+                <a:latin typeface="Aptos"/>
+                <a:ea typeface="新細明體" panose="02020500000000000000" pitchFamily="18" charset="-120"/>
+                <a:cs typeface="Times New Roman" panose="02020603050405020304" pitchFamily="18" charset="0"/>
+              </a:rPr>
+              <a:t>Current-based lumped-parameter modeling and calibration</a:t>
+            </a:r>
+            <a:br>
+              <a:rPr lang="zh-TW" altLang="zh-TW" sz="1800" kern="100" dirty="0">
+                <a:effectLst/>
+                <a:latin typeface="Aptos"/>
+                <a:ea typeface="新細明體" panose="02020500000000000000" pitchFamily="18" charset="-120"/>
+                <a:cs typeface="Times New Roman" panose="02020603050405020304" pitchFamily="18" charset="0"/>
+              </a:rPr>
+            </a:br>
+            <a:endParaRPr lang="zh-TW" altLang="en-US" dirty="0"/>
+          </a:p>
+        </p:txBody>
+      </p:sp>
+      <p:sp>
+        <p:nvSpPr>
+          <p:cNvPr id="40" name="文字方塊 39">
+            <a:extLst>
+              <a:ext uri="{FF2B5EF4-FFF2-40B4-BE49-F238E27FC236}">
+                <a16:creationId xmlns:a16="http://schemas.microsoft.com/office/drawing/2014/main" id="{B1E82766-E1D8-4AA6-A2B9-6AEA170385C0}"/>
+              </a:ext>
+            </a:extLst>
+          </p:cNvPr>
+          <p:cNvSpPr txBox="1"/>
+          <p:nvPr/>
+        </p:nvSpPr>
+        <p:spPr>
+          <a:xfrm>
+            <a:off x="0" y="324377"/>
+            <a:ext cx="6324600" cy="390684"/>
+          </a:xfrm>
+          <a:prstGeom prst="rect">
+            <a:avLst/>
+          </a:prstGeom>
+          <a:noFill/>
+        </p:spPr>
+        <p:txBody>
+          <a:bodyPr wrap="square" rtlCol="0">
+            <a:spAutoFit/>
+          </a:bodyPr>
+          <a:lstStyle/>
+          <a:p>
+            <a:pPr>
+              <a:lnSpc>
+                <a:spcPct val="115000"/>
+              </a:lnSpc>
+              <a:spcAft>
+                <a:spcPts val="800"/>
+              </a:spcAft>
+            </a:pPr>
+            <a:r>
+              <a:rPr lang="en-US" altLang="zh-TW" kern="100" dirty="0">
+                <a:solidFill>
+                  <a:srgbClr val="000000"/>
+                </a:solidFill>
+                <a:latin typeface="Times New Roman" panose="02020603050405020304" pitchFamily="18" charset="0"/>
+                <a:ea typeface="新細明體" panose="02020500000000000000" pitchFamily="18" charset="-120"/>
+                <a:cs typeface="Times New Roman" panose="02020603050405020304" pitchFamily="18" charset="0"/>
+              </a:rPr>
+              <a:t>E</a:t>
+            </a:r>
+            <a:r>
+              <a:rPr lang="en-US" altLang="zh-TW" kern="100" dirty="0">
+                <a:solidFill>
+                  <a:srgbClr val="000000"/>
+                </a:solidFill>
+                <a:effectLst/>
+                <a:latin typeface="Times New Roman" panose="02020603050405020304" pitchFamily="18" charset="0"/>
+                <a:ea typeface="新細明體" panose="02020500000000000000" pitchFamily="18" charset="-120"/>
+                <a:cs typeface="Times New Roman" panose="02020603050405020304" pitchFamily="18" charset="0"/>
+              </a:rPr>
+              <a:t>. </a:t>
+            </a:r>
+            <a:r>
+              <a:rPr lang="en-US" altLang="zh-TW" i="1" kern="100" dirty="0">
+                <a:solidFill>
+                  <a:srgbClr val="000000"/>
+                </a:solidFill>
+                <a:latin typeface="Times New Roman" panose="02020603050405020304" pitchFamily="18" charset="0"/>
+                <a:ea typeface="新細明體" panose="02020500000000000000" pitchFamily="18" charset="-120"/>
+                <a:cs typeface="Times New Roman" panose="02020603050405020304" pitchFamily="18" charset="0"/>
+              </a:rPr>
+              <a:t>Validation</a:t>
+            </a:r>
+            <a:endParaRPr lang="zh-TW" altLang="zh-TW" kern="100" dirty="0">
+              <a:effectLst/>
+              <a:latin typeface="Aptos"/>
+              <a:ea typeface="新細明體" panose="02020500000000000000" pitchFamily="18" charset="-120"/>
+              <a:cs typeface="Times New Roman" panose="02020603050405020304" pitchFamily="18" charset="0"/>
+            </a:endParaRPr>
+          </a:p>
+        </p:txBody>
+      </p:sp>
+      <mc:AlternateContent xmlns:mc="http://schemas.openxmlformats.org/markup-compatibility/2006" xmlns:a14="http://schemas.microsoft.com/office/drawing/2010/main">
+        <mc:Choice Requires="a14">
+          <p:sp>
+            <p:nvSpPr>
+              <p:cNvPr id="3" name="文字方塊 2">
+                <a:extLst>
+                  <a:ext uri="{FF2B5EF4-FFF2-40B4-BE49-F238E27FC236}">
+                    <a16:creationId xmlns:a16="http://schemas.microsoft.com/office/drawing/2014/main" id="{B6964577-860D-4EB3-8219-1A6240335DA6}"/>
+                  </a:ext>
+                </a:extLst>
+              </p:cNvPr>
+              <p:cNvSpPr txBox="1"/>
+              <p:nvPr/>
+            </p:nvSpPr>
+            <p:spPr>
+              <a:xfrm>
+                <a:off x="8573024" y="570245"/>
+                <a:ext cx="3508909" cy="321563"/>
+              </a:xfrm>
+              <a:prstGeom prst="rect">
+                <a:avLst/>
+              </a:prstGeom>
+              <a:noFill/>
+            </p:spPr>
+            <p:txBody>
+              <a:bodyPr wrap="none" lIns="0" tIns="0" rIns="0" bIns="0" rtlCol="0">
+                <a:spAutoFit/>
+              </a:bodyPr>
+              <a:lstStyle/>
+              <a:p>
+                <a:pPr/>
+                <a14:m>
+                  <m:oMathPara xmlns:m="http://schemas.openxmlformats.org/officeDocument/2006/math">
+                    <m:oMathParaPr>
+                      <m:jc m:val="centerGroup"/>
+                    </m:oMathParaPr>
+                    <m:oMath xmlns:m="http://schemas.openxmlformats.org/officeDocument/2006/math">
+                      <m:r>
+                        <a:rPr lang="en-US" altLang="zh-TW" b="0" i="1" smtClean="0">
+                          <a:latin typeface="Cambria Math" panose="02040503050406030204" pitchFamily="18" charset="0"/>
+                        </a:rPr>
+                        <m:t>𝐶𝑎𝑙𝑖𝑏𝑟𝑎𝑡𝑒</m:t>
+                      </m:r>
+                      <m:r>
+                        <a:rPr lang="en-US" altLang="zh-TW" b="0" i="1" smtClean="0">
+                          <a:latin typeface="Cambria Math" panose="02040503050406030204" pitchFamily="18" charset="0"/>
+                        </a:rPr>
+                        <m:t> </m:t>
+                      </m:r>
+                      <m:r>
+                        <a:rPr lang="en-US" altLang="zh-TW" b="0" i="1" smtClean="0">
+                          <a:latin typeface="Cambria Math" panose="02040503050406030204" pitchFamily="18" charset="0"/>
+                        </a:rPr>
+                        <m:t>𝑚𝑜𝑑𝑒𝑙</m:t>
+                      </m:r>
+                      <m:r>
+                        <a:rPr lang="en-US" altLang="zh-TW" b="0" i="1" smtClean="0">
+                          <a:latin typeface="Cambria Math" panose="02040503050406030204" pitchFamily="18" charset="0"/>
+                          <a:ea typeface="Cambria Math" panose="02040503050406030204" pitchFamily="18" charset="0"/>
+                        </a:rPr>
+                        <m:t>→</m:t>
+                      </m:r>
+                      <m:sSub>
+                        <m:sSubPr>
+                          <m:ctrlPr>
+                            <a:rPr lang="en-US" altLang="zh-TW" b="0" i="1" smtClean="0">
+                              <a:latin typeface="Cambria Math" panose="02040503050406030204" pitchFamily="18" charset="0"/>
+                              <a:ea typeface="Cambria Math" panose="02040503050406030204" pitchFamily="18" charset="0"/>
+                            </a:rPr>
+                          </m:ctrlPr>
+                        </m:sSubPr>
+                        <m:e>
+                          <m:r>
+                            <a:rPr lang="en-US" altLang="zh-TW" b="0" i="1" smtClean="0">
+                              <a:latin typeface="Cambria Math" panose="02040503050406030204" pitchFamily="18" charset="0"/>
+                              <a:ea typeface="Cambria Math" panose="02040503050406030204" pitchFamily="18" charset="0"/>
+                            </a:rPr>
+                            <m:t>𝑏</m:t>
+                          </m:r>
+                        </m:e>
+                        <m:sub>
+                          <m:r>
+                            <a:rPr lang="en-US" altLang="zh-TW" b="0" i="1" smtClean="0">
+                              <a:latin typeface="Cambria Math" panose="02040503050406030204" pitchFamily="18" charset="0"/>
+                              <a:ea typeface="Cambria Math" panose="02040503050406030204" pitchFamily="18" charset="0"/>
+                            </a:rPr>
+                            <m:t>𝑖𝑗</m:t>
+                          </m:r>
+                        </m:sub>
+                      </m:sSub>
+                      <m:r>
+                        <a:rPr lang="en-US" altLang="zh-TW" b="0" i="1" smtClean="0">
+                          <a:latin typeface="Cambria Math" panose="02040503050406030204" pitchFamily="18" charset="0"/>
+                          <a:ea typeface="Cambria Math" panose="02040503050406030204" pitchFamily="18" charset="0"/>
+                        </a:rPr>
+                        <m:t>=</m:t>
+                      </m:r>
+                      <m:sSub>
+                        <m:sSubPr>
+                          <m:ctrlPr>
+                            <a:rPr lang="en-US" altLang="zh-TW" b="0" i="1" smtClean="0">
+                              <a:latin typeface="Cambria Math" panose="02040503050406030204" pitchFamily="18" charset="0"/>
+                              <a:ea typeface="Cambria Math" panose="02040503050406030204" pitchFamily="18" charset="0"/>
+                            </a:rPr>
+                          </m:ctrlPr>
+                        </m:sSubPr>
+                        <m:e>
+                          <m:r>
+                            <a:rPr lang="en-US" altLang="zh-TW" b="0" i="1" smtClean="0">
+                              <a:latin typeface="Cambria Math" panose="02040503050406030204" pitchFamily="18" charset="0"/>
+                              <a:ea typeface="Cambria Math" panose="02040503050406030204" pitchFamily="18" charset="0"/>
+                            </a:rPr>
+                            <m:t>𝑆</m:t>
+                          </m:r>
+                        </m:e>
+                        <m:sub>
+                          <m:r>
+                            <a:rPr lang="en-US" altLang="zh-TW" b="0" i="1" smtClean="0">
+                              <a:latin typeface="Cambria Math" panose="02040503050406030204" pitchFamily="18" charset="0"/>
+                              <a:ea typeface="Cambria Math" panose="02040503050406030204" pitchFamily="18" charset="0"/>
+                            </a:rPr>
+                            <m:t>𝑖</m:t>
+                          </m:r>
+                        </m:sub>
+                      </m:sSub>
+                      <m:sPre>
+                        <m:sPrePr>
+                          <m:ctrlPr>
+                            <a:rPr lang="en-US" altLang="zh-TW" b="0" i="1" smtClean="0">
+                              <a:latin typeface="Cambria Math" panose="02040503050406030204" pitchFamily="18" charset="0"/>
+                              <a:ea typeface="Cambria Math" panose="02040503050406030204" pitchFamily="18" charset="0"/>
+                            </a:rPr>
+                          </m:ctrlPr>
+                        </m:sPrePr>
+                        <m:sub/>
+                        <m:sup>
+                          <m:r>
+                            <a:rPr lang="en-US" altLang="zh-TW" b="0" i="1" smtClean="0">
+                              <a:latin typeface="Cambria Math" panose="02040503050406030204" pitchFamily="18" charset="0"/>
+                            </a:rPr>
+                            <m:t>𝐵</m:t>
+                          </m:r>
+                        </m:sup>
+                        <m:e>
+                          <m:sSub>
+                            <m:sSubPr>
+                              <m:ctrlPr>
+                                <a:rPr lang="en-US" altLang="zh-TW" i="1" smtClean="0">
+                                  <a:latin typeface="Cambria Math" panose="02040503050406030204" pitchFamily="18" charset="0"/>
+                                </a:rPr>
+                              </m:ctrlPr>
+                            </m:sSubPr>
+                            <m:e>
+                              <m:acc>
+                                <m:accPr>
+                                  <m:chr m:val="̂"/>
+                                  <m:ctrlPr>
+                                    <a:rPr lang="en-US" altLang="zh-TW" b="0" i="1" smtClean="0">
+                                      <a:latin typeface="Cambria Math" panose="02040503050406030204" pitchFamily="18" charset="0"/>
+                                    </a:rPr>
+                                  </m:ctrlPr>
+                                </m:accPr>
+                                <m:e>
+                                  <m:r>
+                                    <a:rPr lang="en-US" altLang="zh-TW" b="0" i="1" smtClean="0">
+                                      <a:latin typeface="Cambria Math" panose="02040503050406030204" pitchFamily="18" charset="0"/>
+                                    </a:rPr>
+                                    <m:t>𝑔</m:t>
+                                  </m:r>
+                                </m:e>
+                              </m:acc>
+                            </m:e>
+                            <m:sub>
+                              <m:r>
+                                <a:rPr lang="en-US" altLang="zh-TW" b="0" i="1" smtClean="0">
+                                  <a:latin typeface="Cambria Math" panose="02040503050406030204" pitchFamily="18" charset="0"/>
+                                </a:rPr>
+                                <m:t>𝐼</m:t>
+                              </m:r>
+                            </m:sub>
+                          </m:sSub>
+                        </m:e>
+                      </m:sPre>
+                      <m:acc>
+                        <m:accPr>
+                          <m:chr m:val="̅"/>
+                          <m:ctrlPr>
+                            <a:rPr lang="zh-TW" altLang="en-US" b="0" i="1" smtClean="0">
+                              <a:latin typeface="Cambria Math" panose="02040503050406030204" pitchFamily="18" charset="0"/>
+                            </a:rPr>
+                          </m:ctrlPr>
+                        </m:accPr>
+                        <m:e>
+                          <m:r>
+                            <a:rPr lang="en-US" altLang="zh-TW" b="0" i="1" smtClean="0">
+                              <a:latin typeface="Cambria Math" panose="02040503050406030204" pitchFamily="18" charset="0"/>
+                            </a:rPr>
+                            <m:t>𝐾</m:t>
+                          </m:r>
+                        </m:e>
+                      </m:acc>
+                      <m:sSub>
+                        <m:sSubPr>
+                          <m:ctrlPr>
+                            <a:rPr lang="en-US" altLang="zh-TW" b="0" i="1" smtClean="0">
+                              <a:latin typeface="Cambria Math" panose="02040503050406030204" pitchFamily="18" charset="0"/>
+                            </a:rPr>
+                          </m:ctrlPr>
+                        </m:sSubPr>
+                        <m:e>
+                          <m:r>
+                            <a:rPr lang="en-US" altLang="zh-TW" b="0" i="1" smtClean="0">
+                              <a:latin typeface="Cambria Math" panose="02040503050406030204" pitchFamily="18" charset="0"/>
+                            </a:rPr>
+                            <m:t>𝐼</m:t>
+                          </m:r>
+                        </m:e>
+                        <m:sub>
+                          <m:r>
+                            <a:rPr lang="en-US" altLang="zh-TW" b="0" i="1" smtClean="0">
+                              <a:latin typeface="Cambria Math" panose="02040503050406030204" pitchFamily="18" charset="0"/>
+                            </a:rPr>
+                            <m:t>𝑗</m:t>
+                          </m:r>
+                        </m:sub>
+                      </m:sSub>
+                    </m:oMath>
+                  </m:oMathPara>
+                </a14:m>
+                <a:endParaRPr lang="zh-TW" altLang="en-US" dirty="0"/>
+              </a:p>
+            </p:txBody>
+          </p:sp>
+        </mc:Choice>
+        <mc:Fallback xmlns="">
+          <p:sp>
+            <p:nvSpPr>
+              <p:cNvPr id="3" name="文字方塊 2">
+                <a:extLst>
+                  <a:ext uri="{FF2B5EF4-FFF2-40B4-BE49-F238E27FC236}">
+                    <a16:creationId xmlns:a16="http://schemas.microsoft.com/office/drawing/2014/main" id="{B6964577-860D-4EB3-8219-1A6240335DA6}"/>
+                  </a:ext>
+                </a:extLst>
+              </p:cNvPr>
+              <p:cNvSpPr txBox="1">
+                <a:spLocks noRot="1" noChangeAspect="1" noMove="1" noResize="1" noEditPoints="1" noAdjustHandles="1" noChangeArrowheads="1" noChangeShapeType="1" noTextEdit="1"/>
+              </p:cNvSpPr>
+              <p:nvPr/>
+            </p:nvSpPr>
+            <p:spPr>
+              <a:xfrm>
+                <a:off x="8573024" y="570245"/>
+                <a:ext cx="3508909" cy="321563"/>
+              </a:xfrm>
+              <a:prstGeom prst="rect">
+                <a:avLst/>
+              </a:prstGeom>
+              <a:blipFill>
+                <a:blip r:embed="rId2"/>
+                <a:stretch>
+                  <a:fillRect l="-1215" t="-15385" r="-6944" b="-25000"/>
+                </a:stretch>
+              </a:blipFill>
+            </p:spPr>
+            <p:txBody>
+              <a:bodyPr/>
+              <a:lstStyle/>
+              <a:p>
+                <a:r>
+                  <a:rPr lang="zh-TW" altLang="en-US">
+                    <a:noFill/>
+                  </a:rPr>
+                  <a:t> </a:t>
+                </a:r>
+              </a:p>
+            </p:txBody>
+          </p:sp>
+        </mc:Fallback>
+      </mc:AlternateContent>
+      <p:sp>
+        <p:nvSpPr>
+          <p:cNvPr id="19" name="文字方塊 18">
+            <a:extLst>
+              <a:ext uri="{FF2B5EF4-FFF2-40B4-BE49-F238E27FC236}">
+                <a16:creationId xmlns:a16="http://schemas.microsoft.com/office/drawing/2014/main" id="{EBA17566-B42C-4B02-B869-9832F66C8C0A}"/>
+              </a:ext>
+            </a:extLst>
+          </p:cNvPr>
+          <p:cNvSpPr txBox="1"/>
+          <p:nvPr/>
+        </p:nvSpPr>
+        <p:spPr>
+          <a:xfrm>
+            <a:off x="4754723" y="612470"/>
+            <a:ext cx="1879600" cy="369332"/>
+          </a:xfrm>
+          <a:prstGeom prst="rect">
+            <a:avLst/>
+          </a:prstGeom>
+          <a:noFill/>
+        </p:spPr>
+        <p:txBody>
+          <a:bodyPr wrap="square" rtlCol="0">
+            <a:spAutoFit/>
+          </a:bodyPr>
+          <a:lstStyle/>
+          <a:p>
+            <a:pPr marL="285750" indent="-285750">
+              <a:buFont typeface="Arial" panose="020B0604020202020204" pitchFamily="34" charset="0"/>
+              <a:buChar char="•"/>
+            </a:pPr>
+            <a:r>
+              <a:rPr lang="en-US" altLang="zh-TW" dirty="0"/>
+              <a:t>Fitting results</a:t>
+            </a:r>
+            <a:endParaRPr lang="zh-TW" altLang="en-US" dirty="0"/>
+          </a:p>
+        </p:txBody>
+      </p:sp>
+      <mc:AlternateContent xmlns:mc="http://schemas.openxmlformats.org/markup-compatibility/2006" xmlns:a14="http://schemas.microsoft.com/office/drawing/2010/main">
+        <mc:Choice Requires="a14">
+          <p:sp>
+            <p:nvSpPr>
+              <p:cNvPr id="14" name="文字方塊 13">
+                <a:extLst>
+                  <a:ext uri="{FF2B5EF4-FFF2-40B4-BE49-F238E27FC236}">
+                    <a16:creationId xmlns:a16="http://schemas.microsoft.com/office/drawing/2014/main" id="{36B864DE-D4E0-45CF-A983-5B487047D8F7}"/>
+                  </a:ext>
+                </a:extLst>
+              </p:cNvPr>
+              <p:cNvSpPr txBox="1"/>
+              <p:nvPr/>
+            </p:nvSpPr>
+            <p:spPr>
+              <a:xfrm>
+                <a:off x="4818002" y="3026630"/>
+                <a:ext cx="7120466" cy="3831370"/>
+              </a:xfrm>
+              <a:prstGeom prst="rect">
+                <a:avLst/>
+              </a:prstGeom>
+              <a:noFill/>
+            </p:spPr>
+            <p:txBody>
+              <a:bodyPr wrap="square" rtlCol="0">
+                <a:spAutoFit/>
+              </a:bodyPr>
+              <a:lstStyle/>
+              <a:p>
+                <a:pPr marL="285750" indent="-285750">
+                  <a:lnSpc>
+                    <a:spcPct val="150000"/>
+                  </a:lnSpc>
+                  <a:buFont typeface="Arial" panose="020B0604020202020204" pitchFamily="34" charset="0"/>
+                  <a:buChar char="•"/>
+                </a:pPr>
+                <a:r>
+                  <a:rPr lang="en-US" altLang="zh-TW" dirty="0"/>
+                  <a:t>This figure shows the trends of the eighteen parameters. A notable difference can be observed in </a:t>
+                </a:r>
+                <a14:m>
+                  <m:oMath xmlns:m="http://schemas.openxmlformats.org/officeDocument/2006/math">
+                    <m:sPre>
+                      <m:sPrePr>
+                        <m:ctrlPr>
+                          <a:rPr lang="en-US" altLang="zh-TW" i="1" smtClean="0">
+                            <a:latin typeface="Cambria Math" panose="02040503050406030204" pitchFamily="18" charset="0"/>
+                          </a:rPr>
+                        </m:ctrlPr>
+                      </m:sPrePr>
+                      <m:sub/>
+                      <m:sup>
+                        <m:r>
+                          <a:rPr lang="en-US" altLang="zh-TW" b="0" i="1" smtClean="0">
+                            <a:latin typeface="Cambria Math" panose="02040503050406030204" pitchFamily="18" charset="0"/>
+                          </a:rPr>
+                          <m:t>𝐵</m:t>
+                        </m:r>
+                      </m:sup>
+                      <m:e>
+                        <m:sSub>
+                          <m:sSubPr>
+                            <m:ctrlPr>
+                              <a:rPr lang="en-US" altLang="zh-TW" i="1" smtClean="0">
+                                <a:latin typeface="Cambria Math" panose="02040503050406030204" pitchFamily="18" charset="0"/>
+                              </a:rPr>
+                            </m:ctrlPr>
+                          </m:sSubPr>
+                          <m:e>
+                            <m:acc>
+                              <m:accPr>
+                                <m:chr m:val="̂"/>
+                                <m:ctrlPr>
+                                  <a:rPr lang="en-US" altLang="zh-TW" i="1" smtClean="0">
+                                    <a:latin typeface="Cambria Math" panose="02040503050406030204" pitchFamily="18" charset="0"/>
+                                  </a:rPr>
+                                </m:ctrlPr>
+                              </m:accPr>
+                              <m:e>
+                                <m:r>
+                                  <a:rPr lang="en-US" altLang="zh-TW" b="0" i="1" smtClean="0">
+                                    <a:latin typeface="Cambria Math" panose="02040503050406030204" pitchFamily="18" charset="0"/>
+                                  </a:rPr>
+                                  <m:t>𝑔</m:t>
+                                </m:r>
+                              </m:e>
+                            </m:acc>
+                          </m:e>
+                          <m:sub>
+                            <m:r>
+                              <a:rPr lang="en-US" altLang="zh-TW" b="0" i="1" smtClean="0">
+                                <a:latin typeface="Cambria Math" panose="02040503050406030204" pitchFamily="18" charset="0"/>
+                              </a:rPr>
+                              <m:t>𝐼</m:t>
+                            </m:r>
+                          </m:sub>
+                        </m:sSub>
+                      </m:e>
+                    </m:sPre>
+                  </m:oMath>
+                </a14:m>
+                <a:r>
+                  <a:rPr lang="en-US" altLang="zh-TW" dirty="0"/>
+                  <a:t>, whose trend is opposite to that of the one-parameter model. In the eighteen-parameter model, the additional degrees of freedom associated with the magnetic charge locations allow the model to simultaneously fit the magnetic field in both the near-field and near-pole regions. As the sampling sphere becomes larger, a greater magnetic charge strength is required to reproduce the magnetic field over the expanded region. Therefore, </a:t>
+                </a:r>
+                <a14:m>
+                  <m:oMath xmlns:m="http://schemas.openxmlformats.org/officeDocument/2006/math">
+                    <m:sPre>
+                      <m:sPrePr>
+                        <m:ctrlPr>
+                          <a:rPr lang="en-US" altLang="zh-TW" i="1">
+                            <a:latin typeface="Cambria Math" panose="02040503050406030204" pitchFamily="18" charset="0"/>
+                          </a:rPr>
+                        </m:ctrlPr>
+                      </m:sPrePr>
+                      <m:sub/>
+                      <m:sup>
+                        <m:r>
+                          <a:rPr lang="en-US" altLang="zh-TW" i="1">
+                            <a:latin typeface="Cambria Math" panose="02040503050406030204" pitchFamily="18" charset="0"/>
+                          </a:rPr>
+                          <m:t>𝐵</m:t>
+                        </m:r>
+                      </m:sup>
+                      <m:e>
+                        <m:sSub>
+                          <m:sSubPr>
+                            <m:ctrlPr>
+                              <a:rPr lang="en-US" altLang="zh-TW" i="1">
+                                <a:latin typeface="Cambria Math" panose="02040503050406030204" pitchFamily="18" charset="0"/>
+                              </a:rPr>
+                            </m:ctrlPr>
+                          </m:sSubPr>
+                          <m:e>
+                            <m:acc>
+                              <m:accPr>
+                                <m:chr m:val="̂"/>
+                                <m:ctrlPr>
+                                  <a:rPr lang="en-US" altLang="zh-TW" i="1">
+                                    <a:latin typeface="Cambria Math" panose="02040503050406030204" pitchFamily="18" charset="0"/>
+                                  </a:rPr>
+                                </m:ctrlPr>
+                              </m:accPr>
+                              <m:e>
+                                <m:r>
+                                  <a:rPr lang="en-US" altLang="zh-TW" i="1">
+                                    <a:latin typeface="Cambria Math" panose="02040503050406030204" pitchFamily="18" charset="0"/>
+                                  </a:rPr>
+                                  <m:t>𝑔</m:t>
+                                </m:r>
+                              </m:e>
+                            </m:acc>
+                          </m:e>
+                          <m:sub>
+                            <m:r>
+                              <a:rPr lang="en-US" altLang="zh-TW" i="1">
+                                <a:latin typeface="Cambria Math" panose="02040503050406030204" pitchFamily="18" charset="0"/>
+                              </a:rPr>
+                              <m:t>𝐼</m:t>
+                            </m:r>
+                          </m:sub>
+                        </m:sSub>
+                      </m:e>
+                    </m:sPre>
+                  </m:oMath>
+                </a14:m>
+                <a:r>
+                  <a:rPr lang="en-US" altLang="zh-TW" dirty="0"/>
+                  <a:t> increases as the sampling range increases.</a:t>
+                </a:r>
+                <a:endParaRPr lang="zh-TW" altLang="en-US" dirty="0"/>
+              </a:p>
+            </p:txBody>
+          </p:sp>
+        </mc:Choice>
+        <mc:Fallback xmlns="">
+          <p:sp>
+            <p:nvSpPr>
+              <p:cNvPr id="14" name="文字方塊 13">
+                <a:extLst>
+                  <a:ext uri="{FF2B5EF4-FFF2-40B4-BE49-F238E27FC236}">
+                    <a16:creationId xmlns:a16="http://schemas.microsoft.com/office/drawing/2014/main" id="{36B864DE-D4E0-45CF-A983-5B487047D8F7}"/>
+                  </a:ext>
+                </a:extLst>
+              </p:cNvPr>
+              <p:cNvSpPr txBox="1">
+                <a:spLocks noRot="1" noChangeAspect="1" noMove="1" noResize="1" noEditPoints="1" noAdjustHandles="1" noChangeArrowheads="1" noChangeShapeType="1" noTextEdit="1"/>
+              </p:cNvSpPr>
+              <p:nvPr/>
+            </p:nvSpPr>
+            <p:spPr>
+              <a:xfrm>
+                <a:off x="4818002" y="3026630"/>
+                <a:ext cx="7120466" cy="3831370"/>
+              </a:xfrm>
+              <a:prstGeom prst="rect">
+                <a:avLst/>
+              </a:prstGeom>
+              <a:blipFill>
+                <a:blip r:embed="rId9"/>
+                <a:stretch>
+                  <a:fillRect l="-514" r="-3168" b="-2544"/>
+                </a:stretch>
+              </a:blipFill>
+            </p:spPr>
+            <p:txBody>
+              <a:bodyPr/>
+              <a:lstStyle/>
+              <a:p>
+                <a:r>
+                  <a:rPr lang="zh-TW" altLang="en-US">
+                    <a:noFill/>
+                  </a:rPr>
+                  <a:t> </a:t>
+                </a:r>
+              </a:p>
+            </p:txBody>
+          </p:sp>
+        </mc:Fallback>
+      </mc:AlternateContent>
+      <mc:AlternateContent xmlns:mc="http://schemas.openxmlformats.org/markup-compatibility/2006">
+        <mc:Choice xmlns:a14="http://schemas.microsoft.com/office/drawing/2010/main" Requires="a14">
+          <p:sp>
+            <p:nvSpPr>
+              <p:cNvPr id="16" name="文字方塊 15">
+                <a:extLst>
+                  <a:ext uri="{FF2B5EF4-FFF2-40B4-BE49-F238E27FC236}">
+                    <a16:creationId xmlns:a16="http://schemas.microsoft.com/office/drawing/2014/main" id="{3514A624-EDE9-40AF-BE57-A60AD18744E7}"/>
+                  </a:ext>
+                </a:extLst>
+              </p:cNvPr>
+              <p:cNvSpPr txBox="1"/>
+              <p:nvPr/>
+            </p:nvSpPr>
+            <p:spPr>
+              <a:xfrm>
+                <a:off x="4860789" y="981802"/>
+                <a:ext cx="7221144" cy="1511055"/>
+              </a:xfrm>
+              <a:prstGeom prst="rect">
+                <a:avLst/>
+              </a:prstGeom>
+              <a:noFill/>
+            </p:spPr>
+            <p:txBody>
+              <a:bodyPr wrap="none" lIns="0" tIns="0" rIns="0" bIns="0" rtlCol="0">
+                <a:spAutoFit/>
+              </a:bodyPr>
+              <a:lstStyle/>
+              <a:p>
+                <a14:m>
+                  <m:oMathPara xmlns:m="http://schemas.openxmlformats.org/officeDocument/2006/math">
+                    <m:oMathParaPr>
+                      <m:jc m:val="centerGroup"/>
+                    </m:oMathParaPr>
+                    <m:oMath xmlns:m="http://schemas.openxmlformats.org/officeDocument/2006/math">
+                      <m:sSub>
+                        <m:sSubPr>
+                          <m:ctrlPr>
+                            <a:rPr lang="en-US" altLang="zh-TW" b="0" i="1" smtClean="0">
+                              <a:latin typeface="Cambria Math" panose="02040503050406030204" pitchFamily="18" charset="0"/>
+                            </a:rPr>
+                          </m:ctrlPr>
+                        </m:sSubPr>
+                        <m:e>
+                          <m:acc>
+                            <m:accPr>
+                              <m:chr m:val="̅"/>
+                              <m:ctrlPr>
+                                <a:rPr lang="en-US" altLang="zh-TW" b="0" i="1" smtClean="0">
+                                  <a:latin typeface="Cambria Math" panose="02040503050406030204" pitchFamily="18" charset="0"/>
+                                </a:rPr>
+                              </m:ctrlPr>
+                            </m:accPr>
+                            <m:e>
+                              <m:r>
+                                <a:rPr lang="en-US" altLang="zh-TW" b="0" i="1" smtClean="0">
+                                  <a:latin typeface="Cambria Math" panose="02040503050406030204" pitchFamily="18" charset="0"/>
+                                </a:rPr>
+                                <m:t>𝐾</m:t>
+                              </m:r>
+                            </m:e>
+                          </m:acc>
+                        </m:e>
+                        <m:sub>
+                          <m:r>
+                            <a:rPr lang="en-US" altLang="zh-TW" b="0" i="1" smtClean="0">
+                              <a:latin typeface="Cambria Math" panose="02040503050406030204" pitchFamily="18" charset="0"/>
+                            </a:rPr>
+                            <m:t>𝐼</m:t>
+                          </m:r>
+                        </m:sub>
+                      </m:sSub>
+                      <m:r>
+                        <a:rPr lang="en-US" altLang="zh-TW" b="0" i="1" smtClean="0">
+                          <a:latin typeface="Cambria Math" panose="02040503050406030204" pitchFamily="18" charset="0"/>
+                        </a:rPr>
+                        <m:t>=</m:t>
+                      </m:r>
+                      <m:d>
+                        <m:dPr>
+                          <m:begChr m:val="["/>
+                          <m:endChr m:val="]"/>
+                          <m:ctrlPr>
+                            <a:rPr lang="en-US" altLang="zh-TW" b="0" i="1" smtClean="0">
+                              <a:latin typeface="Cambria Math" panose="02040503050406030204" pitchFamily="18" charset="0"/>
+                            </a:rPr>
+                          </m:ctrlPr>
+                        </m:dPr>
+                        <m:e>
+                          <m:m>
+                            <m:mPr>
+                              <m:mcs>
+                                <m:mc>
+                                  <m:mcPr>
+                                    <m:count m:val="2"/>
+                                    <m:mcJc m:val="center"/>
+                                  </m:mcPr>
+                                </m:mc>
+                              </m:mcs>
+                              <m:ctrlPr>
+                                <a:rPr lang="en-US" altLang="zh-TW" b="0" i="1" smtClean="0">
+                                  <a:latin typeface="Cambria Math" panose="02040503050406030204" pitchFamily="18" charset="0"/>
+                                </a:rPr>
+                              </m:ctrlPr>
+                            </m:mPr>
+                            <m:mr>
+                              <m:e>
+                                <m:r>
+                                  <m:rPr>
+                                    <m:brk m:alnAt="7"/>
+                                  </m:rPr>
+                                  <a:rPr lang="en-US" altLang="zh-TW" b="0" i="1" smtClean="0">
+                                    <a:latin typeface="Cambria Math" panose="02040503050406030204" pitchFamily="18" charset="0"/>
+                                  </a:rPr>
+                                  <m:t>0.8333</m:t>
+                                </m:r>
+                              </m:e>
+                              <m:e>
+                                <m:m>
+                                  <m:mPr>
+                                    <m:mcs>
+                                      <m:mc>
+                                        <m:mcPr>
+                                          <m:count m:val="3"/>
+                                          <m:mcJc m:val="center"/>
+                                        </m:mcPr>
+                                      </m:mc>
+                                    </m:mcs>
+                                    <m:ctrlPr>
+                                      <a:rPr lang="en-US" altLang="zh-TW" b="0" i="1" smtClean="0">
+                                        <a:latin typeface="Cambria Math" panose="02040503050406030204" pitchFamily="18" charset="0"/>
+                                      </a:rPr>
+                                    </m:ctrlPr>
+                                  </m:mPr>
+                                  <m:mr>
+                                    <m:e>
+                                      <m:r>
+                                        <m:rPr>
+                                          <m:brk m:alnAt="7"/>
+                                        </m:rPr>
+                                        <a:rPr lang="en-US" altLang="zh-TW" b="0" i="1" smtClean="0">
+                                          <a:latin typeface="Cambria Math" panose="02040503050406030204" pitchFamily="18" charset="0"/>
+                                        </a:rPr>
+                                        <m:t>−0.1241</m:t>
+                                      </m:r>
+                                    </m:e>
+                                    <m:e>
+                                      <m:r>
+                                        <a:rPr lang="en-US" altLang="zh-TW" b="0" i="1" smtClean="0">
+                                          <a:latin typeface="Cambria Math" panose="02040503050406030204" pitchFamily="18" charset="0"/>
+                                        </a:rPr>
+                                        <m:t>−0.1247</m:t>
+                                      </m:r>
+                                    </m:e>
+                                    <m:e>
+                                      <m:m>
+                                        <m:mPr>
+                                          <m:mcs>
+                                            <m:mc>
+                                              <m:mcPr>
+                                                <m:count m:val="3"/>
+                                                <m:mcJc m:val="center"/>
+                                              </m:mcPr>
+                                            </m:mc>
+                                          </m:mcs>
+                                          <m:ctrlPr>
+                                            <a:rPr lang="en-US" altLang="zh-TW" b="0" i="1" smtClean="0">
+                                              <a:latin typeface="Cambria Math" panose="02040503050406030204" pitchFamily="18" charset="0"/>
+                                            </a:rPr>
+                                          </m:ctrlPr>
+                                        </m:mPr>
+                                        <m:mr>
+                                          <m:e>
+                                            <m:r>
+                                              <m:rPr>
+                                                <m:brk m:alnAt="7"/>
+                                              </m:rPr>
+                                              <a:rPr lang="en-US" altLang="zh-TW" b="0" i="1" smtClean="0">
+                                                <a:latin typeface="Cambria Math" panose="02040503050406030204" pitchFamily="18" charset="0"/>
+                                              </a:rPr>
+                                              <m:t>−0.1993</m:t>
+                                            </m:r>
+                                          </m:e>
+                                          <m:e>
+                                            <m:r>
+                                              <a:rPr lang="en-US" altLang="zh-TW" b="0" i="1" smtClean="0">
+                                                <a:latin typeface="Cambria Math" panose="02040503050406030204" pitchFamily="18" charset="0"/>
+                                              </a:rPr>
+                                              <m:t>−0.1996</m:t>
+                                            </m:r>
+                                          </m:e>
+                                          <m:e>
+                                            <m:r>
+                                              <a:rPr lang="en-US" altLang="zh-TW" b="0" i="1" smtClean="0">
+                                                <a:latin typeface="Cambria Math" panose="02040503050406030204" pitchFamily="18" charset="0"/>
+                                              </a:rPr>
+                                              <m:t>−0.1228</m:t>
+                                            </m:r>
+                                          </m:e>
+                                        </m:mr>
+                                      </m:m>
+                                    </m:e>
+                                  </m:mr>
+                                </m:m>
+                              </m:e>
+                            </m:mr>
+                            <m:mr>
+                              <m:e>
+                                <m:m>
+                                  <m:mPr>
+                                    <m:mcs>
+                                      <m:mc>
+                                        <m:mcPr>
+                                          <m:count m:val="1"/>
+                                          <m:mcJc m:val="center"/>
+                                        </m:mcPr>
+                                      </m:mc>
+                                    </m:mcs>
+                                    <m:ctrlPr>
+                                      <a:rPr lang="en-US" altLang="zh-TW" b="0" i="1" smtClean="0">
+                                        <a:latin typeface="Cambria Math" panose="02040503050406030204" pitchFamily="18" charset="0"/>
+                                      </a:rPr>
+                                    </m:ctrlPr>
+                                  </m:mPr>
+                                  <m:mr>
+                                    <m:e>
+                                      <m:r>
+                                        <m:rPr>
+                                          <m:brk m:alnAt="7"/>
+                                        </m:rPr>
+                                        <a:rPr lang="en-US" altLang="zh-TW" b="0" i="1" smtClean="0">
+                                          <a:latin typeface="Cambria Math" panose="02040503050406030204" pitchFamily="18" charset="0"/>
+                                        </a:rPr>
+                                        <m:t>−0.1116</m:t>
+                                      </m:r>
+                                    </m:e>
+                                  </m:mr>
+                                  <m:mr>
+                                    <m:e>
+                                      <m:r>
+                                        <a:rPr lang="en-US" altLang="zh-TW" b="0" i="1" smtClean="0">
+                                          <a:latin typeface="Cambria Math" panose="02040503050406030204" pitchFamily="18" charset="0"/>
+                                        </a:rPr>
+                                        <m:t>−0.1239</m:t>
+                                      </m:r>
+                                    </m:e>
+                                  </m:mr>
+                                  <m:mr>
+                                    <m:e>
+                                      <m:m>
+                                        <m:mPr>
+                                          <m:mcs>
+                                            <m:mc>
+                                              <m:mcPr>
+                                                <m:count m:val="1"/>
+                                                <m:mcJc m:val="center"/>
+                                              </m:mcPr>
+                                            </m:mc>
+                                          </m:mcs>
+                                          <m:ctrlPr>
+                                            <a:rPr lang="en-US" altLang="zh-TW" b="0" i="1" smtClean="0">
+                                              <a:latin typeface="Cambria Math" panose="02040503050406030204" pitchFamily="18" charset="0"/>
+                                            </a:rPr>
+                                          </m:ctrlPr>
+                                        </m:mPr>
+                                        <m:mr>
+                                          <m:e>
+                                            <m:r>
+                                              <m:rPr>
+                                                <m:brk m:alnAt="7"/>
+                                              </m:rPr>
+                                              <a:rPr lang="en-US" altLang="zh-TW" b="0" i="1" smtClean="0">
+                                                <a:latin typeface="Cambria Math" panose="02040503050406030204" pitchFamily="18" charset="0"/>
+                                              </a:rPr>
+                                              <m:t>−0.2063</m:t>
+                                            </m:r>
+                                          </m:e>
+                                        </m:mr>
+                                        <m:mr>
+                                          <m:e>
+                                            <m:r>
+                                              <a:rPr lang="en-US" altLang="zh-TW" b="0" i="1" smtClean="0">
+                                                <a:latin typeface="Cambria Math" panose="02040503050406030204" pitchFamily="18" charset="0"/>
+                                              </a:rPr>
+                                              <m:t>−0.2062</m:t>
+                                            </m:r>
+                                          </m:e>
+                                        </m:mr>
+                                        <m:mr>
+                                          <m:e>
+                                            <m:r>
+                                              <a:rPr lang="en-US" altLang="zh-TW" b="0" i="1" smtClean="0">
+                                                <a:latin typeface="Cambria Math" panose="02040503050406030204" pitchFamily="18" charset="0"/>
+                                              </a:rPr>
+                                              <m:t>−0.1237</m:t>
+                                            </m:r>
+                                          </m:e>
+                                        </m:mr>
+                                      </m:m>
+                                    </m:e>
+                                  </m:mr>
+                                </m:m>
+                              </m:e>
+                              <m:e>
+                                <m:m>
+                                  <m:mPr>
+                                    <m:mcs>
+                                      <m:mc>
+                                        <m:mcPr>
+                                          <m:count m:val="1"/>
+                                          <m:mcJc m:val="center"/>
+                                        </m:mcPr>
+                                      </m:mc>
+                                    </m:mcs>
+                                    <m:ctrlPr>
+                                      <a:rPr lang="en-US" altLang="zh-TW" b="0" i="1" smtClean="0">
+                                        <a:latin typeface="Cambria Math" panose="02040503050406030204" pitchFamily="18" charset="0"/>
+                                      </a:rPr>
+                                    </m:ctrlPr>
+                                  </m:mPr>
+                                  <m:mr>
+                                    <m:e>
+                                      <m:m>
+                                        <m:mPr>
+                                          <m:mcs>
+                                            <m:mc>
+                                              <m:mcPr>
+                                                <m:count m:val="3"/>
+                                                <m:mcJc m:val="center"/>
+                                              </m:mcPr>
+                                            </m:mc>
+                                          </m:mcs>
+                                          <m:ctrlPr>
+                                            <a:rPr lang="en-US" altLang="zh-TW" b="0" i="1" smtClean="0">
+                                              <a:latin typeface="Cambria Math" panose="02040503050406030204" pitchFamily="18" charset="0"/>
+                                            </a:rPr>
+                                          </m:ctrlPr>
+                                        </m:mPr>
+                                        <m:mr>
+                                          <m:e>
+                                            <m:r>
+                                              <m:rPr>
+                                                <m:brk m:alnAt="7"/>
+                                              </m:rPr>
+                                              <a:rPr lang="en-US" altLang="zh-TW" b="0" i="1" smtClean="0">
+                                                <a:latin typeface="Cambria Math" panose="02040503050406030204" pitchFamily="18" charset="0"/>
+                                              </a:rPr>
+                                              <m:t>0.8173</m:t>
+                                            </m:r>
+                                          </m:e>
+                                          <m:e>
+                                            <m:r>
+                                              <a:rPr lang="en-US" altLang="zh-TW" b="0" i="1" smtClean="0">
+                                                <a:latin typeface="Cambria Math" panose="02040503050406030204" pitchFamily="18" charset="0"/>
+                                              </a:rPr>
+                                              <m:t>−0.2089</m:t>
+                                            </m:r>
+                                          </m:e>
+                                          <m:e>
+                                            <m:m>
+                                              <m:mPr>
+                                                <m:mcs>
+                                                  <m:mc>
+                                                    <m:mcPr>
+                                                      <m:count m:val="3"/>
+                                                      <m:mcJc m:val="center"/>
+                                                    </m:mcPr>
+                                                  </m:mc>
+                                                </m:mcs>
+                                                <m:ctrlPr>
+                                                  <a:rPr lang="en-US" altLang="zh-TW" b="0" i="1" smtClean="0">
+                                                    <a:latin typeface="Cambria Math" panose="02040503050406030204" pitchFamily="18" charset="0"/>
+                                                  </a:rPr>
+                                                </m:ctrlPr>
+                                              </m:mPr>
+                                              <m:mr>
+                                                <m:e>
+                                                  <m:r>
+                                                    <m:rPr>
+                                                      <m:brk m:alnAt="7"/>
+                                                    </m:rPr>
+                                                    <a:rPr lang="en-US" altLang="zh-TW" b="0" i="1" smtClean="0">
+                                                      <a:latin typeface="Cambria Math" panose="02040503050406030204" pitchFamily="18" charset="0"/>
+                                                    </a:rPr>
+                                                    <m:t>−0.1208</m:t>
+                                                  </m:r>
+                                                </m:e>
+                                                <m:e>
+                                                  <m:r>
+                                                    <a:rPr lang="en-US" altLang="zh-TW" b="0" i="1" smtClean="0">
+                                                      <a:latin typeface="Cambria Math" panose="02040503050406030204" pitchFamily="18" charset="0"/>
+                                                    </a:rPr>
+                                                    <m:t>−0.1198</m:t>
+                                                  </m:r>
+                                                </m:e>
+                                                <m:e>
+                                                  <m:r>
+                                                    <a:rPr lang="en-US" altLang="zh-TW" b="0" i="1" smtClean="0">
+                                                      <a:latin typeface="Cambria Math" panose="02040503050406030204" pitchFamily="18" charset="0"/>
+                                                    </a:rPr>
+                                                    <m:t>−0.2102</m:t>
+                                                  </m:r>
+                                                </m:e>
+                                              </m:mr>
+                                            </m:m>
+                                          </m:e>
+                                        </m:mr>
+                                      </m:m>
+                                    </m:e>
+                                  </m:mr>
+                                  <m:mr>
+                                    <m:e>
+                                      <m:m>
+                                        <m:mPr>
+                                          <m:mcs>
+                                            <m:mc>
+                                              <m:mcPr>
+                                                <m:count m:val="3"/>
+                                                <m:mcJc m:val="center"/>
+                                              </m:mcPr>
+                                            </m:mc>
+                                          </m:mcs>
+                                          <m:ctrlPr>
+                                            <a:rPr lang="en-US" altLang="zh-TW" b="0" i="1" smtClean="0">
+                                              <a:latin typeface="Cambria Math" panose="02040503050406030204" pitchFamily="18" charset="0"/>
+                                            </a:rPr>
+                                          </m:ctrlPr>
+                                        </m:mPr>
+                                        <m:mr>
+                                          <m:e>
+                                            <m:r>
+                                              <m:rPr>
+                                                <m:brk m:alnAt="7"/>
+                                              </m:rPr>
+                                              <a:rPr lang="en-US" altLang="zh-TW" b="0" i="1" smtClean="0">
+                                                <a:latin typeface="Cambria Math" panose="02040503050406030204" pitchFamily="18" charset="0"/>
+                                              </a:rPr>
+                                              <m:t>−0.1971</m:t>
+                                            </m:r>
+                                          </m:e>
+                                          <m:e>
+                                            <m:r>
+                                              <a:rPr lang="en-US" altLang="zh-TW" b="0" i="1" smtClean="0">
+                                                <a:latin typeface="Cambria Math" panose="02040503050406030204" pitchFamily="18" charset="0"/>
+                                              </a:rPr>
+                                              <m:t>0.8358</m:t>
+                                            </m:r>
+                                          </m:e>
+                                          <m:e>
+                                            <m:m>
+                                              <m:mPr>
+                                                <m:mcs>
+                                                  <m:mc>
+                                                    <m:mcPr>
+                                                      <m:count m:val="3"/>
+                                                      <m:mcJc m:val="center"/>
+                                                    </m:mcPr>
+                                                  </m:mc>
+                                                </m:mcs>
+                                                <m:ctrlPr>
+                                                  <a:rPr lang="en-US" altLang="zh-TW" b="0" i="1" smtClean="0">
+                                                    <a:latin typeface="Cambria Math" panose="02040503050406030204" pitchFamily="18" charset="0"/>
+                                                  </a:rPr>
+                                                </m:ctrlPr>
+                                              </m:mPr>
+                                              <m:mr>
+                                                <m:e>
+                                                  <m:r>
+                                                    <m:rPr>
+                                                      <m:brk m:alnAt="7"/>
+                                                    </m:rPr>
+                                                    <a:rPr lang="en-US" altLang="zh-TW" b="0" i="1" smtClean="0">
+                                                      <a:latin typeface="Cambria Math" panose="02040503050406030204" pitchFamily="18" charset="0"/>
+                                                    </a:rPr>
+                                                    <m:t>−0.1243</m:t>
+                                                  </m:r>
+                                                </m:e>
+                                                <m:e>
+                                                  <m:r>
+                                                    <a:rPr lang="en-US" altLang="zh-TW" b="0" i="1" smtClean="0">
+                                                      <a:latin typeface="Cambria Math" panose="02040503050406030204" pitchFamily="18" charset="0"/>
+                                                    </a:rPr>
+                                                    <m:t>−0.1970</m:t>
+                                                  </m:r>
+                                                </m:e>
+                                                <m:e>
+                                                  <m:r>
+                                                    <a:rPr lang="en-US" altLang="zh-TW" b="0" i="1" smtClean="0">
+                                                      <a:latin typeface="Cambria Math" panose="02040503050406030204" pitchFamily="18" charset="0"/>
+                                                    </a:rPr>
+                                                    <m:t>−0.1232</m:t>
+                                                  </m:r>
+                                                </m:e>
+                                              </m:mr>
+                                            </m:m>
+                                          </m:e>
+                                        </m:mr>
+                                      </m:m>
+                                    </m:e>
+                                  </m:mr>
+                                  <m:mr>
+                                    <m:e>
+                                      <m:m>
+                                        <m:mPr>
+                                          <m:mcs>
+                                            <m:mc>
+                                              <m:mcPr>
+                                                <m:count m:val="1"/>
+                                                <m:mcJc m:val="center"/>
+                                              </m:mcPr>
+                                            </m:mc>
+                                          </m:mcs>
+                                          <m:ctrlPr>
+                                            <a:rPr lang="en-US" altLang="zh-TW" b="0" i="1" smtClean="0">
+                                              <a:latin typeface="Cambria Math" panose="02040503050406030204" pitchFamily="18" charset="0"/>
+                                            </a:rPr>
+                                          </m:ctrlPr>
+                                        </m:mPr>
+                                        <m:mr>
+                                          <m:e>
+                                            <m:m>
+                                              <m:mPr>
+                                                <m:mcs>
+                                                  <m:mc>
+                                                    <m:mcPr>
+                                                      <m:count m:val="3"/>
+                                                      <m:mcJc m:val="center"/>
+                                                    </m:mcPr>
+                                                  </m:mc>
+                                                </m:mcs>
+                                                <m:ctrlPr>
+                                                  <a:rPr lang="en-US" altLang="zh-TW" b="0" i="1" smtClean="0">
+                                                    <a:latin typeface="Cambria Math" panose="02040503050406030204" pitchFamily="18" charset="0"/>
+                                                  </a:rPr>
+                                                </m:ctrlPr>
+                                              </m:mPr>
+                                              <m:mr>
+                                                <m:e>
+                                                  <m:r>
+                                                    <m:rPr>
+                                                      <m:brk m:alnAt="7"/>
+                                                    </m:rPr>
+                                                    <a:rPr lang="en-US" altLang="zh-TW" b="0" i="1" smtClean="0">
+                                                      <a:latin typeface="Cambria Math" panose="02040503050406030204" pitchFamily="18" charset="0"/>
+                                                    </a:rPr>
+                                                    <m:t>−0.1207</m:t>
+                                                  </m:r>
+                                                </m:e>
+                                                <m:e>
+                                                  <m:r>
+                                                    <a:rPr lang="en-US" altLang="zh-TW" b="0" i="1" smtClean="0">
+                                                      <a:latin typeface="Cambria Math" panose="02040503050406030204" pitchFamily="18" charset="0"/>
+                                                    </a:rPr>
+                                                    <m:t>−0.1130</m:t>
+                                                  </m:r>
+                                                </m:e>
+                                                <m:e>
+                                                  <m:m>
+                                                    <m:mPr>
+                                                      <m:mcs>
+                                                        <m:mc>
+                                                          <m:mcPr>
+                                                            <m:count m:val="3"/>
+                                                            <m:mcJc m:val="center"/>
+                                                          </m:mcPr>
+                                                        </m:mc>
+                                                      </m:mcs>
+                                                      <m:ctrlPr>
+                                                        <a:rPr lang="en-US" altLang="zh-TW" b="0" i="1" smtClean="0">
+                                                          <a:latin typeface="Cambria Math" panose="02040503050406030204" pitchFamily="18" charset="0"/>
+                                                        </a:rPr>
+                                                      </m:ctrlPr>
+                                                    </m:mPr>
+                                                    <m:mr>
+                                                      <m:e>
+                                                        <m:r>
+                                                          <m:rPr>
+                                                            <m:brk m:alnAt="7"/>
+                                                          </m:rPr>
+                                                          <a:rPr lang="en-US" altLang="zh-TW" b="0" i="1" smtClean="0">
+                                                            <a:latin typeface="Cambria Math" panose="02040503050406030204" pitchFamily="18" charset="0"/>
+                                                          </a:rPr>
+                                                          <m:t>0.8230</m:t>
+                                                        </m:r>
+                                                      </m:e>
+                                                      <m:e>
+                                                        <m:r>
+                                                          <a:rPr lang="en-US" altLang="zh-TW" b="0" i="1" smtClean="0">
+                                                            <a:latin typeface="Cambria Math" panose="02040503050406030204" pitchFamily="18" charset="0"/>
+                                                          </a:rPr>
+                                                          <m:t>−0.1206</m:t>
+                                                        </m:r>
+                                                      </m:e>
+                                                      <m:e>
+                                                        <m:r>
+                                                          <a:rPr lang="en-US" altLang="zh-TW" b="0" i="1" smtClean="0">
+                                                            <a:latin typeface="Cambria Math" panose="02040503050406030204" pitchFamily="18" charset="0"/>
+                                                          </a:rPr>
+                                                          <m:t>−0.2085</m:t>
+                                                        </m:r>
+                                                      </m:e>
+                                                    </m:mr>
+                                                  </m:m>
+                                                </m:e>
+                                              </m:mr>
+                                            </m:m>
+                                          </m:e>
+                                        </m:mr>
+                                        <m:mr>
+                                          <m:e>
+                                            <m:m>
+                                              <m:mPr>
+                                                <m:mcs>
+                                                  <m:mc>
+                                                    <m:mcPr>
+                                                      <m:count m:val="3"/>
+                                                      <m:mcJc m:val="center"/>
+                                                    </m:mcPr>
+                                                  </m:mc>
+                                                </m:mcs>
+                                                <m:ctrlPr>
+                                                  <a:rPr lang="en-US" altLang="zh-TW" b="0" i="1" smtClean="0">
+                                                    <a:latin typeface="Cambria Math" panose="02040503050406030204" pitchFamily="18" charset="0"/>
+                                                  </a:rPr>
+                                                </m:ctrlPr>
+                                              </m:mPr>
+                                              <m:mr>
+                                                <m:e>
+                                                  <m:r>
+                                                    <m:rPr>
+                                                      <m:brk m:alnAt="7"/>
+                                                    </m:rPr>
+                                                    <a:rPr lang="en-US" altLang="zh-TW" b="0" i="1" smtClean="0">
+                                                      <a:latin typeface="Cambria Math" panose="02040503050406030204" pitchFamily="18" charset="0"/>
+                                                    </a:rPr>
+                                                    <m:t>−0.1206</m:t>
+                                                  </m:r>
+                                                </m:e>
+                                                <m:e>
+                                                  <m:r>
+                                                    <a:rPr lang="en-US" altLang="zh-TW" b="0" i="1" smtClean="0">
+                                                      <a:latin typeface="Cambria Math" panose="02040503050406030204" pitchFamily="18" charset="0"/>
+                                                    </a:rPr>
+                                                    <m:t>−0.2053</m:t>
+                                                  </m:r>
+                                                </m:e>
+                                                <m:e>
+                                                  <m:m>
+                                                    <m:mPr>
+                                                      <m:mcs>
+                                                        <m:mc>
+                                                          <m:mcPr>
+                                                            <m:count m:val="3"/>
+                                                            <m:mcJc m:val="center"/>
+                                                          </m:mcPr>
+                                                        </m:mc>
+                                                      </m:mcs>
+                                                      <m:ctrlPr>
+                                                        <a:rPr lang="en-US" altLang="zh-TW" b="0" i="1" smtClean="0">
+                                                          <a:latin typeface="Cambria Math" panose="02040503050406030204" pitchFamily="18" charset="0"/>
+                                                        </a:rPr>
+                                                      </m:ctrlPr>
+                                                    </m:mPr>
+                                                    <m:mr>
+                                                      <m:e>
+                                                        <m:r>
+                                                          <m:rPr>
+                                                            <m:brk m:alnAt="7"/>
+                                                          </m:rPr>
+                                                          <a:rPr lang="en-US" altLang="zh-TW" b="0" i="1" smtClean="0">
+                                                            <a:latin typeface="Cambria Math" panose="02040503050406030204" pitchFamily="18" charset="0"/>
+                                                          </a:rPr>
+                                                          <m:t>−0.1211</m:t>
+                                                        </m:r>
+                                                      </m:e>
+                                                      <m:e>
+                                                        <m:r>
+                                                          <a:rPr lang="en-US" altLang="zh-TW" b="0" i="1" smtClean="0">
+                                                            <a:latin typeface="Cambria Math" panose="02040503050406030204" pitchFamily="18" charset="0"/>
+                                                          </a:rPr>
+                                                          <m:t>0.8174</m:t>
+                                                        </m:r>
+                                                      </m:e>
+                                                      <m:e>
+                                                        <m:r>
+                                                          <a:rPr lang="en-US" altLang="zh-TW" b="0" i="1" smtClean="0">
+                                                            <a:latin typeface="Cambria Math" panose="02040503050406030204" pitchFamily="18" charset="0"/>
+                                                          </a:rPr>
+                                                          <m:t>−0.1098</m:t>
+                                                        </m:r>
+                                                      </m:e>
+                                                    </m:mr>
+                                                  </m:m>
+                                                </m:e>
+                                              </m:mr>
+                                            </m:m>
+                                          </m:e>
+                                        </m:mr>
+                                        <m:mr>
+                                          <m:e>
+                                            <m:m>
+                                              <m:mPr>
+                                                <m:mcs>
+                                                  <m:mc>
+                                                    <m:mcPr>
+                                                      <m:count m:val="3"/>
+                                                      <m:mcJc m:val="center"/>
+                                                    </m:mcPr>
+                                                  </m:mc>
+                                                </m:mcs>
+                                                <m:ctrlPr>
+                                                  <a:rPr lang="en-US" altLang="zh-TW" b="0" i="1" smtClean="0">
+                                                    <a:latin typeface="Cambria Math" panose="02040503050406030204" pitchFamily="18" charset="0"/>
+                                                  </a:rPr>
+                                                </m:ctrlPr>
+                                              </m:mPr>
+                                              <m:mr>
+                                                <m:e>
+                                                  <m:r>
+                                                    <m:rPr>
+                                                      <m:brk m:alnAt="7"/>
+                                                    </m:rPr>
+                                                    <a:rPr lang="en-US" altLang="zh-TW" b="0" i="1" smtClean="0">
+                                                      <a:latin typeface="Cambria Math" panose="02040503050406030204" pitchFamily="18" charset="0"/>
+                                                    </a:rPr>
+                                                    <m:t>−0.1973</m:t>
+                                                  </m:r>
+                                                </m:e>
+                                                <m:e>
+                                                  <m:r>
+                                                    <a:rPr lang="en-US" altLang="zh-TW" b="0" i="1" smtClean="0">
+                                                      <a:latin typeface="Cambria Math" panose="02040503050406030204" pitchFamily="18" charset="0"/>
+                                                    </a:rPr>
+                                                    <m:t>−0.1254</m:t>
+                                                  </m:r>
+                                                </m:e>
+                                                <m:e>
+                                                  <m:m>
+                                                    <m:mPr>
+                                                      <m:mcs>
+                                                        <m:mc>
+                                                          <m:mcPr>
+                                                            <m:count m:val="3"/>
+                                                            <m:mcJc m:val="center"/>
+                                                          </m:mcPr>
+                                                        </m:mc>
+                                                      </m:mcs>
+                                                      <m:ctrlPr>
+                                                        <a:rPr lang="en-US" altLang="zh-TW" b="0" i="1" smtClean="0">
+                                                          <a:latin typeface="Cambria Math" panose="02040503050406030204" pitchFamily="18" charset="0"/>
+                                                        </a:rPr>
+                                                      </m:ctrlPr>
+                                                    </m:mPr>
+                                                    <m:mr>
+                                                      <m:e>
+                                                        <m:r>
+                                                          <m:rPr>
+                                                            <m:brk m:alnAt="7"/>
+                                                          </m:rPr>
+                                                          <a:rPr lang="en-US" altLang="zh-TW" b="0" i="1" smtClean="0">
+                                                            <a:latin typeface="Cambria Math" panose="02040503050406030204" pitchFamily="18" charset="0"/>
+                                                          </a:rPr>
+                                                          <m:t>−0.1968</m:t>
+                                                        </m:r>
+                                                      </m:e>
+                                                      <m:e>
+                                                        <m:r>
+                                                          <a:rPr lang="en-US" altLang="zh-TW" b="0" i="1" smtClean="0">
+                                                            <a:latin typeface="Cambria Math" panose="02040503050406030204" pitchFamily="18" charset="0"/>
+                                                          </a:rPr>
+                                                          <m:t>−0.1234</m:t>
+                                                        </m:r>
+                                                      </m:e>
+                                                      <m:e>
+                                                        <m:r>
+                                                          <a:rPr lang="en-US" altLang="zh-TW" b="0" i="1" smtClean="0">
+                                                            <a:latin typeface="Cambria Math" panose="02040503050406030204" pitchFamily="18" charset="0"/>
+                                                          </a:rPr>
+                                                          <m:t>0.8277</m:t>
+                                                        </m:r>
+                                                      </m:e>
+                                                    </m:mr>
+                                                  </m:m>
+                                                </m:e>
+                                              </m:mr>
+                                            </m:m>
+                                          </m:e>
+                                        </m:mr>
+                                      </m:m>
+                                    </m:e>
+                                  </m:mr>
+                                </m:m>
+                              </m:e>
+                            </m:mr>
+                          </m:m>
+                        </m:e>
+                      </m:d>
+                    </m:oMath>
+                  </m:oMathPara>
+                </a14:m>
+                <a:endParaRPr lang="zh-TW" altLang="en-US" dirty="0"/>
+              </a:p>
+            </p:txBody>
+          </p:sp>
+        </mc:Choice>
+        <mc:Fallback>
+          <p:sp>
+            <p:nvSpPr>
+              <p:cNvPr id="16" name="文字方塊 15">
+                <a:extLst>
+                  <a:ext uri="{FF2B5EF4-FFF2-40B4-BE49-F238E27FC236}">
+                    <a16:creationId xmlns:a16="http://schemas.microsoft.com/office/drawing/2014/main" id="{3514A624-EDE9-40AF-BE57-A60AD18744E7}"/>
+                  </a:ext>
+                </a:extLst>
+              </p:cNvPr>
+              <p:cNvSpPr txBox="1">
+                <a:spLocks noRot="1" noChangeAspect="1" noMove="1" noResize="1" noEditPoints="1" noAdjustHandles="1" noChangeArrowheads="1" noChangeShapeType="1" noTextEdit="1"/>
+              </p:cNvSpPr>
+              <p:nvPr/>
+            </p:nvSpPr>
+            <p:spPr>
+              <a:xfrm>
+                <a:off x="4860789" y="981802"/>
+                <a:ext cx="7221144" cy="1511055"/>
+              </a:xfrm>
+              <a:prstGeom prst="rect">
+                <a:avLst/>
+              </a:prstGeom>
+              <a:blipFill>
+                <a:blip r:embed="rId10"/>
+                <a:stretch>
+                  <a:fillRect/>
+                </a:stretch>
+              </a:blipFill>
+            </p:spPr>
+            <p:txBody>
+              <a:bodyPr/>
+              <a:lstStyle/>
+              <a:p>
+                <a:r>
+                  <a:rPr lang="zh-TW" altLang="en-US">
+                    <a:noFill/>
+                  </a:rPr>
+                  <a:t> </a:t>
+                </a:r>
+              </a:p>
+            </p:txBody>
+          </p:sp>
+        </mc:Fallback>
+      </mc:AlternateContent>
+      <mc:AlternateContent xmlns:mc="http://schemas.openxmlformats.org/markup-compatibility/2006">
+        <mc:Choice xmlns:a14="http://schemas.microsoft.com/office/drawing/2010/main" Requires="a14">
+          <p:sp>
+            <p:nvSpPr>
+              <p:cNvPr id="17" name="文字方塊 16">
+                <a:extLst>
+                  <a:ext uri="{FF2B5EF4-FFF2-40B4-BE49-F238E27FC236}">
+                    <a16:creationId xmlns:a16="http://schemas.microsoft.com/office/drawing/2014/main" id="{F6595C69-CAA3-4008-80B0-FCBDF01775AC}"/>
+                  </a:ext>
+                </a:extLst>
+              </p:cNvPr>
+              <p:cNvSpPr txBox="1"/>
+              <p:nvPr/>
+            </p:nvSpPr>
+            <p:spPr>
+              <a:xfrm>
+                <a:off x="5177326" y="2620894"/>
+                <a:ext cx="1417824" cy="291234"/>
+              </a:xfrm>
+              <a:prstGeom prst="rect">
+                <a:avLst/>
+              </a:prstGeom>
+              <a:noFill/>
+            </p:spPr>
+            <p:txBody>
+              <a:bodyPr wrap="none" lIns="0" tIns="0" rIns="0" bIns="0" rtlCol="0">
+                <a:spAutoFit/>
+              </a:bodyPr>
+              <a:lstStyle/>
+              <a:p>
+                <a14:m>
+                  <m:oMathPara xmlns:m="http://schemas.openxmlformats.org/officeDocument/2006/math">
+                    <m:oMathParaPr>
+                      <m:jc m:val="centerGroup"/>
+                    </m:oMathParaPr>
+                    <m:oMath xmlns:m="http://schemas.openxmlformats.org/officeDocument/2006/math">
+                      <m:acc>
+                        <m:accPr>
+                          <m:chr m:val="̂"/>
+                          <m:ctrlPr>
+                            <a:rPr lang="zh-TW" altLang="en-US" i="1" smtClean="0">
+                              <a:latin typeface="Cambria Math" panose="02040503050406030204" pitchFamily="18" charset="0"/>
+                            </a:rPr>
+                          </m:ctrlPr>
+                        </m:accPr>
+                        <m:e>
+                          <m:r>
+                            <a:rPr lang="en-US" altLang="zh-TW" i="1" smtClean="0">
+                              <a:latin typeface="Cambria Math" panose="02040503050406030204" pitchFamily="18" charset="0"/>
+                              <a:ea typeface="Cambria Math" panose="02040503050406030204" pitchFamily="18" charset="0"/>
+                            </a:rPr>
+                            <m:t>ℓ</m:t>
+                          </m:r>
+                        </m:e>
+                      </m:acc>
+                      <m:r>
+                        <a:rPr lang="en-US" altLang="zh-TW" b="0" i="1" smtClean="0">
+                          <a:latin typeface="Cambria Math" panose="02040503050406030204" pitchFamily="18" charset="0"/>
+                        </a:rPr>
+                        <m:t>=857.3 </m:t>
+                      </m:r>
+                      <m:r>
+                        <a:rPr lang="en-US" altLang="zh-TW" b="0" i="1" smtClean="0">
+                          <a:latin typeface="Cambria Math" panose="02040503050406030204" pitchFamily="18" charset="0"/>
+                        </a:rPr>
+                        <m:t>𝑢𝑚</m:t>
+                      </m:r>
+                    </m:oMath>
+                  </m:oMathPara>
+                </a14:m>
+                <a:endParaRPr lang="zh-TW" altLang="en-US" dirty="0"/>
+              </a:p>
+            </p:txBody>
+          </p:sp>
+        </mc:Choice>
+        <mc:Fallback>
+          <p:sp>
+            <p:nvSpPr>
+              <p:cNvPr id="17" name="文字方塊 16">
+                <a:extLst>
+                  <a:ext uri="{FF2B5EF4-FFF2-40B4-BE49-F238E27FC236}">
+                    <a16:creationId xmlns:a16="http://schemas.microsoft.com/office/drawing/2014/main" id="{F6595C69-CAA3-4008-80B0-FCBDF01775AC}"/>
+                  </a:ext>
+                </a:extLst>
+              </p:cNvPr>
+              <p:cNvSpPr txBox="1">
+                <a:spLocks noRot="1" noChangeAspect="1" noMove="1" noResize="1" noEditPoints="1" noAdjustHandles="1" noChangeArrowheads="1" noChangeShapeType="1" noTextEdit="1"/>
+              </p:cNvSpPr>
+              <p:nvPr/>
+            </p:nvSpPr>
+            <p:spPr>
+              <a:xfrm>
+                <a:off x="5177326" y="2620894"/>
+                <a:ext cx="1417824" cy="291234"/>
+              </a:xfrm>
+              <a:prstGeom prst="rect">
+                <a:avLst/>
+              </a:prstGeom>
+              <a:blipFill>
+                <a:blip r:embed="rId11"/>
+                <a:stretch>
+                  <a:fillRect l="-3863" t="-18750" r="-2146" b="-8333"/>
+                </a:stretch>
+              </a:blipFill>
+            </p:spPr>
+            <p:txBody>
+              <a:bodyPr/>
+              <a:lstStyle/>
+              <a:p>
+                <a:r>
+                  <a:rPr lang="zh-TW" altLang="en-US">
+                    <a:noFill/>
+                  </a:rPr>
+                  <a:t> </a:t>
+                </a:r>
+              </a:p>
+            </p:txBody>
+          </p:sp>
+        </mc:Fallback>
+      </mc:AlternateContent>
+      <mc:AlternateContent xmlns:mc="http://schemas.openxmlformats.org/markup-compatibility/2006">
+        <mc:Choice xmlns:a14="http://schemas.microsoft.com/office/drawing/2010/main" Requires="a14">
+          <p:sp>
+            <p:nvSpPr>
+              <p:cNvPr id="18" name="文字方塊 17">
+                <a:extLst>
+                  <a:ext uri="{FF2B5EF4-FFF2-40B4-BE49-F238E27FC236}">
+                    <a16:creationId xmlns:a16="http://schemas.microsoft.com/office/drawing/2014/main" id="{134DFDD4-5BF9-44FC-9723-CF4F06DE5453}"/>
+                  </a:ext>
+                </a:extLst>
+              </p:cNvPr>
+              <p:cNvSpPr txBox="1"/>
+              <p:nvPr/>
+            </p:nvSpPr>
+            <p:spPr>
+              <a:xfrm>
+                <a:off x="7341990" y="2631296"/>
+                <a:ext cx="2072490" cy="305340"/>
+              </a:xfrm>
+              <a:prstGeom prst="rect">
+                <a:avLst/>
+              </a:prstGeom>
+              <a:noFill/>
+            </p:spPr>
+            <p:txBody>
+              <a:bodyPr wrap="none" lIns="0" tIns="0" rIns="0" bIns="0" rtlCol="0">
+                <a:spAutoFit/>
+              </a:bodyPr>
+              <a:lstStyle/>
+              <a:p>
+                <a14:m>
+                  <m:oMathPara xmlns:m="http://schemas.openxmlformats.org/officeDocument/2006/math">
+                    <m:oMathParaPr>
+                      <m:jc m:val="centerGroup"/>
+                    </m:oMathParaPr>
+                    <m:oMath xmlns:m="http://schemas.openxmlformats.org/officeDocument/2006/math">
+                      <m:sPre>
+                        <m:sPrePr>
+                          <m:ctrlPr>
+                            <a:rPr lang="en-US" altLang="zh-TW" i="1" smtClean="0">
+                              <a:latin typeface="Cambria Math" panose="02040503050406030204" pitchFamily="18" charset="0"/>
+                            </a:rPr>
+                          </m:ctrlPr>
+                        </m:sPrePr>
+                        <m:sub/>
+                        <m:sup>
+                          <m:r>
+                            <a:rPr lang="en-US" altLang="zh-TW" b="0" i="1" smtClean="0">
+                              <a:latin typeface="Cambria Math" panose="02040503050406030204" pitchFamily="18" charset="0"/>
+                            </a:rPr>
+                            <m:t>𝐵</m:t>
+                          </m:r>
+                        </m:sup>
+                        <m:e>
+                          <m:sSub>
+                            <m:sSubPr>
+                              <m:ctrlPr>
+                                <a:rPr lang="en-US" altLang="zh-TW" i="1" smtClean="0">
+                                  <a:latin typeface="Cambria Math" panose="02040503050406030204" pitchFamily="18" charset="0"/>
+                                </a:rPr>
+                              </m:ctrlPr>
+                            </m:sSubPr>
+                            <m:e>
+                              <m:acc>
+                                <m:accPr>
+                                  <m:chr m:val="̂"/>
+                                  <m:ctrlPr>
+                                    <a:rPr lang="en-US" altLang="zh-TW" i="1" smtClean="0">
+                                      <a:latin typeface="Cambria Math" panose="02040503050406030204" pitchFamily="18" charset="0"/>
+                                    </a:rPr>
+                                  </m:ctrlPr>
+                                </m:accPr>
+                                <m:e>
+                                  <m:r>
+                                    <a:rPr lang="en-US" altLang="zh-TW" b="0" i="1" smtClean="0">
+                                      <a:latin typeface="Cambria Math" panose="02040503050406030204" pitchFamily="18" charset="0"/>
+                                    </a:rPr>
+                                    <m:t>𝑔</m:t>
+                                  </m:r>
+                                </m:e>
+                              </m:acc>
+                            </m:e>
+                            <m:sub>
+                              <m:r>
+                                <a:rPr lang="en-US" altLang="zh-TW" b="0" i="1" smtClean="0">
+                                  <a:latin typeface="Cambria Math" panose="02040503050406030204" pitchFamily="18" charset="0"/>
+                                </a:rPr>
+                                <m:t>𝐼</m:t>
+                              </m:r>
+                            </m:sub>
+                          </m:sSub>
+                          <m:r>
+                            <a:rPr lang="en-US" altLang="zh-TW" b="0" i="1" smtClean="0">
+                              <a:latin typeface="Cambria Math" panose="02040503050406030204" pitchFamily="18" charset="0"/>
+                            </a:rPr>
+                            <m:t>=9.6603 </m:t>
+                          </m:r>
+                          <m:r>
+                            <a:rPr lang="en-US" altLang="zh-TW" b="0" i="1" smtClean="0">
+                              <a:latin typeface="Cambria Math" panose="02040503050406030204" pitchFamily="18" charset="0"/>
+                            </a:rPr>
+                            <m:t>𝑚𝑇</m:t>
+                          </m:r>
+                          <m:r>
+                            <a:rPr lang="en-US" altLang="zh-TW" b="0" i="1" smtClean="0">
+                              <a:latin typeface="Cambria Math" panose="02040503050406030204" pitchFamily="18" charset="0"/>
+                            </a:rPr>
+                            <m:t>/</m:t>
+                          </m:r>
+                          <m:r>
+                            <a:rPr lang="en-US" altLang="zh-TW" b="0" i="1" smtClean="0">
+                              <a:latin typeface="Cambria Math" panose="02040503050406030204" pitchFamily="18" charset="0"/>
+                            </a:rPr>
+                            <m:t>𝐴</m:t>
+                          </m:r>
+                        </m:e>
+                      </m:sPre>
+                    </m:oMath>
+                  </m:oMathPara>
+                </a14:m>
+                <a:endParaRPr lang="zh-TW" altLang="en-US" dirty="0"/>
+              </a:p>
+            </p:txBody>
+          </p:sp>
+        </mc:Choice>
+        <mc:Fallback>
+          <p:sp>
+            <p:nvSpPr>
+              <p:cNvPr id="18" name="文字方塊 17">
+                <a:extLst>
+                  <a:ext uri="{FF2B5EF4-FFF2-40B4-BE49-F238E27FC236}">
+                    <a16:creationId xmlns:a16="http://schemas.microsoft.com/office/drawing/2014/main" id="{134DFDD4-5BF9-44FC-9723-CF4F06DE5453}"/>
+                  </a:ext>
+                </a:extLst>
+              </p:cNvPr>
+              <p:cNvSpPr txBox="1">
+                <a:spLocks noRot="1" noChangeAspect="1" noMove="1" noResize="1" noEditPoints="1" noAdjustHandles="1" noChangeArrowheads="1" noChangeShapeType="1" noTextEdit="1"/>
+              </p:cNvSpPr>
+              <p:nvPr/>
+            </p:nvSpPr>
+            <p:spPr>
+              <a:xfrm>
+                <a:off x="7341990" y="2631296"/>
+                <a:ext cx="2072490" cy="305340"/>
+              </a:xfrm>
+              <a:prstGeom prst="rect">
+                <a:avLst/>
+              </a:prstGeom>
+              <a:blipFill>
+                <a:blip r:embed="rId12"/>
+                <a:stretch>
+                  <a:fillRect t="-16000" r="-2647" b="-30000"/>
+                </a:stretch>
+              </a:blipFill>
+            </p:spPr>
+            <p:txBody>
+              <a:bodyPr/>
+              <a:lstStyle/>
+              <a:p>
+                <a:r>
+                  <a:rPr lang="zh-TW" altLang="en-US">
+                    <a:noFill/>
+                  </a:rPr>
+                  <a:t> </a:t>
+                </a:r>
+              </a:p>
+            </p:txBody>
+          </p:sp>
+        </mc:Fallback>
+      </mc:AlternateContent>
+      <p:pic>
+        <p:nvPicPr>
+          <p:cNvPr id="6" name="圖片 5">
+            <a:extLst>
+              <a:ext uri="{FF2B5EF4-FFF2-40B4-BE49-F238E27FC236}">
+                <a16:creationId xmlns:a16="http://schemas.microsoft.com/office/drawing/2014/main" id="{43B7724E-A0E1-4270-9B71-2AA83F6B2C33}"/>
+              </a:ext>
+            </a:extLst>
+          </p:cNvPr>
+          <p:cNvPicPr>
+            <a:picLocks noChangeAspect="1"/>
+          </p:cNvPicPr>
+          <p:nvPr/>
+        </p:nvPicPr>
+        <p:blipFill>
+          <a:blip r:embed="rId13">
+            <a:extLst>
+              <a:ext uri="{28A0092B-C50C-407E-A947-70E740481C1C}">
+                <a14:useLocalDpi xmlns:a14="http://schemas.microsoft.com/office/drawing/2010/main" val="0"/>
+              </a:ext>
+            </a:extLst>
+          </a:blip>
+          <a:stretch>
+            <a:fillRect/>
+          </a:stretch>
+        </p:blipFill>
+        <p:spPr>
+          <a:xfrm>
+            <a:off x="215157" y="838430"/>
+            <a:ext cx="4486533" cy="4281356"/>
+          </a:xfrm>
+          <a:prstGeom prst="rect">
+            <a:avLst/>
+          </a:prstGeom>
+        </p:spPr>
+      </p:pic>
+    </p:spTree>
+    <p:extLst>
+      <p:ext uri="{BB962C8B-B14F-4D97-AF65-F5344CB8AC3E}">
+        <p14:creationId xmlns:p14="http://schemas.microsoft.com/office/powerpoint/2010/main" val="4278317432"/>
+      </p:ext>
+    </p:extLst>
+  </p:cSld>
+  <p:clrMapOvr>
+    <a:masterClrMapping/>
+  </p:clrMapOvr>
+</p:sld>
+</file>
+
 <file path=ppt/theme/theme1.xml><?xml version="1.0" encoding="utf-8"?>
 <a:theme xmlns:a="http://schemas.openxmlformats.org/drawingml/2006/main" name="Office 佈景主題">
   <a:themeElements>

--- a/magnetic_sim/ANSYS/main/figures/Paper_fig_V3.pptx
+++ b/magnetic_sim/ANSYS/main/figures/Paper_fig_V3.pptx
@@ -268,7 +268,7 @@
           <a:p>
             <a:fld id="{16D42070-5DAD-4E7E-A6F8-25E560BC7BBC}" type="datetimeFigureOut">
               <a:rPr lang="zh-TW" altLang="en-US" smtClean="0"/>
-              <a:t>2026/8/3</a:t>
+              <a:t>2026/8/10</a:t>
             </a:fld>
             <a:endParaRPr lang="zh-TW" altLang="en-US"/>
           </a:p>
@@ -466,7 +466,7 @@
           <a:p>
             <a:fld id="{16D42070-5DAD-4E7E-A6F8-25E560BC7BBC}" type="datetimeFigureOut">
               <a:rPr lang="zh-TW" altLang="en-US" smtClean="0"/>
-              <a:t>2026/8/3</a:t>
+              <a:t>2026/8/10</a:t>
             </a:fld>
             <a:endParaRPr lang="zh-TW" altLang="en-US"/>
           </a:p>
@@ -674,7 +674,7 @@
           <a:p>
             <a:fld id="{16D42070-5DAD-4E7E-A6F8-25E560BC7BBC}" type="datetimeFigureOut">
               <a:rPr lang="zh-TW" altLang="en-US" smtClean="0"/>
-              <a:t>2026/8/3</a:t>
+              <a:t>2026/8/10</a:t>
             </a:fld>
             <a:endParaRPr lang="zh-TW" altLang="en-US"/>
           </a:p>
@@ -872,7 +872,7 @@
           <a:p>
             <a:fld id="{16D42070-5DAD-4E7E-A6F8-25E560BC7BBC}" type="datetimeFigureOut">
               <a:rPr lang="zh-TW" altLang="en-US" smtClean="0"/>
-              <a:t>2026/8/3</a:t>
+              <a:t>2026/8/10</a:t>
             </a:fld>
             <a:endParaRPr lang="zh-TW" altLang="en-US"/>
           </a:p>
@@ -1147,7 +1147,7 @@
           <a:p>
             <a:fld id="{16D42070-5DAD-4E7E-A6F8-25E560BC7BBC}" type="datetimeFigureOut">
               <a:rPr lang="zh-TW" altLang="en-US" smtClean="0"/>
-              <a:t>2026/8/3</a:t>
+              <a:t>2026/8/10</a:t>
             </a:fld>
             <a:endParaRPr lang="zh-TW" altLang="en-US"/>
           </a:p>
@@ -1412,7 +1412,7 @@
           <a:p>
             <a:fld id="{16D42070-5DAD-4E7E-A6F8-25E560BC7BBC}" type="datetimeFigureOut">
               <a:rPr lang="zh-TW" altLang="en-US" smtClean="0"/>
-              <a:t>2026/8/3</a:t>
+              <a:t>2026/8/10</a:t>
             </a:fld>
             <a:endParaRPr lang="zh-TW" altLang="en-US"/>
           </a:p>
@@ -1824,7 +1824,7 @@
           <a:p>
             <a:fld id="{16D42070-5DAD-4E7E-A6F8-25E560BC7BBC}" type="datetimeFigureOut">
               <a:rPr lang="zh-TW" altLang="en-US" smtClean="0"/>
-              <a:t>2026/8/3</a:t>
+              <a:t>2026/8/10</a:t>
             </a:fld>
             <a:endParaRPr lang="zh-TW" altLang="en-US"/>
           </a:p>
@@ -1965,7 +1965,7 @@
           <a:p>
             <a:fld id="{16D42070-5DAD-4E7E-A6F8-25E560BC7BBC}" type="datetimeFigureOut">
               <a:rPr lang="zh-TW" altLang="en-US" smtClean="0"/>
-              <a:t>2026/8/3</a:t>
+              <a:t>2026/8/10</a:t>
             </a:fld>
             <a:endParaRPr lang="zh-TW" altLang="en-US"/>
           </a:p>
@@ -2078,7 +2078,7 @@
           <a:p>
             <a:fld id="{16D42070-5DAD-4E7E-A6F8-25E560BC7BBC}" type="datetimeFigureOut">
               <a:rPr lang="zh-TW" altLang="en-US" smtClean="0"/>
-              <a:t>2026/8/3</a:t>
+              <a:t>2026/8/10</a:t>
             </a:fld>
             <a:endParaRPr lang="zh-TW" altLang="en-US"/>
           </a:p>
@@ -2389,7 +2389,7 @@
           <a:p>
             <a:fld id="{16D42070-5DAD-4E7E-A6F8-25E560BC7BBC}" type="datetimeFigureOut">
               <a:rPr lang="zh-TW" altLang="en-US" smtClean="0"/>
-              <a:t>2026/8/3</a:t>
+              <a:t>2026/8/10</a:t>
             </a:fld>
             <a:endParaRPr lang="zh-TW" altLang="en-US"/>
           </a:p>
@@ -2677,7 +2677,7 @@
           <a:p>
             <a:fld id="{16D42070-5DAD-4E7E-A6F8-25E560BC7BBC}" type="datetimeFigureOut">
               <a:rPr lang="zh-TW" altLang="en-US" smtClean="0"/>
-              <a:t>2026/8/3</a:t>
+              <a:t>2026/8/10</a:t>
             </a:fld>
             <a:endParaRPr lang="zh-TW" altLang="en-US"/>
           </a:p>
@@ -2918,7 +2918,7 @@
           <a:p>
             <a:fld id="{16D42070-5DAD-4E7E-A6F8-25E560BC7BBC}" type="datetimeFigureOut">
               <a:rPr lang="zh-TW" altLang="en-US" smtClean="0"/>
-              <a:t>2026/8/3</a:t>
+              <a:t>2026/8/10</a:t>
             </a:fld>
             <a:endParaRPr lang="zh-TW" altLang="en-US"/>
           </a:p>
@@ -3536,8 +3536,8 @@
           </a:p>
         </p:txBody>
       </p:sp>
-      <mc:AlternateContent xmlns:mc="http://schemas.openxmlformats.org/markup-compatibility/2006">
-        <mc:Choice xmlns:a14="http://schemas.microsoft.com/office/drawing/2010/main" Requires="a14">
+      <mc:AlternateContent xmlns:mc="http://schemas.openxmlformats.org/markup-compatibility/2006" xmlns:a14="http://schemas.microsoft.com/office/drawing/2010/main">
+        <mc:Choice Requires="a14">
           <p:sp>
             <p:nvSpPr>
               <p:cNvPr id="9" name="文字方塊 8">
@@ -3984,984 +3984,7 @@
                       <a:rPr lang="en-US" altLang="zh-TW" b="0" i="1" smtClean="0">
                         <a:latin typeface="Cambria Math" panose="02040503050406030204" pitchFamily="18" charset="0"/>
                       </a:rPr>
-                      <m:t>=</m:t>
-                    </m:r>
-                    <m:r>
-                      <a:rPr lang="en-US" altLang="zh-TW" b="0" i="1" smtClean="0">
-                        <a:latin typeface="Cambria Math" panose="02040503050406030204" pitchFamily="18" charset="0"/>
-                      </a:rPr>
-                      <m:t>3.16</m:t>
-                    </m:r>
-                    <m:r>
-                      <a:rPr lang="en-US" altLang="zh-TW" b="0" i="1" smtClean="0">
-                        <a:latin typeface="Cambria Math" panose="02040503050406030204" pitchFamily="18" charset="0"/>
-                      </a:rPr>
-                      <m:t>%</m:t>
-                    </m:r>
-                    <m:r>
-                      <m:rPr>
-                        <m:nor/>
-                      </m:rPr>
-                      <a:rPr lang="en-US" altLang="zh-TW" dirty="0">
-                        <a:ea typeface="Cambria Math" panose="02040503050406030204" pitchFamily="18" charset="0"/>
-                      </a:rPr>
-                      <m:t>(</m:t>
-                    </m:r>
-                    <m:r>
-                      <m:rPr>
-                        <m:nor/>
-                      </m:rPr>
-                      <a:rPr lang="en-US" altLang="zh-TW" dirty="0">
-                        <a:ea typeface="Cambria Math" panose="02040503050406030204" pitchFamily="18" charset="0"/>
-                      </a:rPr>
-                      <m:t>Single</m:t>
-                    </m:r>
-                    <m:r>
-                      <m:rPr>
-                        <m:nor/>
-                      </m:rPr>
-                      <a:rPr lang="en-US" altLang="zh-TW" dirty="0">
-                        <a:ea typeface="Cambria Math" panose="02040503050406030204" pitchFamily="18" charset="0"/>
-                      </a:rPr>
-                      <m:t> </m:t>
-                    </m:r>
-                    <m:r>
-                      <m:rPr>
-                        <m:nor/>
-                      </m:rPr>
-                      <a:rPr lang="en-US" altLang="zh-TW" dirty="0">
-                        <a:ea typeface="Cambria Math" panose="02040503050406030204" pitchFamily="18" charset="0"/>
-                      </a:rPr>
-                      <m:t>parameter</m:t>
-                    </m:r>
-                    <m:r>
-                      <m:rPr>
-                        <m:nor/>
-                      </m:rPr>
-                      <a:rPr lang="en-US" altLang="zh-TW" dirty="0">
-                        <a:ea typeface="Cambria Math" panose="02040503050406030204" pitchFamily="18" charset="0"/>
-                      </a:rPr>
-                      <m:t>)</m:t>
-                    </m:r>
-                  </m:oMath>
-                </a14:m>
-                <a:endParaRPr lang="en-US" altLang="zh-TW" dirty="0">
-                  <a:ea typeface="Cambria Math" panose="02040503050406030204" pitchFamily="18" charset="0"/>
-                </a:endParaRPr>
-              </a:p>
-              <a:p>
-                <a:pPr marL="742950" lvl="1" indent="-285750">
-                  <a:buFont typeface="Wingdings" panose="05000000000000000000" pitchFamily="2" charset="2"/>
-                  <a:buChar char="Ø"/>
-                </a:pPr>
-                <a:endParaRPr lang="en-US" altLang="zh-TW" b="0" dirty="0"/>
-              </a:p>
-              <a:p>
-                <a:pPr marL="742950" lvl="1" indent="-285750">
-                  <a:buFont typeface="Wingdings" panose="05000000000000000000" pitchFamily="2" charset="2"/>
-                  <a:buChar char="Ø"/>
-                </a:pPr>
-                <a14:m>
-                  <m:oMath xmlns:m="http://schemas.openxmlformats.org/officeDocument/2006/math">
-                    <m:r>
-                      <m:rPr>
-                        <m:sty m:val="p"/>
-                      </m:rPr>
-                      <a:rPr lang="en-US" altLang="zh-TW" i="1" dirty="0" smtClean="0">
-                        <a:latin typeface="Cambria Math" panose="02040503050406030204" pitchFamily="18" charset="0"/>
-                        <a:ea typeface="Cambria Math" panose="02040503050406030204" pitchFamily="18" charset="0"/>
-                      </a:rPr>
-                      <m:t>R</m:t>
-                    </m:r>
-                    <m:r>
-                      <m:rPr>
-                        <m:sty m:val="p"/>
-                      </m:rPr>
-                      <a:rPr lang="en-US" altLang="zh-TW" i="1" dirty="0" smtClean="0">
-                        <a:latin typeface="Cambria Math" panose="02040503050406030204" pitchFamily="18" charset="0"/>
-                        <a:ea typeface="Cambria Math" panose="02040503050406030204" pitchFamily="18" charset="0"/>
-                      </a:rPr>
-                      <m:t>M</m:t>
-                    </m:r>
-                    <m:r>
-                      <m:rPr>
-                        <m:sty m:val="p"/>
-                      </m:rPr>
-                      <a:rPr lang="en-US" altLang="zh-TW" i="1" dirty="0">
-                        <a:latin typeface="Cambria Math" panose="02040503050406030204" pitchFamily="18" charset="0"/>
-                        <a:ea typeface="Cambria Math" panose="02040503050406030204" pitchFamily="18" charset="0"/>
-                      </a:rPr>
-                      <m:t>S</m:t>
-                    </m:r>
-                    <m:r>
-                      <m:rPr>
-                        <m:sty m:val="p"/>
-                      </m:rPr>
-                      <a:rPr lang="en-US" altLang="zh-TW" i="1" dirty="0" smtClean="0">
-                        <a:latin typeface="Cambria Math" panose="02040503050406030204" pitchFamily="18" charset="0"/>
-                        <a:ea typeface="Cambria Math" panose="02040503050406030204" pitchFamily="18" charset="0"/>
-                      </a:rPr>
-                      <m:t>P</m:t>
-                    </m:r>
-                    <m:r>
-                      <m:rPr>
-                        <m:sty m:val="p"/>
-                      </m:rPr>
-                      <a:rPr lang="en-US" altLang="zh-TW" i="1" dirty="0">
-                        <a:latin typeface="Cambria Math" panose="02040503050406030204" pitchFamily="18" charset="0"/>
-                        <a:ea typeface="Cambria Math" panose="02040503050406030204" pitchFamily="18" charset="0"/>
-                      </a:rPr>
-                      <m:t>E</m:t>
-                    </m:r>
-                    <m:r>
-                      <a:rPr lang="en-US" altLang="zh-TW" i="1" dirty="0" smtClean="0">
-                        <a:latin typeface="Cambria Math" panose="02040503050406030204" pitchFamily="18" charset="0"/>
-                        <a:ea typeface="Cambria Math" panose="02040503050406030204" pitchFamily="18" charset="0"/>
-                      </a:rPr>
-                      <m:t>=</m:t>
-                    </m:r>
-                    <m:rad>
-                      <m:radPr>
-                        <m:degHide m:val="on"/>
-                        <m:ctrlPr>
-                          <a:rPr lang="en-US" altLang="zh-TW" b="0" i="1" smtClean="0">
-                            <a:latin typeface="Cambria Math" panose="02040503050406030204" pitchFamily="18" charset="0"/>
-                          </a:rPr>
-                        </m:ctrlPr>
-                      </m:radPr>
-                      <m:deg/>
-                      <m:e>
-                        <m:f>
-                          <m:fPr>
-                            <m:ctrlPr>
-                              <a:rPr lang="en-US" altLang="zh-TW" b="0" i="1" smtClean="0">
-                                <a:latin typeface="Cambria Math" panose="02040503050406030204" pitchFamily="18" charset="0"/>
-                              </a:rPr>
-                            </m:ctrlPr>
-                          </m:fPr>
-                          <m:num>
-                            <m:nary>
-                              <m:naryPr>
-                                <m:chr m:val="∑"/>
-                                <m:subHide m:val="on"/>
-                                <m:supHide m:val="on"/>
-                                <m:ctrlPr>
-                                  <a:rPr lang="en-US" altLang="zh-TW" b="0" i="1" smtClean="0">
-                                    <a:latin typeface="Cambria Math" panose="02040503050406030204" pitchFamily="18" charset="0"/>
-                                  </a:rPr>
-                                </m:ctrlPr>
-                              </m:naryPr>
-                              <m:sub/>
-                              <m:sup/>
-                              <m:e>
-                                <m:sSup>
-                                  <m:sSupPr>
-                                    <m:ctrlPr>
-                                      <a:rPr lang="en-US" altLang="zh-TW" b="0" i="1" smtClean="0">
-                                        <a:latin typeface="Cambria Math" panose="02040503050406030204" pitchFamily="18" charset="0"/>
-                                      </a:rPr>
-                                    </m:ctrlPr>
-                                  </m:sSupPr>
-                                  <m:e>
-                                    <m:d>
-                                      <m:dPr>
-                                        <m:begChr m:val="‖"/>
-                                        <m:endChr m:val="‖"/>
-                                        <m:ctrlPr>
-                                          <a:rPr lang="en-US" altLang="zh-TW" b="0" i="1" smtClean="0">
-                                            <a:latin typeface="Cambria Math" panose="02040503050406030204" pitchFamily="18" charset="0"/>
-                                          </a:rPr>
-                                        </m:ctrlPr>
-                                      </m:dPr>
-                                      <m:e>
-                                        <m:sSub>
-                                          <m:sSubPr>
-                                            <m:ctrlPr>
-                                              <a:rPr lang="en-US" altLang="zh-TW" b="0" i="1" smtClean="0">
-                                                <a:latin typeface="Cambria Math" panose="02040503050406030204" pitchFamily="18" charset="0"/>
-                                              </a:rPr>
-                                            </m:ctrlPr>
-                                          </m:sSubPr>
-                                          <m:e>
-                                            <m:r>
-                                              <a:rPr lang="en-US" altLang="zh-TW" b="0" i="1" smtClean="0">
-                                                <a:latin typeface="Cambria Math" panose="02040503050406030204" pitchFamily="18" charset="0"/>
-                                              </a:rPr>
-                                              <m:t>𝑏</m:t>
-                                            </m:r>
-                                          </m:e>
-                                          <m:sub>
-                                            <m:r>
-                                              <a:rPr lang="en-US" altLang="zh-TW" b="0" i="1" smtClean="0">
-                                                <a:latin typeface="Cambria Math" panose="02040503050406030204" pitchFamily="18" charset="0"/>
-                                              </a:rPr>
-                                              <m:t>𝐹𝐸𝑀</m:t>
-                                            </m:r>
-                                          </m:sub>
-                                        </m:sSub>
-                                        <m:r>
-                                          <a:rPr lang="en-US" altLang="zh-TW" b="0" i="1" smtClean="0">
-                                            <a:latin typeface="Cambria Math" panose="02040503050406030204" pitchFamily="18" charset="0"/>
-                                          </a:rPr>
-                                          <m:t>−</m:t>
-                                        </m:r>
-                                        <m:sSub>
-                                          <m:sSubPr>
-                                            <m:ctrlPr>
-                                              <a:rPr lang="en-US" altLang="zh-TW" i="1">
-                                                <a:latin typeface="Cambria Math" panose="02040503050406030204" pitchFamily="18" charset="0"/>
-                                                <a:ea typeface="Cambria Math" panose="02040503050406030204" pitchFamily="18" charset="0"/>
-                                              </a:rPr>
-                                            </m:ctrlPr>
-                                          </m:sSubPr>
-                                          <m:e>
-                                            <m:r>
-                                              <a:rPr lang="en-US" altLang="zh-TW" i="1">
-                                                <a:latin typeface="Cambria Math" panose="02040503050406030204" pitchFamily="18" charset="0"/>
-                                                <a:ea typeface="Cambria Math" panose="02040503050406030204" pitchFamily="18" charset="0"/>
-                                              </a:rPr>
-                                              <m:t>𝑆</m:t>
-                                            </m:r>
-                                          </m:e>
-                                          <m:sub>
-                                            <m:r>
-                                              <a:rPr lang="en-US" altLang="zh-TW" i="1">
-                                                <a:latin typeface="Cambria Math" panose="02040503050406030204" pitchFamily="18" charset="0"/>
-                                                <a:ea typeface="Cambria Math" panose="02040503050406030204" pitchFamily="18" charset="0"/>
-                                              </a:rPr>
-                                              <m:t>𝑖</m:t>
-                                            </m:r>
-                                          </m:sub>
-                                        </m:sSub>
-                                        <m:sPre>
-                                          <m:sPrePr>
-                                            <m:ctrlPr>
-                                              <a:rPr lang="en-US" altLang="zh-TW" i="1">
-                                                <a:latin typeface="Cambria Math" panose="02040503050406030204" pitchFamily="18" charset="0"/>
-                                                <a:ea typeface="Cambria Math" panose="02040503050406030204" pitchFamily="18" charset="0"/>
-                                              </a:rPr>
-                                            </m:ctrlPr>
-                                          </m:sPrePr>
-                                          <m:sub/>
-                                          <m:sup>
-                                            <m:r>
-                                              <a:rPr lang="en-US" altLang="zh-TW" i="1">
-                                                <a:latin typeface="Cambria Math" panose="02040503050406030204" pitchFamily="18" charset="0"/>
-                                              </a:rPr>
-                                              <m:t>𝐵</m:t>
-                                            </m:r>
-                                          </m:sup>
-                                          <m:e>
-                                            <m:sSub>
-                                              <m:sSubPr>
-                                                <m:ctrlPr>
-                                                  <a:rPr lang="en-US" altLang="zh-TW" i="1">
-                                                    <a:latin typeface="Cambria Math" panose="02040503050406030204" pitchFamily="18" charset="0"/>
-                                                  </a:rPr>
-                                                </m:ctrlPr>
-                                              </m:sSubPr>
-                                              <m:e>
-                                                <m:acc>
-                                                  <m:accPr>
-                                                    <m:chr m:val="̂"/>
-                                                    <m:ctrlPr>
-                                                      <a:rPr lang="en-US" altLang="zh-TW" i="1">
-                                                        <a:latin typeface="Cambria Math" panose="02040503050406030204" pitchFamily="18" charset="0"/>
-                                                      </a:rPr>
-                                                    </m:ctrlPr>
-                                                  </m:accPr>
-                                                  <m:e>
-                                                    <m:r>
-                                                      <a:rPr lang="en-US" altLang="zh-TW" i="1">
-                                                        <a:latin typeface="Cambria Math" panose="02040503050406030204" pitchFamily="18" charset="0"/>
-                                                      </a:rPr>
-                                                      <m:t>𝑔</m:t>
-                                                    </m:r>
-                                                  </m:e>
-                                                </m:acc>
-                                              </m:e>
-                                              <m:sub>
-                                                <m:r>
-                                                  <a:rPr lang="en-US" altLang="zh-TW" i="1">
-                                                    <a:latin typeface="Cambria Math" panose="02040503050406030204" pitchFamily="18" charset="0"/>
-                                                  </a:rPr>
-                                                  <m:t>𝑉</m:t>
-                                                </m:r>
-                                              </m:sub>
-                                            </m:sSub>
-                                          </m:e>
-                                        </m:sPre>
-                                        <m:acc>
-                                          <m:accPr>
-                                            <m:chr m:val="̅"/>
-                                            <m:ctrlPr>
-                                              <a:rPr lang="zh-TW" altLang="en-US" i="1">
-                                                <a:latin typeface="Cambria Math" panose="02040503050406030204" pitchFamily="18" charset="0"/>
-                                              </a:rPr>
-                                            </m:ctrlPr>
-                                          </m:accPr>
-                                          <m:e>
-                                            <m:r>
-                                              <a:rPr lang="en-US" altLang="zh-TW" i="1">
-                                                <a:latin typeface="Cambria Math" panose="02040503050406030204" pitchFamily="18" charset="0"/>
-                                              </a:rPr>
-                                              <m:t>𝐷</m:t>
-                                            </m:r>
-                                          </m:e>
-                                        </m:acc>
-                                        <m:sSub>
-                                          <m:sSubPr>
-                                            <m:ctrlPr>
-                                              <a:rPr lang="en-US" altLang="zh-TW" i="1">
-                                                <a:latin typeface="Cambria Math" panose="02040503050406030204" pitchFamily="18" charset="0"/>
-                                              </a:rPr>
-                                            </m:ctrlPr>
-                                          </m:sSubPr>
-                                          <m:e>
-                                            <m:r>
-                                              <a:rPr lang="en-US" altLang="zh-TW" i="1">
-                                                <a:latin typeface="Cambria Math" panose="02040503050406030204" pitchFamily="18" charset="0"/>
-                                              </a:rPr>
-                                              <m:t>𝑉</m:t>
-                                            </m:r>
-                                          </m:e>
-                                          <m:sub>
-                                            <m:r>
-                                              <a:rPr lang="en-US" altLang="zh-TW" i="1">
-                                                <a:latin typeface="Cambria Math" panose="02040503050406030204" pitchFamily="18" charset="0"/>
-                                              </a:rPr>
-                                              <m:t>𝑗</m:t>
-                                            </m:r>
-                                          </m:sub>
-                                        </m:sSub>
-                                      </m:e>
-                                    </m:d>
-                                  </m:e>
-                                  <m:sup>
-                                    <m:r>
-                                      <a:rPr lang="en-US" altLang="zh-TW" b="0" i="1" smtClean="0">
-                                        <a:latin typeface="Cambria Math" panose="02040503050406030204" pitchFamily="18" charset="0"/>
-                                      </a:rPr>
-                                      <m:t>2</m:t>
-                                    </m:r>
-                                  </m:sup>
-                                </m:sSup>
-                              </m:e>
-                            </m:nary>
-                          </m:num>
-                          <m:den>
-                            <m:nary>
-                              <m:naryPr>
-                                <m:chr m:val="∑"/>
-                                <m:subHide m:val="on"/>
-                                <m:supHide m:val="on"/>
-                                <m:ctrlPr>
-                                  <a:rPr lang="en-US" altLang="zh-TW" b="0" i="1" smtClean="0">
-                                    <a:latin typeface="Cambria Math" panose="02040503050406030204" pitchFamily="18" charset="0"/>
-                                  </a:rPr>
-                                </m:ctrlPr>
-                              </m:naryPr>
-                              <m:sub/>
-                              <m:sup/>
-                              <m:e>
-                                <m:sSup>
-                                  <m:sSupPr>
-                                    <m:ctrlPr>
-                                      <a:rPr lang="en-US" altLang="zh-TW" b="0" i="1" smtClean="0">
-                                        <a:latin typeface="Cambria Math" panose="02040503050406030204" pitchFamily="18" charset="0"/>
-                                      </a:rPr>
-                                    </m:ctrlPr>
-                                  </m:sSupPr>
-                                  <m:e>
-                                    <m:d>
-                                      <m:dPr>
-                                        <m:begChr m:val="‖"/>
-                                        <m:endChr m:val="‖"/>
-                                        <m:ctrlPr>
-                                          <a:rPr lang="en-US" altLang="zh-TW" b="0" i="1" smtClean="0">
-                                            <a:latin typeface="Cambria Math" panose="02040503050406030204" pitchFamily="18" charset="0"/>
-                                          </a:rPr>
-                                        </m:ctrlPr>
-                                      </m:dPr>
-                                      <m:e>
-                                        <m:sSub>
-                                          <m:sSubPr>
-                                            <m:ctrlPr>
-                                              <a:rPr lang="en-US" altLang="zh-TW" b="0" i="1" smtClean="0">
-                                                <a:latin typeface="Cambria Math" panose="02040503050406030204" pitchFamily="18" charset="0"/>
-                                              </a:rPr>
-                                            </m:ctrlPr>
-                                          </m:sSubPr>
-                                          <m:e>
-                                            <m:r>
-                                              <a:rPr lang="en-US" altLang="zh-TW" b="0" i="1" smtClean="0">
-                                                <a:latin typeface="Cambria Math" panose="02040503050406030204" pitchFamily="18" charset="0"/>
-                                              </a:rPr>
-                                              <m:t>𝑏</m:t>
-                                            </m:r>
-                                          </m:e>
-                                          <m:sub>
-                                            <m:r>
-                                              <a:rPr lang="en-US" altLang="zh-TW" b="0" i="1" smtClean="0">
-                                                <a:latin typeface="Cambria Math" panose="02040503050406030204" pitchFamily="18" charset="0"/>
-                                              </a:rPr>
-                                              <m:t>𝐹𝐸𝑀</m:t>
-                                            </m:r>
-                                          </m:sub>
-                                        </m:sSub>
-                                      </m:e>
-                                    </m:d>
-                                  </m:e>
-                                  <m:sup>
-                                    <m:r>
-                                      <a:rPr lang="en-US" altLang="zh-TW" b="0" i="1" smtClean="0">
-                                        <a:latin typeface="Cambria Math" panose="02040503050406030204" pitchFamily="18" charset="0"/>
-                                      </a:rPr>
-                                      <m:t>2</m:t>
-                                    </m:r>
-                                  </m:sup>
-                                </m:sSup>
-                              </m:e>
-                            </m:nary>
-                          </m:den>
-                        </m:f>
-                      </m:e>
-                    </m:rad>
-                    <m:r>
-                      <a:rPr lang="en-US" altLang="zh-TW" b="0" i="1" smtClean="0">
-                        <a:latin typeface="Cambria Math" panose="02040503050406030204" pitchFamily="18" charset="0"/>
-                        <a:ea typeface="Cambria Math" panose="02040503050406030204" pitchFamily="18" charset="0"/>
-                      </a:rPr>
-                      <m:t>×100</m:t>
-                    </m:r>
-                    <m:r>
-                      <a:rPr lang="en-US" altLang="zh-TW" b="0" i="1" smtClean="0">
-                        <a:latin typeface="Cambria Math" panose="02040503050406030204" pitchFamily="18" charset="0"/>
-                      </a:rPr>
-                      <m:t>=</m:t>
-                    </m:r>
-                    <m:r>
-                      <a:rPr lang="en-US" altLang="zh-TW" b="0" i="1" smtClean="0">
-                        <a:latin typeface="Cambria Math" panose="02040503050406030204" pitchFamily="18" charset="0"/>
-                      </a:rPr>
-                      <m:t>0.31</m:t>
-                    </m:r>
-                    <m:r>
-                      <a:rPr lang="en-US" altLang="zh-TW" b="0" i="1" smtClean="0">
-                        <a:latin typeface="Cambria Math" panose="02040503050406030204" pitchFamily="18" charset="0"/>
-                      </a:rPr>
-                      <m:t>%</m:t>
-                    </m:r>
-                    <m:r>
-                      <m:rPr>
-                        <m:nor/>
-                      </m:rPr>
-                      <a:rPr lang="en-US" altLang="zh-TW" dirty="0">
-                        <a:ea typeface="Cambria Math" panose="02040503050406030204" pitchFamily="18" charset="0"/>
-                      </a:rPr>
-                      <m:t>(</m:t>
-                    </m:r>
-                    <m:r>
-                      <m:rPr>
-                        <m:nor/>
-                      </m:rPr>
-                      <a:rPr lang="en-US" altLang="zh-TW" b="0" i="0" dirty="0" smtClean="0">
-                        <a:ea typeface="Cambria Math" panose="02040503050406030204" pitchFamily="18" charset="0"/>
-                      </a:rPr>
-                      <m:t>Eighteen</m:t>
-                    </m:r>
-                    <m:r>
-                      <m:rPr>
-                        <m:nor/>
-                      </m:rPr>
-                      <a:rPr lang="en-US" altLang="zh-TW" dirty="0">
-                        <a:ea typeface="Cambria Math" panose="02040503050406030204" pitchFamily="18" charset="0"/>
-                      </a:rPr>
-                      <m:t> </m:t>
-                    </m:r>
-                    <m:r>
-                      <m:rPr>
-                        <m:nor/>
-                      </m:rPr>
-                      <a:rPr lang="en-US" altLang="zh-TW" dirty="0">
-                        <a:ea typeface="Cambria Math" panose="02040503050406030204" pitchFamily="18" charset="0"/>
-                      </a:rPr>
-                      <m:t>parameters</m:t>
-                    </m:r>
-                    <m:r>
-                      <m:rPr>
-                        <m:nor/>
-                      </m:rPr>
-                      <a:rPr lang="en-US" altLang="zh-TW" dirty="0">
-                        <a:ea typeface="Cambria Math" panose="02040503050406030204" pitchFamily="18" charset="0"/>
-                      </a:rPr>
-                      <m:t>)</m:t>
-                    </m:r>
-                  </m:oMath>
-                </a14:m>
-                <a:endParaRPr lang="en-US" altLang="zh-TW" dirty="0">
-                  <a:ea typeface="Cambria Math" panose="02040503050406030204" pitchFamily="18" charset="0"/>
-                </a:endParaRPr>
-              </a:p>
-              <a:p>
-                <a:pPr lvl="1"/>
-                <a:endParaRPr lang="en-US" altLang="zh-TW" dirty="0"/>
-              </a:p>
-              <a:p>
-                <a:pPr marL="285750" indent="-285750">
-                  <a:buFont typeface="Arial" panose="020B0604020202020204" pitchFamily="34" charset="0"/>
-                  <a:buChar char="•"/>
-                </a:pPr>
-                <a:r>
-                  <a:rPr lang="en-US" altLang="zh-TW" dirty="0"/>
-                  <a:t>Sampling range </a:t>
-                </a:r>
-                <a14:m>
-                  <m:oMath xmlns:m="http://schemas.openxmlformats.org/officeDocument/2006/math">
-                    <m:r>
-                      <a:rPr lang="en-US" altLang="zh-TW" b="0" i="1" smtClean="0">
-                        <a:latin typeface="Cambria Math" panose="02040503050406030204" pitchFamily="18" charset="0"/>
-                      </a:rPr>
-                      <m:t>𝑅</m:t>
-                    </m:r>
-                    <m:r>
-                      <a:rPr lang="en-US" altLang="zh-TW" b="0" i="1" smtClean="0">
-                        <a:latin typeface="Cambria Math" panose="02040503050406030204" pitchFamily="18" charset="0"/>
-                        <a:ea typeface="Cambria Math" panose="02040503050406030204" pitchFamily="18" charset="0"/>
-                      </a:rPr>
-                      <m:t>≤</m:t>
-                    </m:r>
-                    <m:r>
-                      <a:rPr lang="en-US" altLang="zh-TW" b="0" i="1" smtClean="0">
-                        <a:latin typeface="Cambria Math" panose="02040503050406030204" pitchFamily="18" charset="0"/>
-                        <a:ea typeface="Cambria Math" panose="02040503050406030204" pitchFamily="18" charset="0"/>
-                      </a:rPr>
-                      <m:t>30</m:t>
-                    </m:r>
-                    <m:r>
-                      <a:rPr lang="en-US" altLang="zh-TW" b="0" i="1" smtClean="0">
-                        <a:latin typeface="Cambria Math" panose="02040503050406030204" pitchFamily="18" charset="0"/>
-                        <a:ea typeface="Cambria Math" panose="02040503050406030204" pitchFamily="18" charset="0"/>
-                      </a:rPr>
-                      <m:t>0</m:t>
-                    </m:r>
-                    <m:r>
-                      <a:rPr lang="en-US" altLang="zh-TW" b="0" i="1" smtClean="0">
-                        <a:latin typeface="Cambria Math" panose="02040503050406030204" pitchFamily="18" charset="0"/>
-                        <a:ea typeface="Cambria Math" panose="02040503050406030204" pitchFamily="18" charset="0"/>
-                      </a:rPr>
-                      <m:t>𝑢𝑚</m:t>
-                    </m:r>
-                  </m:oMath>
-                </a14:m>
-                <a:endParaRPr lang="en-US" altLang="zh-TW" b="0" dirty="0">
-                  <a:ea typeface="Cambria Math" panose="02040503050406030204" pitchFamily="18" charset="0"/>
-                </a:endParaRPr>
-              </a:p>
-              <a:p>
-                <a:pPr marL="285750" indent="-285750">
-                  <a:buFont typeface="Arial" panose="020B0604020202020204" pitchFamily="34" charset="0"/>
-                  <a:buChar char="•"/>
-                </a:pPr>
-                <a:endParaRPr lang="en-US" altLang="zh-TW" dirty="0">
-                  <a:ea typeface="Cambria Math" panose="02040503050406030204" pitchFamily="18" charset="0"/>
-                </a:endParaRPr>
-              </a:p>
-              <a:p>
-                <a:pPr marL="742950" lvl="1" indent="-285750">
-                  <a:buFont typeface="Wingdings" panose="05000000000000000000" pitchFamily="2" charset="2"/>
-                  <a:buChar char="Ø"/>
-                </a:pPr>
-                <a14:m>
-                  <m:oMath xmlns:m="http://schemas.openxmlformats.org/officeDocument/2006/math">
-                    <m:r>
-                      <m:rPr>
-                        <m:sty m:val="p"/>
-                      </m:rPr>
-                      <a:rPr lang="en-US" altLang="zh-TW" i="1" dirty="0" smtClean="0">
-                        <a:latin typeface="Cambria Math" panose="02040503050406030204" pitchFamily="18" charset="0"/>
-                        <a:ea typeface="Cambria Math" panose="02040503050406030204" pitchFamily="18" charset="0"/>
-                      </a:rPr>
-                      <m:t>R</m:t>
-                    </m:r>
-                    <m:r>
-                      <m:rPr>
-                        <m:sty m:val="p"/>
-                      </m:rPr>
-                      <a:rPr lang="en-US" altLang="zh-TW" i="1" dirty="0" smtClean="0">
-                        <a:latin typeface="Cambria Math" panose="02040503050406030204" pitchFamily="18" charset="0"/>
-                        <a:ea typeface="Cambria Math" panose="02040503050406030204" pitchFamily="18" charset="0"/>
-                      </a:rPr>
-                      <m:t>M</m:t>
-                    </m:r>
-                    <m:r>
-                      <m:rPr>
-                        <m:sty m:val="p"/>
-                      </m:rPr>
-                      <a:rPr lang="en-US" altLang="zh-TW" i="1" dirty="0">
-                        <a:latin typeface="Cambria Math" panose="02040503050406030204" pitchFamily="18" charset="0"/>
-                        <a:ea typeface="Cambria Math" panose="02040503050406030204" pitchFamily="18" charset="0"/>
-                      </a:rPr>
-                      <m:t>S</m:t>
-                    </m:r>
-                    <m:r>
-                      <m:rPr>
-                        <m:sty m:val="p"/>
-                      </m:rPr>
-                      <a:rPr lang="en-US" altLang="zh-TW" i="1" dirty="0" smtClean="0">
-                        <a:latin typeface="Cambria Math" panose="02040503050406030204" pitchFamily="18" charset="0"/>
-                        <a:ea typeface="Cambria Math" panose="02040503050406030204" pitchFamily="18" charset="0"/>
-                      </a:rPr>
-                      <m:t>P</m:t>
-                    </m:r>
-                    <m:r>
-                      <m:rPr>
-                        <m:sty m:val="p"/>
-                      </m:rPr>
-                      <a:rPr lang="en-US" altLang="zh-TW" i="1" dirty="0">
-                        <a:latin typeface="Cambria Math" panose="02040503050406030204" pitchFamily="18" charset="0"/>
-                        <a:ea typeface="Cambria Math" panose="02040503050406030204" pitchFamily="18" charset="0"/>
-                      </a:rPr>
-                      <m:t>E</m:t>
-                    </m:r>
-                    <m:r>
-                      <a:rPr lang="en-US" altLang="zh-TW" i="1" dirty="0" smtClean="0">
-                        <a:latin typeface="Cambria Math" panose="02040503050406030204" pitchFamily="18" charset="0"/>
-                        <a:ea typeface="Cambria Math" panose="02040503050406030204" pitchFamily="18" charset="0"/>
-                      </a:rPr>
-                      <m:t>=</m:t>
-                    </m:r>
-                    <m:rad>
-                      <m:radPr>
-                        <m:degHide m:val="on"/>
-                        <m:ctrlPr>
-                          <a:rPr lang="en-US" altLang="zh-TW" b="0" i="1" smtClean="0">
-                            <a:latin typeface="Cambria Math" panose="02040503050406030204" pitchFamily="18" charset="0"/>
-                          </a:rPr>
-                        </m:ctrlPr>
-                      </m:radPr>
-                      <m:deg/>
-                      <m:e>
-                        <m:f>
-                          <m:fPr>
-                            <m:ctrlPr>
-                              <a:rPr lang="en-US" altLang="zh-TW" b="0" i="1" smtClean="0">
-                                <a:latin typeface="Cambria Math" panose="02040503050406030204" pitchFamily="18" charset="0"/>
-                              </a:rPr>
-                            </m:ctrlPr>
-                          </m:fPr>
-                          <m:num>
-                            <m:nary>
-                              <m:naryPr>
-                                <m:chr m:val="∑"/>
-                                <m:subHide m:val="on"/>
-                                <m:supHide m:val="on"/>
-                                <m:ctrlPr>
-                                  <a:rPr lang="en-US" altLang="zh-TW" b="0" i="1" smtClean="0">
-                                    <a:latin typeface="Cambria Math" panose="02040503050406030204" pitchFamily="18" charset="0"/>
-                                  </a:rPr>
-                                </m:ctrlPr>
-                              </m:naryPr>
-                              <m:sub/>
-                              <m:sup/>
-                              <m:e>
-                                <m:sSup>
-                                  <m:sSupPr>
-                                    <m:ctrlPr>
-                                      <a:rPr lang="en-US" altLang="zh-TW" b="0" i="1" smtClean="0">
-                                        <a:latin typeface="Cambria Math" panose="02040503050406030204" pitchFamily="18" charset="0"/>
-                                      </a:rPr>
-                                    </m:ctrlPr>
-                                  </m:sSupPr>
-                                  <m:e>
-                                    <m:d>
-                                      <m:dPr>
-                                        <m:begChr m:val="‖"/>
-                                        <m:endChr m:val="‖"/>
-                                        <m:ctrlPr>
-                                          <a:rPr lang="en-US" altLang="zh-TW" b="0" i="1" smtClean="0">
-                                            <a:latin typeface="Cambria Math" panose="02040503050406030204" pitchFamily="18" charset="0"/>
-                                          </a:rPr>
-                                        </m:ctrlPr>
-                                      </m:dPr>
-                                      <m:e>
-                                        <m:sSub>
-                                          <m:sSubPr>
-                                            <m:ctrlPr>
-                                              <a:rPr lang="en-US" altLang="zh-TW" b="0" i="1" smtClean="0">
-                                                <a:latin typeface="Cambria Math" panose="02040503050406030204" pitchFamily="18" charset="0"/>
-                                              </a:rPr>
-                                            </m:ctrlPr>
-                                          </m:sSubPr>
-                                          <m:e>
-                                            <m:r>
-                                              <a:rPr lang="en-US" altLang="zh-TW" b="0" i="1" smtClean="0">
-                                                <a:latin typeface="Cambria Math" panose="02040503050406030204" pitchFamily="18" charset="0"/>
-                                              </a:rPr>
-                                              <m:t>𝑏</m:t>
-                                            </m:r>
-                                          </m:e>
-                                          <m:sub>
-                                            <m:r>
-                                              <a:rPr lang="en-US" altLang="zh-TW" b="0" i="1" smtClean="0">
-                                                <a:latin typeface="Cambria Math" panose="02040503050406030204" pitchFamily="18" charset="0"/>
-                                              </a:rPr>
-                                              <m:t>𝐹𝐸𝑀</m:t>
-                                            </m:r>
-                                          </m:sub>
-                                        </m:sSub>
-                                        <m:r>
-                                          <a:rPr lang="en-US" altLang="zh-TW" b="0" i="1" smtClean="0">
-                                            <a:latin typeface="Cambria Math" panose="02040503050406030204" pitchFamily="18" charset="0"/>
-                                          </a:rPr>
-                                          <m:t>−</m:t>
-                                        </m:r>
-                                        <m:sSub>
-                                          <m:sSubPr>
-                                            <m:ctrlPr>
-                                              <a:rPr lang="en-US" altLang="zh-TW" i="1">
-                                                <a:latin typeface="Cambria Math" panose="02040503050406030204" pitchFamily="18" charset="0"/>
-                                                <a:ea typeface="Cambria Math" panose="02040503050406030204" pitchFamily="18" charset="0"/>
-                                              </a:rPr>
-                                            </m:ctrlPr>
-                                          </m:sSubPr>
-                                          <m:e>
-                                            <m:r>
-                                              <a:rPr lang="en-US" altLang="zh-TW" i="1">
-                                                <a:latin typeface="Cambria Math" panose="02040503050406030204" pitchFamily="18" charset="0"/>
-                                                <a:ea typeface="Cambria Math" panose="02040503050406030204" pitchFamily="18" charset="0"/>
-                                              </a:rPr>
-                                              <m:t>𝑆</m:t>
-                                            </m:r>
-                                          </m:e>
-                                          <m:sub>
-                                            <m:r>
-                                              <a:rPr lang="en-US" altLang="zh-TW" i="1">
-                                                <a:latin typeface="Cambria Math" panose="02040503050406030204" pitchFamily="18" charset="0"/>
-                                                <a:ea typeface="Cambria Math" panose="02040503050406030204" pitchFamily="18" charset="0"/>
-                                              </a:rPr>
-                                              <m:t>𝑖</m:t>
-                                            </m:r>
-                                          </m:sub>
-                                        </m:sSub>
-                                        <m:sPre>
-                                          <m:sPrePr>
-                                            <m:ctrlPr>
-                                              <a:rPr lang="en-US" altLang="zh-TW" i="1">
-                                                <a:latin typeface="Cambria Math" panose="02040503050406030204" pitchFamily="18" charset="0"/>
-                                                <a:ea typeface="Cambria Math" panose="02040503050406030204" pitchFamily="18" charset="0"/>
-                                              </a:rPr>
-                                            </m:ctrlPr>
-                                          </m:sPrePr>
-                                          <m:sub/>
-                                          <m:sup>
-                                            <m:r>
-                                              <a:rPr lang="en-US" altLang="zh-TW" i="1">
-                                                <a:latin typeface="Cambria Math" panose="02040503050406030204" pitchFamily="18" charset="0"/>
-                                              </a:rPr>
-                                              <m:t>𝐵</m:t>
-                                            </m:r>
-                                          </m:sup>
-                                          <m:e>
-                                            <m:sSub>
-                                              <m:sSubPr>
-                                                <m:ctrlPr>
-                                                  <a:rPr lang="en-US" altLang="zh-TW" i="1">
-                                                    <a:latin typeface="Cambria Math" panose="02040503050406030204" pitchFamily="18" charset="0"/>
-                                                  </a:rPr>
-                                                </m:ctrlPr>
-                                              </m:sSubPr>
-                                              <m:e>
-                                                <m:acc>
-                                                  <m:accPr>
-                                                    <m:chr m:val="̂"/>
-                                                    <m:ctrlPr>
-                                                      <a:rPr lang="en-US" altLang="zh-TW" i="1">
-                                                        <a:latin typeface="Cambria Math" panose="02040503050406030204" pitchFamily="18" charset="0"/>
-                                                      </a:rPr>
-                                                    </m:ctrlPr>
-                                                  </m:accPr>
-                                                  <m:e>
-                                                    <m:r>
-                                                      <a:rPr lang="en-US" altLang="zh-TW" i="1">
-                                                        <a:latin typeface="Cambria Math" panose="02040503050406030204" pitchFamily="18" charset="0"/>
-                                                      </a:rPr>
-                                                      <m:t>𝑔</m:t>
-                                                    </m:r>
-                                                  </m:e>
-                                                </m:acc>
-                                              </m:e>
-                                              <m:sub>
-                                                <m:r>
-                                                  <a:rPr lang="en-US" altLang="zh-TW" i="1">
-                                                    <a:latin typeface="Cambria Math" panose="02040503050406030204" pitchFamily="18" charset="0"/>
-                                                  </a:rPr>
-                                                  <m:t>𝑉</m:t>
-                                                </m:r>
-                                              </m:sub>
-                                            </m:sSub>
-                                          </m:e>
-                                        </m:sPre>
-                                        <m:acc>
-                                          <m:accPr>
-                                            <m:chr m:val="̅"/>
-                                            <m:ctrlPr>
-                                              <a:rPr lang="zh-TW" altLang="en-US" i="1">
-                                                <a:latin typeface="Cambria Math" panose="02040503050406030204" pitchFamily="18" charset="0"/>
-                                              </a:rPr>
-                                            </m:ctrlPr>
-                                          </m:accPr>
-                                          <m:e>
-                                            <m:r>
-                                              <a:rPr lang="en-US" altLang="zh-TW" i="1">
-                                                <a:latin typeface="Cambria Math" panose="02040503050406030204" pitchFamily="18" charset="0"/>
-                                              </a:rPr>
-                                              <m:t>𝐷</m:t>
-                                            </m:r>
-                                          </m:e>
-                                        </m:acc>
-                                        <m:sSub>
-                                          <m:sSubPr>
-                                            <m:ctrlPr>
-                                              <a:rPr lang="en-US" altLang="zh-TW" i="1">
-                                                <a:latin typeface="Cambria Math" panose="02040503050406030204" pitchFamily="18" charset="0"/>
-                                              </a:rPr>
-                                            </m:ctrlPr>
-                                          </m:sSubPr>
-                                          <m:e>
-                                            <m:r>
-                                              <a:rPr lang="en-US" altLang="zh-TW" i="1">
-                                                <a:latin typeface="Cambria Math" panose="02040503050406030204" pitchFamily="18" charset="0"/>
-                                              </a:rPr>
-                                              <m:t>𝑉</m:t>
-                                            </m:r>
-                                          </m:e>
-                                          <m:sub>
-                                            <m:r>
-                                              <a:rPr lang="en-US" altLang="zh-TW" i="1">
-                                                <a:latin typeface="Cambria Math" panose="02040503050406030204" pitchFamily="18" charset="0"/>
-                                              </a:rPr>
-                                              <m:t>𝑗</m:t>
-                                            </m:r>
-                                          </m:sub>
-                                        </m:sSub>
-                                      </m:e>
-                                    </m:d>
-                                  </m:e>
-                                  <m:sup>
-                                    <m:r>
-                                      <a:rPr lang="en-US" altLang="zh-TW" b="0" i="1" smtClean="0">
-                                        <a:latin typeface="Cambria Math" panose="02040503050406030204" pitchFamily="18" charset="0"/>
-                                      </a:rPr>
-                                      <m:t>2</m:t>
-                                    </m:r>
-                                  </m:sup>
-                                </m:sSup>
-                              </m:e>
-                            </m:nary>
-                          </m:num>
-                          <m:den>
-                            <m:nary>
-                              <m:naryPr>
-                                <m:chr m:val="∑"/>
-                                <m:subHide m:val="on"/>
-                                <m:supHide m:val="on"/>
-                                <m:ctrlPr>
-                                  <a:rPr lang="en-US" altLang="zh-TW" b="0" i="1" smtClean="0">
-                                    <a:latin typeface="Cambria Math" panose="02040503050406030204" pitchFamily="18" charset="0"/>
-                                  </a:rPr>
-                                </m:ctrlPr>
-                              </m:naryPr>
-                              <m:sub/>
-                              <m:sup/>
-                              <m:e>
-                                <m:sSup>
-                                  <m:sSupPr>
-                                    <m:ctrlPr>
-                                      <a:rPr lang="en-US" altLang="zh-TW" b="0" i="1" smtClean="0">
-                                        <a:latin typeface="Cambria Math" panose="02040503050406030204" pitchFamily="18" charset="0"/>
-                                      </a:rPr>
-                                    </m:ctrlPr>
-                                  </m:sSupPr>
-                                  <m:e>
-                                    <m:d>
-                                      <m:dPr>
-                                        <m:begChr m:val="‖"/>
-                                        <m:endChr m:val="‖"/>
-                                        <m:ctrlPr>
-                                          <a:rPr lang="en-US" altLang="zh-TW" b="0" i="1" smtClean="0">
-                                            <a:latin typeface="Cambria Math" panose="02040503050406030204" pitchFamily="18" charset="0"/>
-                                          </a:rPr>
-                                        </m:ctrlPr>
-                                      </m:dPr>
-                                      <m:e>
-                                        <m:sSub>
-                                          <m:sSubPr>
-                                            <m:ctrlPr>
-                                              <a:rPr lang="en-US" altLang="zh-TW" b="0" i="1" smtClean="0">
-                                                <a:latin typeface="Cambria Math" panose="02040503050406030204" pitchFamily="18" charset="0"/>
-                                              </a:rPr>
-                                            </m:ctrlPr>
-                                          </m:sSubPr>
-                                          <m:e>
-                                            <m:r>
-                                              <a:rPr lang="en-US" altLang="zh-TW" b="0" i="1" smtClean="0">
-                                                <a:latin typeface="Cambria Math" panose="02040503050406030204" pitchFamily="18" charset="0"/>
-                                              </a:rPr>
-                                              <m:t>𝑏</m:t>
-                                            </m:r>
-                                          </m:e>
-                                          <m:sub>
-                                            <m:r>
-                                              <a:rPr lang="en-US" altLang="zh-TW" b="0" i="1" smtClean="0">
-                                                <a:latin typeface="Cambria Math" panose="02040503050406030204" pitchFamily="18" charset="0"/>
-                                              </a:rPr>
-                                              <m:t>𝐹𝐸𝑀</m:t>
-                                            </m:r>
-                                          </m:sub>
-                                        </m:sSub>
-                                      </m:e>
-                                    </m:d>
-                                  </m:e>
-                                  <m:sup>
-                                    <m:r>
-                                      <a:rPr lang="en-US" altLang="zh-TW" b="0" i="1" smtClean="0">
-                                        <a:latin typeface="Cambria Math" panose="02040503050406030204" pitchFamily="18" charset="0"/>
-                                      </a:rPr>
-                                      <m:t>2</m:t>
-                                    </m:r>
-                                  </m:sup>
-                                </m:sSup>
-                              </m:e>
-                            </m:nary>
-                          </m:den>
-                        </m:f>
-                      </m:e>
-                    </m:rad>
-                    <m:r>
-                      <a:rPr lang="en-US" altLang="zh-TW" b="0" i="1" smtClean="0">
-                        <a:latin typeface="Cambria Math" panose="02040503050406030204" pitchFamily="18" charset="0"/>
-                        <a:ea typeface="Cambria Math" panose="02040503050406030204" pitchFamily="18" charset="0"/>
-                      </a:rPr>
-                      <m:t>×100</m:t>
-                    </m:r>
-                    <m:r>
-                      <a:rPr lang="en-US" altLang="zh-TW" b="0" i="1" smtClean="0">
-                        <a:latin typeface="Cambria Math" panose="02040503050406030204" pitchFamily="18" charset="0"/>
-                      </a:rPr>
-                      <m:t>=</m:t>
-                    </m:r>
-                    <m:r>
-                      <a:rPr lang="en-US" altLang="zh-TW" b="0" i="1" smtClean="0">
-                        <a:latin typeface="Cambria Math" panose="02040503050406030204" pitchFamily="18" charset="0"/>
-                      </a:rPr>
-                      <m:t>7.03</m:t>
-                    </m:r>
-                    <m:r>
-                      <a:rPr lang="en-US" altLang="zh-TW" b="0" i="1" smtClean="0">
-                        <a:latin typeface="Cambria Math" panose="02040503050406030204" pitchFamily="18" charset="0"/>
-                      </a:rPr>
-                      <m:t>%</m:t>
+                      <m:t>=3.16%</m:t>
                     </m:r>
                     <m:r>
                       <m:rPr>
@@ -5393,19 +4416,914 @@
                       <a:rPr lang="en-US" altLang="zh-TW" b="0" i="1" smtClean="0">
                         <a:latin typeface="Cambria Math" panose="02040503050406030204" pitchFamily="18" charset="0"/>
                       </a:rPr>
+                      <m:t>=0.31%</m:t>
+                    </m:r>
+                    <m:r>
+                      <m:rPr>
+                        <m:nor/>
+                      </m:rPr>
+                      <a:rPr lang="en-US" altLang="zh-TW" dirty="0">
+                        <a:ea typeface="Cambria Math" panose="02040503050406030204" pitchFamily="18" charset="0"/>
+                      </a:rPr>
+                      <m:t>(</m:t>
+                    </m:r>
+                    <m:r>
+                      <m:rPr>
+                        <m:nor/>
+                      </m:rPr>
+                      <a:rPr lang="en-US" altLang="zh-TW" b="0" i="0" dirty="0" smtClean="0">
+                        <a:ea typeface="Cambria Math" panose="02040503050406030204" pitchFamily="18" charset="0"/>
+                      </a:rPr>
+                      <m:t>Eighteen</m:t>
+                    </m:r>
+                    <m:r>
+                      <m:rPr>
+                        <m:nor/>
+                      </m:rPr>
+                      <a:rPr lang="en-US" altLang="zh-TW" dirty="0">
+                        <a:ea typeface="Cambria Math" panose="02040503050406030204" pitchFamily="18" charset="0"/>
+                      </a:rPr>
+                      <m:t> </m:t>
+                    </m:r>
+                    <m:r>
+                      <m:rPr>
+                        <m:nor/>
+                      </m:rPr>
+                      <a:rPr lang="en-US" altLang="zh-TW" dirty="0">
+                        <a:ea typeface="Cambria Math" panose="02040503050406030204" pitchFamily="18" charset="0"/>
+                      </a:rPr>
+                      <m:t>parameters</m:t>
+                    </m:r>
+                    <m:r>
+                      <m:rPr>
+                        <m:nor/>
+                      </m:rPr>
+                      <a:rPr lang="en-US" altLang="zh-TW" dirty="0">
+                        <a:ea typeface="Cambria Math" panose="02040503050406030204" pitchFamily="18" charset="0"/>
+                      </a:rPr>
+                      <m:t>)</m:t>
+                    </m:r>
+                  </m:oMath>
+                </a14:m>
+                <a:endParaRPr lang="en-US" altLang="zh-TW" dirty="0">
+                  <a:ea typeface="Cambria Math" panose="02040503050406030204" pitchFamily="18" charset="0"/>
+                </a:endParaRPr>
+              </a:p>
+              <a:p>
+                <a:pPr lvl="1"/>
+                <a:endParaRPr lang="en-US" altLang="zh-TW" dirty="0"/>
+              </a:p>
+              <a:p>
+                <a:pPr marL="285750" indent="-285750">
+                  <a:buFont typeface="Arial" panose="020B0604020202020204" pitchFamily="34" charset="0"/>
+                  <a:buChar char="•"/>
+                </a:pPr>
+                <a:r>
+                  <a:rPr lang="en-US" altLang="zh-TW" dirty="0"/>
+                  <a:t>Sampling range </a:t>
+                </a:r>
+                <a14:m>
+                  <m:oMath xmlns:m="http://schemas.openxmlformats.org/officeDocument/2006/math">
+                    <m:r>
+                      <a:rPr lang="en-US" altLang="zh-TW" b="0" i="1" smtClean="0">
+                        <a:latin typeface="Cambria Math" panose="02040503050406030204" pitchFamily="18" charset="0"/>
+                      </a:rPr>
+                      <m:t>𝑅</m:t>
+                    </m:r>
+                    <m:r>
+                      <a:rPr lang="en-US" altLang="zh-TW" b="0" i="1" smtClean="0">
+                        <a:latin typeface="Cambria Math" panose="02040503050406030204" pitchFamily="18" charset="0"/>
+                        <a:ea typeface="Cambria Math" panose="02040503050406030204" pitchFamily="18" charset="0"/>
+                      </a:rPr>
+                      <m:t>≤300</m:t>
+                    </m:r>
+                    <m:r>
+                      <a:rPr lang="en-US" altLang="zh-TW" b="0" i="1" smtClean="0">
+                        <a:latin typeface="Cambria Math" panose="02040503050406030204" pitchFamily="18" charset="0"/>
+                        <a:ea typeface="Cambria Math" panose="02040503050406030204" pitchFamily="18" charset="0"/>
+                      </a:rPr>
+                      <m:t>𝑢𝑚</m:t>
+                    </m:r>
+                  </m:oMath>
+                </a14:m>
+                <a:endParaRPr lang="en-US" altLang="zh-TW" b="0" dirty="0">
+                  <a:ea typeface="Cambria Math" panose="02040503050406030204" pitchFamily="18" charset="0"/>
+                </a:endParaRPr>
+              </a:p>
+              <a:p>
+                <a:pPr marL="285750" indent="-285750">
+                  <a:buFont typeface="Arial" panose="020B0604020202020204" pitchFamily="34" charset="0"/>
+                  <a:buChar char="•"/>
+                </a:pPr>
+                <a:endParaRPr lang="en-US" altLang="zh-TW" dirty="0">
+                  <a:ea typeface="Cambria Math" panose="02040503050406030204" pitchFamily="18" charset="0"/>
+                </a:endParaRPr>
+              </a:p>
+              <a:p>
+                <a:pPr marL="742950" lvl="1" indent="-285750">
+                  <a:buFont typeface="Wingdings" panose="05000000000000000000" pitchFamily="2" charset="2"/>
+                  <a:buChar char="Ø"/>
+                </a:pPr>
+                <a14:m>
+                  <m:oMath xmlns:m="http://schemas.openxmlformats.org/officeDocument/2006/math">
+                    <m:r>
+                      <m:rPr>
+                        <m:sty m:val="p"/>
+                      </m:rPr>
+                      <a:rPr lang="en-US" altLang="zh-TW" i="1" dirty="0" smtClean="0">
+                        <a:latin typeface="Cambria Math" panose="02040503050406030204" pitchFamily="18" charset="0"/>
+                        <a:ea typeface="Cambria Math" panose="02040503050406030204" pitchFamily="18" charset="0"/>
+                      </a:rPr>
+                      <m:t>RM</m:t>
+                    </m:r>
+                    <m:r>
+                      <m:rPr>
+                        <m:sty m:val="p"/>
+                      </m:rPr>
+                      <a:rPr lang="en-US" altLang="zh-TW" i="1" dirty="0">
+                        <a:latin typeface="Cambria Math" panose="02040503050406030204" pitchFamily="18" charset="0"/>
+                        <a:ea typeface="Cambria Math" panose="02040503050406030204" pitchFamily="18" charset="0"/>
+                      </a:rPr>
+                      <m:t>S</m:t>
+                    </m:r>
+                    <m:r>
+                      <m:rPr>
+                        <m:sty m:val="p"/>
+                      </m:rPr>
+                      <a:rPr lang="en-US" altLang="zh-TW" i="1" dirty="0" smtClean="0">
+                        <a:latin typeface="Cambria Math" panose="02040503050406030204" pitchFamily="18" charset="0"/>
+                        <a:ea typeface="Cambria Math" panose="02040503050406030204" pitchFamily="18" charset="0"/>
+                      </a:rPr>
+                      <m:t>P</m:t>
+                    </m:r>
+                    <m:r>
+                      <m:rPr>
+                        <m:sty m:val="p"/>
+                      </m:rPr>
+                      <a:rPr lang="en-US" altLang="zh-TW" i="1" dirty="0">
+                        <a:latin typeface="Cambria Math" panose="02040503050406030204" pitchFamily="18" charset="0"/>
+                        <a:ea typeface="Cambria Math" panose="02040503050406030204" pitchFamily="18" charset="0"/>
+                      </a:rPr>
+                      <m:t>E</m:t>
+                    </m:r>
+                    <m:r>
+                      <a:rPr lang="en-US" altLang="zh-TW" i="1" dirty="0" smtClean="0">
+                        <a:latin typeface="Cambria Math" panose="02040503050406030204" pitchFamily="18" charset="0"/>
+                        <a:ea typeface="Cambria Math" panose="02040503050406030204" pitchFamily="18" charset="0"/>
+                      </a:rPr>
                       <m:t>=</m:t>
+                    </m:r>
+                    <m:rad>
+                      <m:radPr>
+                        <m:degHide m:val="on"/>
+                        <m:ctrlPr>
+                          <a:rPr lang="en-US" altLang="zh-TW" b="0" i="1" smtClean="0">
+                            <a:latin typeface="Cambria Math" panose="02040503050406030204" pitchFamily="18" charset="0"/>
+                          </a:rPr>
+                        </m:ctrlPr>
+                      </m:radPr>
+                      <m:deg/>
+                      <m:e>
+                        <m:f>
+                          <m:fPr>
+                            <m:ctrlPr>
+                              <a:rPr lang="en-US" altLang="zh-TW" b="0" i="1" smtClean="0">
+                                <a:latin typeface="Cambria Math" panose="02040503050406030204" pitchFamily="18" charset="0"/>
+                              </a:rPr>
+                            </m:ctrlPr>
+                          </m:fPr>
+                          <m:num>
+                            <m:nary>
+                              <m:naryPr>
+                                <m:chr m:val="∑"/>
+                                <m:subHide m:val="on"/>
+                                <m:supHide m:val="on"/>
+                                <m:ctrlPr>
+                                  <a:rPr lang="en-US" altLang="zh-TW" b="0" i="1" smtClean="0">
+                                    <a:latin typeface="Cambria Math" panose="02040503050406030204" pitchFamily="18" charset="0"/>
+                                  </a:rPr>
+                                </m:ctrlPr>
+                              </m:naryPr>
+                              <m:sub/>
+                              <m:sup/>
+                              <m:e>
+                                <m:sSup>
+                                  <m:sSupPr>
+                                    <m:ctrlPr>
+                                      <a:rPr lang="en-US" altLang="zh-TW" b="0" i="1" smtClean="0">
+                                        <a:latin typeface="Cambria Math" panose="02040503050406030204" pitchFamily="18" charset="0"/>
+                                      </a:rPr>
+                                    </m:ctrlPr>
+                                  </m:sSupPr>
+                                  <m:e>
+                                    <m:d>
+                                      <m:dPr>
+                                        <m:begChr m:val="‖"/>
+                                        <m:endChr m:val="‖"/>
+                                        <m:ctrlPr>
+                                          <a:rPr lang="en-US" altLang="zh-TW" b="0" i="1" smtClean="0">
+                                            <a:latin typeface="Cambria Math" panose="02040503050406030204" pitchFamily="18" charset="0"/>
+                                          </a:rPr>
+                                        </m:ctrlPr>
+                                      </m:dPr>
+                                      <m:e>
+                                        <m:sSub>
+                                          <m:sSubPr>
+                                            <m:ctrlPr>
+                                              <a:rPr lang="en-US" altLang="zh-TW" b="0" i="1" smtClean="0">
+                                                <a:latin typeface="Cambria Math" panose="02040503050406030204" pitchFamily="18" charset="0"/>
+                                              </a:rPr>
+                                            </m:ctrlPr>
+                                          </m:sSubPr>
+                                          <m:e>
+                                            <m:r>
+                                              <a:rPr lang="en-US" altLang="zh-TW" b="0" i="1" smtClean="0">
+                                                <a:latin typeface="Cambria Math" panose="02040503050406030204" pitchFamily="18" charset="0"/>
+                                              </a:rPr>
+                                              <m:t>𝑏</m:t>
+                                            </m:r>
+                                          </m:e>
+                                          <m:sub>
+                                            <m:r>
+                                              <a:rPr lang="en-US" altLang="zh-TW" b="0" i="1" smtClean="0">
+                                                <a:latin typeface="Cambria Math" panose="02040503050406030204" pitchFamily="18" charset="0"/>
+                                              </a:rPr>
+                                              <m:t>𝐹𝐸𝑀</m:t>
+                                            </m:r>
+                                          </m:sub>
+                                        </m:sSub>
+                                        <m:r>
+                                          <a:rPr lang="en-US" altLang="zh-TW" b="0" i="1" smtClean="0">
+                                            <a:latin typeface="Cambria Math" panose="02040503050406030204" pitchFamily="18" charset="0"/>
+                                          </a:rPr>
+                                          <m:t>−</m:t>
+                                        </m:r>
+                                        <m:sSub>
+                                          <m:sSubPr>
+                                            <m:ctrlPr>
+                                              <a:rPr lang="en-US" altLang="zh-TW" i="1">
+                                                <a:latin typeface="Cambria Math" panose="02040503050406030204" pitchFamily="18" charset="0"/>
+                                                <a:ea typeface="Cambria Math" panose="02040503050406030204" pitchFamily="18" charset="0"/>
+                                              </a:rPr>
+                                            </m:ctrlPr>
+                                          </m:sSubPr>
+                                          <m:e>
+                                            <m:r>
+                                              <a:rPr lang="en-US" altLang="zh-TW" i="1">
+                                                <a:latin typeface="Cambria Math" panose="02040503050406030204" pitchFamily="18" charset="0"/>
+                                                <a:ea typeface="Cambria Math" panose="02040503050406030204" pitchFamily="18" charset="0"/>
+                                              </a:rPr>
+                                              <m:t>𝑆</m:t>
+                                            </m:r>
+                                          </m:e>
+                                          <m:sub>
+                                            <m:r>
+                                              <a:rPr lang="en-US" altLang="zh-TW" i="1">
+                                                <a:latin typeface="Cambria Math" panose="02040503050406030204" pitchFamily="18" charset="0"/>
+                                                <a:ea typeface="Cambria Math" panose="02040503050406030204" pitchFamily="18" charset="0"/>
+                                              </a:rPr>
+                                              <m:t>𝑖</m:t>
+                                            </m:r>
+                                          </m:sub>
+                                        </m:sSub>
+                                        <m:sPre>
+                                          <m:sPrePr>
+                                            <m:ctrlPr>
+                                              <a:rPr lang="en-US" altLang="zh-TW" i="1">
+                                                <a:latin typeface="Cambria Math" panose="02040503050406030204" pitchFamily="18" charset="0"/>
+                                                <a:ea typeface="Cambria Math" panose="02040503050406030204" pitchFamily="18" charset="0"/>
+                                              </a:rPr>
+                                            </m:ctrlPr>
+                                          </m:sPrePr>
+                                          <m:sub/>
+                                          <m:sup>
+                                            <m:r>
+                                              <a:rPr lang="en-US" altLang="zh-TW" i="1">
+                                                <a:latin typeface="Cambria Math" panose="02040503050406030204" pitchFamily="18" charset="0"/>
+                                              </a:rPr>
+                                              <m:t>𝐵</m:t>
+                                            </m:r>
+                                          </m:sup>
+                                          <m:e>
+                                            <m:sSub>
+                                              <m:sSubPr>
+                                                <m:ctrlPr>
+                                                  <a:rPr lang="en-US" altLang="zh-TW" i="1">
+                                                    <a:latin typeface="Cambria Math" panose="02040503050406030204" pitchFamily="18" charset="0"/>
+                                                  </a:rPr>
+                                                </m:ctrlPr>
+                                              </m:sSubPr>
+                                              <m:e>
+                                                <m:acc>
+                                                  <m:accPr>
+                                                    <m:chr m:val="̂"/>
+                                                    <m:ctrlPr>
+                                                      <a:rPr lang="en-US" altLang="zh-TW" i="1">
+                                                        <a:latin typeface="Cambria Math" panose="02040503050406030204" pitchFamily="18" charset="0"/>
+                                                      </a:rPr>
+                                                    </m:ctrlPr>
+                                                  </m:accPr>
+                                                  <m:e>
+                                                    <m:r>
+                                                      <a:rPr lang="en-US" altLang="zh-TW" i="1">
+                                                        <a:latin typeface="Cambria Math" panose="02040503050406030204" pitchFamily="18" charset="0"/>
+                                                      </a:rPr>
+                                                      <m:t>𝑔</m:t>
+                                                    </m:r>
+                                                  </m:e>
+                                                </m:acc>
+                                              </m:e>
+                                              <m:sub>
+                                                <m:r>
+                                                  <a:rPr lang="en-US" altLang="zh-TW" i="1">
+                                                    <a:latin typeface="Cambria Math" panose="02040503050406030204" pitchFamily="18" charset="0"/>
+                                                  </a:rPr>
+                                                  <m:t>𝑉</m:t>
+                                                </m:r>
+                                              </m:sub>
+                                            </m:sSub>
+                                          </m:e>
+                                        </m:sPre>
+                                        <m:acc>
+                                          <m:accPr>
+                                            <m:chr m:val="̅"/>
+                                            <m:ctrlPr>
+                                              <a:rPr lang="zh-TW" altLang="en-US" i="1">
+                                                <a:latin typeface="Cambria Math" panose="02040503050406030204" pitchFamily="18" charset="0"/>
+                                              </a:rPr>
+                                            </m:ctrlPr>
+                                          </m:accPr>
+                                          <m:e>
+                                            <m:r>
+                                              <a:rPr lang="en-US" altLang="zh-TW" i="1">
+                                                <a:latin typeface="Cambria Math" panose="02040503050406030204" pitchFamily="18" charset="0"/>
+                                              </a:rPr>
+                                              <m:t>𝐷</m:t>
+                                            </m:r>
+                                          </m:e>
+                                        </m:acc>
+                                        <m:sSub>
+                                          <m:sSubPr>
+                                            <m:ctrlPr>
+                                              <a:rPr lang="en-US" altLang="zh-TW" i="1">
+                                                <a:latin typeface="Cambria Math" panose="02040503050406030204" pitchFamily="18" charset="0"/>
+                                              </a:rPr>
+                                            </m:ctrlPr>
+                                          </m:sSubPr>
+                                          <m:e>
+                                            <m:r>
+                                              <a:rPr lang="en-US" altLang="zh-TW" i="1">
+                                                <a:latin typeface="Cambria Math" panose="02040503050406030204" pitchFamily="18" charset="0"/>
+                                              </a:rPr>
+                                              <m:t>𝑉</m:t>
+                                            </m:r>
+                                          </m:e>
+                                          <m:sub>
+                                            <m:r>
+                                              <a:rPr lang="en-US" altLang="zh-TW" i="1">
+                                                <a:latin typeface="Cambria Math" panose="02040503050406030204" pitchFamily="18" charset="0"/>
+                                              </a:rPr>
+                                              <m:t>𝑗</m:t>
+                                            </m:r>
+                                          </m:sub>
+                                        </m:sSub>
+                                      </m:e>
+                                    </m:d>
+                                  </m:e>
+                                  <m:sup>
+                                    <m:r>
+                                      <a:rPr lang="en-US" altLang="zh-TW" b="0" i="1" smtClean="0">
+                                        <a:latin typeface="Cambria Math" panose="02040503050406030204" pitchFamily="18" charset="0"/>
+                                      </a:rPr>
+                                      <m:t>2</m:t>
+                                    </m:r>
+                                  </m:sup>
+                                </m:sSup>
+                              </m:e>
+                            </m:nary>
+                          </m:num>
+                          <m:den>
+                            <m:nary>
+                              <m:naryPr>
+                                <m:chr m:val="∑"/>
+                                <m:subHide m:val="on"/>
+                                <m:supHide m:val="on"/>
+                                <m:ctrlPr>
+                                  <a:rPr lang="en-US" altLang="zh-TW" b="0" i="1" smtClean="0">
+                                    <a:latin typeface="Cambria Math" panose="02040503050406030204" pitchFamily="18" charset="0"/>
+                                  </a:rPr>
+                                </m:ctrlPr>
+                              </m:naryPr>
+                              <m:sub/>
+                              <m:sup/>
+                              <m:e>
+                                <m:sSup>
+                                  <m:sSupPr>
+                                    <m:ctrlPr>
+                                      <a:rPr lang="en-US" altLang="zh-TW" b="0" i="1" smtClean="0">
+                                        <a:latin typeface="Cambria Math" panose="02040503050406030204" pitchFamily="18" charset="0"/>
+                                      </a:rPr>
+                                    </m:ctrlPr>
+                                  </m:sSupPr>
+                                  <m:e>
+                                    <m:d>
+                                      <m:dPr>
+                                        <m:begChr m:val="‖"/>
+                                        <m:endChr m:val="‖"/>
+                                        <m:ctrlPr>
+                                          <a:rPr lang="en-US" altLang="zh-TW" b="0" i="1" smtClean="0">
+                                            <a:latin typeface="Cambria Math" panose="02040503050406030204" pitchFamily="18" charset="0"/>
+                                          </a:rPr>
+                                        </m:ctrlPr>
+                                      </m:dPr>
+                                      <m:e>
+                                        <m:sSub>
+                                          <m:sSubPr>
+                                            <m:ctrlPr>
+                                              <a:rPr lang="en-US" altLang="zh-TW" b="0" i="1" smtClean="0">
+                                                <a:latin typeface="Cambria Math" panose="02040503050406030204" pitchFamily="18" charset="0"/>
+                                              </a:rPr>
+                                            </m:ctrlPr>
+                                          </m:sSubPr>
+                                          <m:e>
+                                            <m:r>
+                                              <a:rPr lang="en-US" altLang="zh-TW" b="0" i="1" smtClean="0">
+                                                <a:latin typeface="Cambria Math" panose="02040503050406030204" pitchFamily="18" charset="0"/>
+                                              </a:rPr>
+                                              <m:t>𝑏</m:t>
+                                            </m:r>
+                                          </m:e>
+                                          <m:sub>
+                                            <m:r>
+                                              <a:rPr lang="en-US" altLang="zh-TW" b="0" i="1" smtClean="0">
+                                                <a:latin typeface="Cambria Math" panose="02040503050406030204" pitchFamily="18" charset="0"/>
+                                              </a:rPr>
+                                              <m:t>𝐹𝐸𝑀</m:t>
+                                            </m:r>
+                                          </m:sub>
+                                        </m:sSub>
+                                      </m:e>
+                                    </m:d>
+                                  </m:e>
+                                  <m:sup>
+                                    <m:r>
+                                      <a:rPr lang="en-US" altLang="zh-TW" b="0" i="1" smtClean="0">
+                                        <a:latin typeface="Cambria Math" panose="02040503050406030204" pitchFamily="18" charset="0"/>
+                                      </a:rPr>
+                                      <m:t>2</m:t>
+                                    </m:r>
+                                  </m:sup>
+                                </m:sSup>
+                              </m:e>
+                            </m:nary>
+                          </m:den>
+                        </m:f>
+                      </m:e>
+                    </m:rad>
+                    <m:r>
+                      <a:rPr lang="en-US" altLang="zh-TW" b="0" i="1" smtClean="0">
+                        <a:latin typeface="Cambria Math" panose="02040503050406030204" pitchFamily="18" charset="0"/>
+                        <a:ea typeface="Cambria Math" panose="02040503050406030204" pitchFamily="18" charset="0"/>
+                      </a:rPr>
+                      <m:t>×100</m:t>
                     </m:r>
                     <m:r>
                       <a:rPr lang="en-US" altLang="zh-TW" b="0" i="1" smtClean="0">
                         <a:latin typeface="Cambria Math" panose="02040503050406030204" pitchFamily="18" charset="0"/>
                       </a:rPr>
-                      <m:t>2.06</m:t>
+                      <m:t>=7.03%</m:t>
+                    </m:r>
+                    <m:r>
+                      <m:rPr>
+                        <m:nor/>
+                      </m:rPr>
+                      <a:rPr lang="en-US" altLang="zh-TW" dirty="0">
+                        <a:ea typeface="Cambria Math" panose="02040503050406030204" pitchFamily="18" charset="0"/>
+                      </a:rPr>
+                      <m:t>(</m:t>
+                    </m:r>
+                    <m:r>
+                      <m:rPr>
+                        <m:nor/>
+                      </m:rPr>
+                      <a:rPr lang="en-US" altLang="zh-TW" dirty="0">
+                        <a:ea typeface="Cambria Math" panose="02040503050406030204" pitchFamily="18" charset="0"/>
+                      </a:rPr>
+                      <m:t>Single</m:t>
+                    </m:r>
+                    <m:r>
+                      <m:rPr>
+                        <m:nor/>
+                      </m:rPr>
+                      <a:rPr lang="en-US" altLang="zh-TW" dirty="0">
+                        <a:ea typeface="Cambria Math" panose="02040503050406030204" pitchFamily="18" charset="0"/>
+                      </a:rPr>
+                      <m:t> </m:t>
+                    </m:r>
+                    <m:r>
+                      <m:rPr>
+                        <m:nor/>
+                      </m:rPr>
+                      <a:rPr lang="en-US" altLang="zh-TW" dirty="0">
+                        <a:ea typeface="Cambria Math" panose="02040503050406030204" pitchFamily="18" charset="0"/>
+                      </a:rPr>
+                      <m:t>parameter</m:t>
+                    </m:r>
+                    <m:r>
+                      <m:rPr>
+                        <m:nor/>
+                      </m:rPr>
+                      <a:rPr lang="en-US" altLang="zh-TW" dirty="0">
+                        <a:ea typeface="Cambria Math" panose="02040503050406030204" pitchFamily="18" charset="0"/>
+                      </a:rPr>
+                      <m:t>)</m:t>
+                    </m:r>
+                  </m:oMath>
+                </a14:m>
+                <a:endParaRPr lang="en-US" altLang="zh-TW" dirty="0">
+                  <a:ea typeface="Cambria Math" panose="02040503050406030204" pitchFamily="18" charset="0"/>
+                </a:endParaRPr>
+              </a:p>
+              <a:p>
+                <a:pPr marL="742950" lvl="1" indent="-285750">
+                  <a:buFont typeface="Wingdings" panose="05000000000000000000" pitchFamily="2" charset="2"/>
+                  <a:buChar char="Ø"/>
+                </a:pPr>
+                <a:endParaRPr lang="en-US" altLang="zh-TW" b="0" dirty="0"/>
+              </a:p>
+              <a:p>
+                <a:pPr marL="742950" lvl="1" indent="-285750">
+                  <a:buFont typeface="Wingdings" panose="05000000000000000000" pitchFamily="2" charset="2"/>
+                  <a:buChar char="Ø"/>
+                </a:pPr>
+                <a14:m>
+                  <m:oMath xmlns:m="http://schemas.openxmlformats.org/officeDocument/2006/math">
+                    <m:r>
+                      <m:rPr>
+                        <m:sty m:val="p"/>
+                      </m:rPr>
+                      <a:rPr lang="en-US" altLang="zh-TW" i="1" dirty="0" smtClean="0">
+                        <a:latin typeface="Cambria Math" panose="02040503050406030204" pitchFamily="18" charset="0"/>
+                        <a:ea typeface="Cambria Math" panose="02040503050406030204" pitchFamily="18" charset="0"/>
+                      </a:rPr>
+                      <m:t>RM</m:t>
+                    </m:r>
+                    <m:r>
+                      <m:rPr>
+                        <m:sty m:val="p"/>
+                      </m:rPr>
+                      <a:rPr lang="en-US" altLang="zh-TW" i="1" dirty="0">
+                        <a:latin typeface="Cambria Math" panose="02040503050406030204" pitchFamily="18" charset="0"/>
+                        <a:ea typeface="Cambria Math" panose="02040503050406030204" pitchFamily="18" charset="0"/>
+                      </a:rPr>
+                      <m:t>S</m:t>
+                    </m:r>
+                    <m:r>
+                      <m:rPr>
+                        <m:sty m:val="p"/>
+                      </m:rPr>
+                      <a:rPr lang="en-US" altLang="zh-TW" i="1" dirty="0" smtClean="0">
+                        <a:latin typeface="Cambria Math" panose="02040503050406030204" pitchFamily="18" charset="0"/>
+                        <a:ea typeface="Cambria Math" panose="02040503050406030204" pitchFamily="18" charset="0"/>
+                      </a:rPr>
+                      <m:t>P</m:t>
+                    </m:r>
+                    <m:r>
+                      <m:rPr>
+                        <m:sty m:val="p"/>
+                      </m:rPr>
+                      <a:rPr lang="en-US" altLang="zh-TW" i="1" dirty="0">
+                        <a:latin typeface="Cambria Math" panose="02040503050406030204" pitchFamily="18" charset="0"/>
+                        <a:ea typeface="Cambria Math" panose="02040503050406030204" pitchFamily="18" charset="0"/>
+                      </a:rPr>
+                      <m:t>E</m:t>
+                    </m:r>
+                    <m:r>
+                      <a:rPr lang="en-US" altLang="zh-TW" i="1" dirty="0" smtClean="0">
+                        <a:latin typeface="Cambria Math" panose="02040503050406030204" pitchFamily="18" charset="0"/>
+                        <a:ea typeface="Cambria Math" panose="02040503050406030204" pitchFamily="18" charset="0"/>
+                      </a:rPr>
+                      <m:t>=</m:t>
+                    </m:r>
+                    <m:rad>
+                      <m:radPr>
+                        <m:degHide m:val="on"/>
+                        <m:ctrlPr>
+                          <a:rPr lang="en-US" altLang="zh-TW" b="0" i="1" smtClean="0">
+                            <a:latin typeface="Cambria Math" panose="02040503050406030204" pitchFamily="18" charset="0"/>
+                          </a:rPr>
+                        </m:ctrlPr>
+                      </m:radPr>
+                      <m:deg/>
+                      <m:e>
+                        <m:f>
+                          <m:fPr>
+                            <m:ctrlPr>
+                              <a:rPr lang="en-US" altLang="zh-TW" b="0" i="1" smtClean="0">
+                                <a:latin typeface="Cambria Math" panose="02040503050406030204" pitchFamily="18" charset="0"/>
+                              </a:rPr>
+                            </m:ctrlPr>
+                          </m:fPr>
+                          <m:num>
+                            <m:nary>
+                              <m:naryPr>
+                                <m:chr m:val="∑"/>
+                                <m:subHide m:val="on"/>
+                                <m:supHide m:val="on"/>
+                                <m:ctrlPr>
+                                  <a:rPr lang="en-US" altLang="zh-TW" b="0" i="1" smtClean="0">
+                                    <a:latin typeface="Cambria Math" panose="02040503050406030204" pitchFamily="18" charset="0"/>
+                                  </a:rPr>
+                                </m:ctrlPr>
+                              </m:naryPr>
+                              <m:sub/>
+                              <m:sup/>
+                              <m:e>
+                                <m:sSup>
+                                  <m:sSupPr>
+                                    <m:ctrlPr>
+                                      <a:rPr lang="en-US" altLang="zh-TW" b="0" i="1" smtClean="0">
+                                        <a:latin typeface="Cambria Math" panose="02040503050406030204" pitchFamily="18" charset="0"/>
+                                      </a:rPr>
+                                    </m:ctrlPr>
+                                  </m:sSupPr>
+                                  <m:e>
+                                    <m:d>
+                                      <m:dPr>
+                                        <m:begChr m:val="‖"/>
+                                        <m:endChr m:val="‖"/>
+                                        <m:ctrlPr>
+                                          <a:rPr lang="en-US" altLang="zh-TW" b="0" i="1" smtClean="0">
+                                            <a:latin typeface="Cambria Math" panose="02040503050406030204" pitchFamily="18" charset="0"/>
+                                          </a:rPr>
+                                        </m:ctrlPr>
+                                      </m:dPr>
+                                      <m:e>
+                                        <m:sSub>
+                                          <m:sSubPr>
+                                            <m:ctrlPr>
+                                              <a:rPr lang="en-US" altLang="zh-TW" b="0" i="1" smtClean="0">
+                                                <a:latin typeface="Cambria Math" panose="02040503050406030204" pitchFamily="18" charset="0"/>
+                                              </a:rPr>
+                                            </m:ctrlPr>
+                                          </m:sSubPr>
+                                          <m:e>
+                                            <m:r>
+                                              <a:rPr lang="en-US" altLang="zh-TW" b="0" i="1" smtClean="0">
+                                                <a:latin typeface="Cambria Math" panose="02040503050406030204" pitchFamily="18" charset="0"/>
+                                              </a:rPr>
+                                              <m:t>𝑏</m:t>
+                                            </m:r>
+                                          </m:e>
+                                          <m:sub>
+                                            <m:r>
+                                              <a:rPr lang="en-US" altLang="zh-TW" b="0" i="1" smtClean="0">
+                                                <a:latin typeface="Cambria Math" panose="02040503050406030204" pitchFamily="18" charset="0"/>
+                                              </a:rPr>
+                                              <m:t>𝐹𝐸𝑀</m:t>
+                                            </m:r>
+                                          </m:sub>
+                                        </m:sSub>
+                                        <m:r>
+                                          <a:rPr lang="en-US" altLang="zh-TW" b="0" i="1" smtClean="0">
+                                            <a:latin typeface="Cambria Math" panose="02040503050406030204" pitchFamily="18" charset="0"/>
+                                          </a:rPr>
+                                          <m:t>−</m:t>
+                                        </m:r>
+                                        <m:sSub>
+                                          <m:sSubPr>
+                                            <m:ctrlPr>
+                                              <a:rPr lang="en-US" altLang="zh-TW" i="1">
+                                                <a:latin typeface="Cambria Math" panose="02040503050406030204" pitchFamily="18" charset="0"/>
+                                                <a:ea typeface="Cambria Math" panose="02040503050406030204" pitchFamily="18" charset="0"/>
+                                              </a:rPr>
+                                            </m:ctrlPr>
+                                          </m:sSubPr>
+                                          <m:e>
+                                            <m:r>
+                                              <a:rPr lang="en-US" altLang="zh-TW" i="1">
+                                                <a:latin typeface="Cambria Math" panose="02040503050406030204" pitchFamily="18" charset="0"/>
+                                                <a:ea typeface="Cambria Math" panose="02040503050406030204" pitchFamily="18" charset="0"/>
+                                              </a:rPr>
+                                              <m:t>𝑆</m:t>
+                                            </m:r>
+                                          </m:e>
+                                          <m:sub>
+                                            <m:r>
+                                              <a:rPr lang="en-US" altLang="zh-TW" i="1">
+                                                <a:latin typeface="Cambria Math" panose="02040503050406030204" pitchFamily="18" charset="0"/>
+                                                <a:ea typeface="Cambria Math" panose="02040503050406030204" pitchFamily="18" charset="0"/>
+                                              </a:rPr>
+                                              <m:t>𝑖</m:t>
+                                            </m:r>
+                                          </m:sub>
+                                        </m:sSub>
+                                        <m:sPre>
+                                          <m:sPrePr>
+                                            <m:ctrlPr>
+                                              <a:rPr lang="en-US" altLang="zh-TW" i="1">
+                                                <a:latin typeface="Cambria Math" panose="02040503050406030204" pitchFamily="18" charset="0"/>
+                                                <a:ea typeface="Cambria Math" panose="02040503050406030204" pitchFamily="18" charset="0"/>
+                                              </a:rPr>
+                                            </m:ctrlPr>
+                                          </m:sPrePr>
+                                          <m:sub/>
+                                          <m:sup>
+                                            <m:r>
+                                              <a:rPr lang="en-US" altLang="zh-TW" i="1">
+                                                <a:latin typeface="Cambria Math" panose="02040503050406030204" pitchFamily="18" charset="0"/>
+                                              </a:rPr>
+                                              <m:t>𝐵</m:t>
+                                            </m:r>
+                                          </m:sup>
+                                          <m:e>
+                                            <m:sSub>
+                                              <m:sSubPr>
+                                                <m:ctrlPr>
+                                                  <a:rPr lang="en-US" altLang="zh-TW" i="1">
+                                                    <a:latin typeface="Cambria Math" panose="02040503050406030204" pitchFamily="18" charset="0"/>
+                                                  </a:rPr>
+                                                </m:ctrlPr>
+                                              </m:sSubPr>
+                                              <m:e>
+                                                <m:acc>
+                                                  <m:accPr>
+                                                    <m:chr m:val="̂"/>
+                                                    <m:ctrlPr>
+                                                      <a:rPr lang="en-US" altLang="zh-TW" i="1">
+                                                        <a:latin typeface="Cambria Math" panose="02040503050406030204" pitchFamily="18" charset="0"/>
+                                                      </a:rPr>
+                                                    </m:ctrlPr>
+                                                  </m:accPr>
+                                                  <m:e>
+                                                    <m:r>
+                                                      <a:rPr lang="en-US" altLang="zh-TW" i="1">
+                                                        <a:latin typeface="Cambria Math" panose="02040503050406030204" pitchFamily="18" charset="0"/>
+                                                      </a:rPr>
+                                                      <m:t>𝑔</m:t>
+                                                    </m:r>
+                                                  </m:e>
+                                                </m:acc>
+                                              </m:e>
+                                              <m:sub>
+                                                <m:r>
+                                                  <a:rPr lang="en-US" altLang="zh-TW" i="1">
+                                                    <a:latin typeface="Cambria Math" panose="02040503050406030204" pitchFamily="18" charset="0"/>
+                                                  </a:rPr>
+                                                  <m:t>𝑉</m:t>
+                                                </m:r>
+                                              </m:sub>
+                                            </m:sSub>
+                                          </m:e>
+                                        </m:sPre>
+                                        <m:acc>
+                                          <m:accPr>
+                                            <m:chr m:val="̅"/>
+                                            <m:ctrlPr>
+                                              <a:rPr lang="zh-TW" altLang="en-US" i="1">
+                                                <a:latin typeface="Cambria Math" panose="02040503050406030204" pitchFamily="18" charset="0"/>
+                                              </a:rPr>
+                                            </m:ctrlPr>
+                                          </m:accPr>
+                                          <m:e>
+                                            <m:r>
+                                              <a:rPr lang="en-US" altLang="zh-TW" i="1">
+                                                <a:latin typeface="Cambria Math" panose="02040503050406030204" pitchFamily="18" charset="0"/>
+                                              </a:rPr>
+                                              <m:t>𝐷</m:t>
+                                            </m:r>
+                                          </m:e>
+                                        </m:acc>
+                                        <m:sSub>
+                                          <m:sSubPr>
+                                            <m:ctrlPr>
+                                              <a:rPr lang="en-US" altLang="zh-TW" i="1">
+                                                <a:latin typeface="Cambria Math" panose="02040503050406030204" pitchFamily="18" charset="0"/>
+                                              </a:rPr>
+                                            </m:ctrlPr>
+                                          </m:sSubPr>
+                                          <m:e>
+                                            <m:r>
+                                              <a:rPr lang="en-US" altLang="zh-TW" i="1">
+                                                <a:latin typeface="Cambria Math" panose="02040503050406030204" pitchFamily="18" charset="0"/>
+                                              </a:rPr>
+                                              <m:t>𝑉</m:t>
+                                            </m:r>
+                                          </m:e>
+                                          <m:sub>
+                                            <m:r>
+                                              <a:rPr lang="en-US" altLang="zh-TW" i="1">
+                                                <a:latin typeface="Cambria Math" panose="02040503050406030204" pitchFamily="18" charset="0"/>
+                                              </a:rPr>
+                                              <m:t>𝑗</m:t>
+                                            </m:r>
+                                          </m:sub>
+                                        </m:sSub>
+                                      </m:e>
+                                    </m:d>
+                                  </m:e>
+                                  <m:sup>
+                                    <m:r>
+                                      <a:rPr lang="en-US" altLang="zh-TW" b="0" i="1" smtClean="0">
+                                        <a:latin typeface="Cambria Math" panose="02040503050406030204" pitchFamily="18" charset="0"/>
+                                      </a:rPr>
+                                      <m:t>2</m:t>
+                                    </m:r>
+                                  </m:sup>
+                                </m:sSup>
+                              </m:e>
+                            </m:nary>
+                          </m:num>
+                          <m:den>
+                            <m:nary>
+                              <m:naryPr>
+                                <m:chr m:val="∑"/>
+                                <m:subHide m:val="on"/>
+                                <m:supHide m:val="on"/>
+                                <m:ctrlPr>
+                                  <a:rPr lang="en-US" altLang="zh-TW" b="0" i="1" smtClean="0">
+                                    <a:latin typeface="Cambria Math" panose="02040503050406030204" pitchFamily="18" charset="0"/>
+                                  </a:rPr>
+                                </m:ctrlPr>
+                              </m:naryPr>
+                              <m:sub/>
+                              <m:sup/>
+                              <m:e>
+                                <m:sSup>
+                                  <m:sSupPr>
+                                    <m:ctrlPr>
+                                      <a:rPr lang="en-US" altLang="zh-TW" b="0" i="1" smtClean="0">
+                                        <a:latin typeface="Cambria Math" panose="02040503050406030204" pitchFamily="18" charset="0"/>
+                                      </a:rPr>
+                                    </m:ctrlPr>
+                                  </m:sSupPr>
+                                  <m:e>
+                                    <m:d>
+                                      <m:dPr>
+                                        <m:begChr m:val="‖"/>
+                                        <m:endChr m:val="‖"/>
+                                        <m:ctrlPr>
+                                          <a:rPr lang="en-US" altLang="zh-TW" b="0" i="1" smtClean="0">
+                                            <a:latin typeface="Cambria Math" panose="02040503050406030204" pitchFamily="18" charset="0"/>
+                                          </a:rPr>
+                                        </m:ctrlPr>
+                                      </m:dPr>
+                                      <m:e>
+                                        <m:sSub>
+                                          <m:sSubPr>
+                                            <m:ctrlPr>
+                                              <a:rPr lang="en-US" altLang="zh-TW" b="0" i="1" smtClean="0">
+                                                <a:latin typeface="Cambria Math" panose="02040503050406030204" pitchFamily="18" charset="0"/>
+                                              </a:rPr>
+                                            </m:ctrlPr>
+                                          </m:sSubPr>
+                                          <m:e>
+                                            <m:r>
+                                              <a:rPr lang="en-US" altLang="zh-TW" b="0" i="1" smtClean="0">
+                                                <a:latin typeface="Cambria Math" panose="02040503050406030204" pitchFamily="18" charset="0"/>
+                                              </a:rPr>
+                                              <m:t>𝑏</m:t>
+                                            </m:r>
+                                          </m:e>
+                                          <m:sub>
+                                            <m:r>
+                                              <a:rPr lang="en-US" altLang="zh-TW" b="0" i="1" smtClean="0">
+                                                <a:latin typeface="Cambria Math" panose="02040503050406030204" pitchFamily="18" charset="0"/>
+                                              </a:rPr>
+                                              <m:t>𝐹𝐸𝑀</m:t>
+                                            </m:r>
+                                          </m:sub>
+                                        </m:sSub>
+                                      </m:e>
+                                    </m:d>
+                                  </m:e>
+                                  <m:sup>
+                                    <m:r>
+                                      <a:rPr lang="en-US" altLang="zh-TW" b="0" i="1" smtClean="0">
+                                        <a:latin typeface="Cambria Math" panose="02040503050406030204" pitchFamily="18" charset="0"/>
+                                      </a:rPr>
+                                      <m:t>2</m:t>
+                                    </m:r>
+                                  </m:sup>
+                                </m:sSup>
+                              </m:e>
+                            </m:nary>
+                          </m:den>
+                        </m:f>
+                      </m:e>
+                    </m:rad>
+                    <m:r>
+                      <a:rPr lang="en-US" altLang="zh-TW" b="0" i="1" smtClean="0">
+                        <a:latin typeface="Cambria Math" panose="02040503050406030204" pitchFamily="18" charset="0"/>
+                        <a:ea typeface="Cambria Math" panose="02040503050406030204" pitchFamily="18" charset="0"/>
+                      </a:rPr>
+                      <m:t>×100</m:t>
                     </m:r>
                     <m:r>
                       <a:rPr lang="en-US" altLang="zh-TW" b="0" i="1" smtClean="0">
                         <a:latin typeface="Cambria Math" panose="02040503050406030204" pitchFamily="18" charset="0"/>
                       </a:rPr>
-                      <m:t>%</m:t>
+                      <m:t>=2.06%</m:t>
                     </m:r>
                     <m:r>
                       <m:rPr>
@@ -5478,7 +5396,7 @@
             </p:txBody>
           </p:sp>
         </mc:Choice>
-        <mc:Fallback>
+        <mc:Fallback xmlns="">
           <p:sp>
             <p:nvSpPr>
               <p:cNvPr id="9" name="文字方塊 8">
@@ -6002,8 +5920,8 @@
           </a:p>
         </p:txBody>
       </p:sp>
-      <mc:AlternateContent xmlns:mc="http://schemas.openxmlformats.org/markup-compatibility/2006">
-        <mc:Choice xmlns:a14="http://schemas.microsoft.com/office/drawing/2010/main" Requires="a14">
+      <mc:AlternateContent xmlns:mc="http://schemas.openxmlformats.org/markup-compatibility/2006" xmlns:a14="http://schemas.microsoft.com/office/drawing/2010/main">
+        <mc:Choice Requires="a14">
           <p:sp>
             <p:nvSpPr>
               <p:cNvPr id="11" name="文字方塊 10">
@@ -6899,7 +6817,7 @@
             </p:txBody>
           </p:sp>
         </mc:Choice>
-        <mc:Fallback>
+        <mc:Fallback xmlns="">
           <p:sp>
             <p:nvSpPr>
               <p:cNvPr id="11" name="文字方塊 10">
@@ -6944,8 +6862,8 @@
           </p:sp>
         </mc:Fallback>
       </mc:AlternateContent>
-      <mc:AlternateContent xmlns:mc="http://schemas.openxmlformats.org/markup-compatibility/2006">
-        <mc:Choice xmlns:a14="http://schemas.microsoft.com/office/drawing/2010/main" Requires="a14">
+      <mc:AlternateContent xmlns:mc="http://schemas.openxmlformats.org/markup-compatibility/2006" xmlns:a14="http://schemas.microsoft.com/office/drawing/2010/main">
+        <mc:Choice Requires="a14">
           <p:sp>
             <p:nvSpPr>
               <p:cNvPr id="12" name="文字方塊 11">
@@ -7020,7 +6938,7 @@
             </p:txBody>
           </p:sp>
         </mc:Choice>
-        <mc:Fallback>
+        <mc:Fallback xmlns="">
           <p:sp>
             <p:nvSpPr>
               <p:cNvPr id="12" name="文字方塊 11">
@@ -7065,8 +6983,8 @@
           </p:sp>
         </mc:Fallback>
       </mc:AlternateContent>
-      <mc:AlternateContent xmlns:mc="http://schemas.openxmlformats.org/markup-compatibility/2006">
-        <mc:Choice xmlns:a14="http://schemas.microsoft.com/office/drawing/2010/main" Requires="a14">
+      <mc:AlternateContent xmlns:mc="http://schemas.openxmlformats.org/markup-compatibility/2006" xmlns:a14="http://schemas.microsoft.com/office/drawing/2010/main">
+        <mc:Choice Requires="a14">
           <p:sp>
             <p:nvSpPr>
               <p:cNvPr id="13" name="文字方塊 12">
@@ -7191,7 +7109,7 @@
             </p:txBody>
           </p:sp>
         </mc:Choice>
-        <mc:Fallback>
+        <mc:Fallback xmlns="">
           <p:sp>
             <p:nvSpPr>
               <p:cNvPr id="13" name="文字方塊 12">
@@ -7339,8 +7257,8 @@
         </p:blipFill>
         <p:spPr>
           <a:xfrm>
-            <a:off x="414867" y="3059535"/>
-            <a:ext cx="4147532" cy="3533357"/>
+            <a:off x="414867" y="3045429"/>
+            <a:ext cx="4147532" cy="3547463"/>
           </a:xfrm>
           <a:prstGeom prst="rect">
             <a:avLst/>
@@ -7375,7 +7293,7 @@
         </p:blipFill>
         <p:spPr>
           <a:xfrm>
-            <a:off x="5942880" y="2828764"/>
+            <a:off x="6230747" y="2885359"/>
             <a:ext cx="4342061" cy="3764128"/>
           </a:xfrm>
           <a:prstGeom prst="rect">
@@ -7862,8 +7780,8 @@
           </a:p>
         </p:txBody>
       </p:sp>
-      <mc:AlternateContent xmlns:mc="http://schemas.openxmlformats.org/markup-compatibility/2006">
-        <mc:Choice xmlns:a14="http://schemas.microsoft.com/office/drawing/2010/main" Requires="a14">
+      <mc:AlternateContent xmlns:mc="http://schemas.openxmlformats.org/markup-compatibility/2006" xmlns:a14="http://schemas.microsoft.com/office/drawing/2010/main">
+        <mc:Choice Requires="a14">
           <p:sp>
             <p:nvSpPr>
               <p:cNvPr id="11" name="文字方塊 10">
@@ -8759,7 +8677,7 @@
             </p:txBody>
           </p:sp>
         </mc:Choice>
-        <mc:Fallback>
+        <mc:Fallback xmlns="">
           <p:sp>
             <p:nvSpPr>
               <p:cNvPr id="11" name="文字方塊 10">
@@ -8804,8 +8722,8 @@
           </p:sp>
         </mc:Fallback>
       </mc:AlternateContent>
-      <mc:AlternateContent xmlns:mc="http://schemas.openxmlformats.org/markup-compatibility/2006">
-        <mc:Choice xmlns:a14="http://schemas.microsoft.com/office/drawing/2010/main" Requires="a14">
+      <mc:AlternateContent xmlns:mc="http://schemas.openxmlformats.org/markup-compatibility/2006" xmlns:a14="http://schemas.microsoft.com/office/drawing/2010/main">
+        <mc:Choice Requires="a14">
           <p:sp>
             <p:nvSpPr>
               <p:cNvPr id="12" name="文字方塊 11">
@@ -8880,7 +8798,7 @@
             </p:txBody>
           </p:sp>
         </mc:Choice>
-        <mc:Fallback>
+        <mc:Fallback xmlns="">
           <p:sp>
             <p:nvSpPr>
               <p:cNvPr id="12" name="文字方塊 11">
@@ -8925,8 +8843,8 @@
           </p:sp>
         </mc:Fallback>
       </mc:AlternateContent>
-      <mc:AlternateContent xmlns:mc="http://schemas.openxmlformats.org/markup-compatibility/2006">
-        <mc:Choice xmlns:a14="http://schemas.microsoft.com/office/drawing/2010/main" Requires="a14">
+      <mc:AlternateContent xmlns:mc="http://schemas.openxmlformats.org/markup-compatibility/2006" xmlns:a14="http://schemas.microsoft.com/office/drawing/2010/main">
+        <mc:Choice Requires="a14">
           <p:sp>
             <p:nvSpPr>
               <p:cNvPr id="13" name="文字方塊 12">
@@ -9051,7 +8969,7 @@
             </p:txBody>
           </p:sp>
         </mc:Choice>
-        <mc:Fallback>
+        <mc:Fallback xmlns="">
           <p:sp>
             <p:nvSpPr>
               <p:cNvPr id="13" name="文字方塊 12">
@@ -9962,8 +9880,8 @@
           </p:sp>
         </mc:Fallback>
       </mc:AlternateContent>
-      <mc:AlternateContent xmlns:mc="http://schemas.openxmlformats.org/markup-compatibility/2006">
-        <mc:Choice xmlns:a14="http://schemas.microsoft.com/office/drawing/2010/main" Requires="a14">
+      <mc:AlternateContent xmlns:mc="http://schemas.openxmlformats.org/markup-compatibility/2006" xmlns:a14="http://schemas.microsoft.com/office/drawing/2010/main">
+        <mc:Choice Requires="a14">
           <p:sp>
             <p:nvSpPr>
               <p:cNvPr id="11" name="文字方塊 10">
@@ -10055,7 +9973,7 @@
             </p:txBody>
           </p:sp>
         </mc:Choice>
-        <mc:Fallback>
+        <mc:Fallback xmlns="">
           <p:sp>
             <p:nvSpPr>
               <p:cNvPr id="11" name="文字方塊 10">
@@ -10575,8 +10493,8 @@
           </p:sp>
         </mc:Fallback>
       </mc:AlternateContent>
-      <mc:AlternateContent xmlns:mc="http://schemas.openxmlformats.org/markup-compatibility/2006">
-        <mc:Choice xmlns:a14="http://schemas.microsoft.com/office/drawing/2010/main" Requires="a14">
+      <mc:AlternateContent xmlns:mc="http://schemas.openxmlformats.org/markup-compatibility/2006" xmlns:a14="http://schemas.microsoft.com/office/drawing/2010/main">
+        <mc:Choice Requires="a14">
           <p:sp>
             <p:nvSpPr>
               <p:cNvPr id="11" name="文字方塊 10">
@@ -10668,7 +10586,7 @@
             </p:txBody>
           </p:sp>
         </mc:Choice>
-        <mc:Fallback>
+        <mc:Fallback xmlns="">
           <p:sp>
             <p:nvSpPr>
               <p:cNvPr id="11" name="文字方塊 10">
@@ -11284,8 +11202,8 @@
             </a:prstGeom>
           </p:spPr>
         </p:pic>
-        <mc:AlternateContent xmlns:mc="http://schemas.openxmlformats.org/markup-compatibility/2006">
-          <mc:Choice xmlns:a14="http://schemas.microsoft.com/office/drawing/2010/main" Requires="a14">
+        <mc:AlternateContent xmlns:mc="http://schemas.openxmlformats.org/markup-compatibility/2006" xmlns:a14="http://schemas.microsoft.com/office/drawing/2010/main">
+          <mc:Choice Requires="a14">
             <p:sp>
               <p:nvSpPr>
                 <p:cNvPr id="21" name="文字方塊 20">
@@ -11314,6 +11232,7 @@
                 </a:bodyPr>
                 <a:lstStyle/>
                 <a:p>
+                  <a:pPr/>
                   <a14:m>
                     <m:oMathPara xmlns:m="http://schemas.openxmlformats.org/officeDocument/2006/math">
                       <m:oMathParaPr>
@@ -11370,7 +11289,7 @@
               </p:txBody>
             </p:sp>
           </mc:Choice>
-          <mc:Fallback>
+          <mc:Fallback xmlns="">
             <p:sp>
               <p:nvSpPr>
                 <p:cNvPr id="21" name="文字方塊 20">
@@ -11415,8 +11334,8 @@
             </p:sp>
           </mc:Fallback>
         </mc:AlternateContent>
-        <mc:AlternateContent xmlns:mc="http://schemas.openxmlformats.org/markup-compatibility/2006">
-          <mc:Choice xmlns:a14="http://schemas.microsoft.com/office/drawing/2010/main" Requires="a14">
+        <mc:AlternateContent xmlns:mc="http://schemas.openxmlformats.org/markup-compatibility/2006" xmlns:a14="http://schemas.microsoft.com/office/drawing/2010/main">
+          <mc:Choice Requires="a14">
             <p:sp>
               <p:nvSpPr>
                 <p:cNvPr id="22" name="文字方塊 21">
@@ -11445,6 +11364,7 @@
                 </a:bodyPr>
                 <a:lstStyle/>
                 <a:p>
+                  <a:pPr/>
                   <a14:m>
                     <m:oMathPara xmlns:m="http://schemas.openxmlformats.org/officeDocument/2006/math">
                       <m:oMathParaPr>
@@ -11501,7 +11421,7 @@
               </p:txBody>
             </p:sp>
           </mc:Choice>
-          <mc:Fallback>
+          <mc:Fallback xmlns="">
             <p:sp>
               <p:nvSpPr>
                 <p:cNvPr id="22" name="文字方塊 21">
@@ -11546,8 +11466,8 @@
             </p:sp>
           </mc:Fallback>
         </mc:AlternateContent>
-        <mc:AlternateContent xmlns:mc="http://schemas.openxmlformats.org/markup-compatibility/2006">
-          <mc:Choice xmlns:a14="http://schemas.microsoft.com/office/drawing/2010/main" Requires="a14">
+        <mc:AlternateContent xmlns:mc="http://schemas.openxmlformats.org/markup-compatibility/2006" xmlns:a14="http://schemas.microsoft.com/office/drawing/2010/main">
+          <mc:Choice Requires="a14">
             <p:sp>
               <p:nvSpPr>
                 <p:cNvPr id="23" name="文字方塊 22">
@@ -11576,6 +11496,7 @@
                 </a:bodyPr>
                 <a:lstStyle/>
                 <a:p>
+                  <a:pPr/>
                   <a14:m>
                     <m:oMathPara xmlns:m="http://schemas.openxmlformats.org/officeDocument/2006/math">
                       <m:oMathParaPr>
@@ -11632,7 +11553,7 @@
               </p:txBody>
             </p:sp>
           </mc:Choice>
-          <mc:Fallback>
+          <mc:Fallback xmlns="">
             <p:sp>
               <p:nvSpPr>
                 <p:cNvPr id="23" name="文字方塊 22">
@@ -11677,8 +11598,8 @@
             </p:sp>
           </mc:Fallback>
         </mc:AlternateContent>
-        <mc:AlternateContent xmlns:mc="http://schemas.openxmlformats.org/markup-compatibility/2006">
-          <mc:Choice xmlns:a14="http://schemas.microsoft.com/office/drawing/2010/main" Requires="a14">
+        <mc:AlternateContent xmlns:mc="http://schemas.openxmlformats.org/markup-compatibility/2006" xmlns:a14="http://schemas.microsoft.com/office/drawing/2010/main">
+          <mc:Choice Requires="a14">
             <p:sp>
               <p:nvSpPr>
                 <p:cNvPr id="24" name="文字方塊 23">
@@ -11707,6 +11628,7 @@
                 </a:bodyPr>
                 <a:lstStyle/>
                 <a:p>
+                  <a:pPr/>
                   <a14:m>
                     <m:oMathPara xmlns:m="http://schemas.openxmlformats.org/officeDocument/2006/math">
                       <m:oMathParaPr>
@@ -11752,7 +11674,7 @@
               </p:txBody>
             </p:sp>
           </mc:Choice>
-          <mc:Fallback>
+          <mc:Fallback xmlns="">
             <p:sp>
               <p:nvSpPr>
                 <p:cNvPr id="24" name="文字方塊 23">
@@ -11797,8 +11719,8 @@
             </p:sp>
           </mc:Fallback>
         </mc:AlternateContent>
-        <mc:AlternateContent xmlns:mc="http://schemas.openxmlformats.org/markup-compatibility/2006">
-          <mc:Choice xmlns:a14="http://schemas.microsoft.com/office/drawing/2010/main" Requires="a14">
+        <mc:AlternateContent xmlns:mc="http://schemas.openxmlformats.org/markup-compatibility/2006" xmlns:a14="http://schemas.microsoft.com/office/drawing/2010/main">
+          <mc:Choice Requires="a14">
             <p:sp>
               <p:nvSpPr>
                 <p:cNvPr id="25" name="文字方塊 24">
@@ -11827,6 +11749,7 @@
                 </a:bodyPr>
                 <a:lstStyle/>
                 <a:p>
+                  <a:pPr/>
                   <a14:m>
                     <m:oMathPara xmlns:m="http://schemas.openxmlformats.org/officeDocument/2006/math">
                       <m:oMathParaPr>
@@ -11872,7 +11795,7 @@
               </p:txBody>
             </p:sp>
           </mc:Choice>
-          <mc:Fallback>
+          <mc:Fallback xmlns="">
             <p:sp>
               <p:nvSpPr>
                 <p:cNvPr id="25" name="文字方塊 24">
@@ -11917,8 +11840,8 @@
             </p:sp>
           </mc:Fallback>
         </mc:AlternateContent>
-        <mc:AlternateContent xmlns:mc="http://schemas.openxmlformats.org/markup-compatibility/2006">
-          <mc:Choice xmlns:a14="http://schemas.microsoft.com/office/drawing/2010/main" Requires="a14">
+        <mc:AlternateContent xmlns:mc="http://schemas.openxmlformats.org/markup-compatibility/2006" xmlns:a14="http://schemas.microsoft.com/office/drawing/2010/main">
+          <mc:Choice Requires="a14">
             <p:sp>
               <p:nvSpPr>
                 <p:cNvPr id="26" name="文字方塊 25">
@@ -11947,6 +11870,7 @@
                 </a:bodyPr>
                 <a:lstStyle/>
                 <a:p>
+                  <a:pPr/>
                   <a14:m>
                     <m:oMathPara xmlns:m="http://schemas.openxmlformats.org/officeDocument/2006/math">
                       <m:oMathParaPr>
@@ -11998,7 +11922,7 @@
               </p:txBody>
             </p:sp>
           </mc:Choice>
-          <mc:Fallback>
+          <mc:Fallback xmlns="">
             <p:sp>
               <p:nvSpPr>
                 <p:cNvPr id="26" name="文字方塊 25">
@@ -12043,8 +11967,8 @@
             </p:sp>
           </mc:Fallback>
         </mc:AlternateContent>
-        <mc:AlternateContent xmlns:mc="http://schemas.openxmlformats.org/markup-compatibility/2006">
-          <mc:Choice xmlns:a14="http://schemas.microsoft.com/office/drawing/2010/main" Requires="a14">
+        <mc:AlternateContent xmlns:mc="http://schemas.openxmlformats.org/markup-compatibility/2006" xmlns:a14="http://schemas.microsoft.com/office/drawing/2010/main">
+          <mc:Choice Requires="a14">
             <p:sp>
               <p:nvSpPr>
                 <p:cNvPr id="27" name="文字方塊 26">
@@ -12073,6 +11997,7 @@
                 </a:bodyPr>
                 <a:lstStyle/>
                 <a:p>
+                  <a:pPr/>
                   <a14:m>
                     <m:oMathPara xmlns:m="http://schemas.openxmlformats.org/officeDocument/2006/math">
                       <m:oMathParaPr>
@@ -12124,7 +12049,7 @@
               </p:txBody>
             </p:sp>
           </mc:Choice>
-          <mc:Fallback>
+          <mc:Fallback xmlns="">
             <p:sp>
               <p:nvSpPr>
                 <p:cNvPr id="27" name="文字方塊 26">
@@ -12169,8 +12094,8 @@
             </p:sp>
           </mc:Fallback>
         </mc:AlternateContent>
-        <mc:AlternateContent xmlns:mc="http://schemas.openxmlformats.org/markup-compatibility/2006">
-          <mc:Choice xmlns:a14="http://schemas.microsoft.com/office/drawing/2010/main" Requires="a14">
+        <mc:AlternateContent xmlns:mc="http://schemas.openxmlformats.org/markup-compatibility/2006" xmlns:a14="http://schemas.microsoft.com/office/drawing/2010/main">
+          <mc:Choice Requires="a14">
             <p:sp>
               <p:nvSpPr>
                 <p:cNvPr id="28" name="文字方塊 27">
@@ -12199,6 +12124,7 @@
                 </a:bodyPr>
                 <a:lstStyle/>
                 <a:p>
+                  <a:pPr/>
                   <a14:m>
                     <m:oMathPara xmlns:m="http://schemas.openxmlformats.org/officeDocument/2006/math">
                       <m:oMathParaPr>
@@ -12210,7 +12136,7 @@
                             <m:begChr m:val="‖"/>
                             <m:endChr m:val="‖"/>
                             <m:ctrlPr>
-                              <a:rPr lang="en-US" altLang="zh-TW" sz="2000" b="1" smtClean="0">
+                              <a:rPr lang="en-US" altLang="zh-TW" sz="2000" b="1" i="1" smtClean="0">
                                 <a:latin typeface="Cambria Math" panose="02040503050406030204" pitchFamily="18" charset="0"/>
                               </a:rPr>
                             </m:ctrlPr>
@@ -12250,7 +12176,7 @@
               </p:txBody>
             </p:sp>
           </mc:Choice>
-          <mc:Fallback>
+          <mc:Fallback xmlns="">
             <p:sp>
               <p:nvSpPr>
                 <p:cNvPr id="28" name="文字方塊 27">
@@ -12449,8 +12375,8 @@
           </a:prstGeom>
         </p:spPr>
       </p:pic>
-      <mc:AlternateContent xmlns:mc="http://schemas.openxmlformats.org/markup-compatibility/2006">
-        <mc:Choice xmlns:a14="http://schemas.microsoft.com/office/drawing/2010/main" Requires="a14">
+      <mc:AlternateContent xmlns:mc="http://schemas.openxmlformats.org/markup-compatibility/2006" xmlns:a14="http://schemas.microsoft.com/office/drawing/2010/main">
+        <mc:Choice Requires="a14">
           <p:sp>
             <p:nvSpPr>
               <p:cNvPr id="10" name="文字方塊 9">
@@ -12520,7 +12446,7 @@
             </p:txBody>
           </p:sp>
         </mc:Choice>
-        <mc:Fallback>
+        <mc:Fallback xmlns="">
           <p:sp>
             <p:nvSpPr>
               <p:cNvPr id="10" name="文字方塊 9">
@@ -12646,8 +12572,8 @@
           </a:p>
         </p:txBody>
       </p:sp>
-      <mc:AlternateContent xmlns:mc="http://schemas.openxmlformats.org/markup-compatibility/2006">
-        <mc:Choice xmlns:a14="http://schemas.microsoft.com/office/drawing/2010/main" Requires="a14">
+      <mc:AlternateContent xmlns:mc="http://schemas.openxmlformats.org/markup-compatibility/2006" xmlns:a14="http://schemas.microsoft.com/office/drawing/2010/main">
+        <mc:Choice Requires="a14">
           <p:sp>
             <p:nvSpPr>
               <p:cNvPr id="9" name="文字方塊 8">
@@ -12717,7 +12643,7 @@
             </p:txBody>
           </p:sp>
         </mc:Choice>
-        <mc:Fallback>
+        <mc:Fallback xmlns="">
           <p:sp>
             <p:nvSpPr>
               <p:cNvPr id="9" name="文字方塊 8">
